--- a/DózsaCsárda_PA_FB_PG.pptx
+++ b/DózsaCsárda_PA_FB_PG.pptx
@@ -834,7 +834,7 @@
           <a:p>
             <a:fld id="{1F6FFA99-551E-45B4-8370-7EE47DE7A2D9}" type="datetimeFigureOut">
               <a:rPr lang="hu-HU" smtClean="0"/>
-              <a:t>2026.03.04.</a:t>
+              <a:t>2026.03.05.</a:t>
             </a:fld>
             <a:endParaRPr lang="hu-HU"/>
           </a:p>
@@ -1314,7 +1314,7 @@
           <a:p>
             <a:fld id="{DB0193E8-478D-464D-8400-8CD4306FD776}" type="datetimeFigureOut">
               <a:rPr lang="hu-HU" smtClean="0"/>
-              <a:t>2026.03.04.</a:t>
+              <a:t>2026.03.05.</a:t>
             </a:fld>
             <a:endParaRPr lang="hu-HU"/>
           </a:p>
@@ -1482,7 +1482,7 @@
           <a:p>
             <a:fld id="{DB0193E8-478D-464D-8400-8CD4306FD776}" type="datetimeFigureOut">
               <a:rPr lang="hu-HU" smtClean="0"/>
-              <a:t>2026.03.04.</a:t>
+              <a:t>2026.03.05.</a:t>
             </a:fld>
             <a:endParaRPr lang="hu-HU"/>
           </a:p>
@@ -1660,7 +1660,7 @@
           <a:p>
             <a:fld id="{DB0193E8-478D-464D-8400-8CD4306FD776}" type="datetimeFigureOut">
               <a:rPr lang="hu-HU" smtClean="0"/>
-              <a:t>2026.03.04.</a:t>
+              <a:t>2026.03.05.</a:t>
             </a:fld>
             <a:endParaRPr lang="hu-HU"/>
           </a:p>
@@ -1828,7 +1828,7 @@
           <a:p>
             <a:fld id="{DB0193E8-478D-464D-8400-8CD4306FD776}" type="datetimeFigureOut">
               <a:rPr lang="hu-HU" smtClean="0"/>
-              <a:t>2026.03.04.</a:t>
+              <a:t>2026.03.05.</a:t>
             </a:fld>
             <a:endParaRPr lang="hu-HU"/>
           </a:p>
@@ -2073,7 +2073,7 @@
           <a:p>
             <a:fld id="{DB0193E8-478D-464D-8400-8CD4306FD776}" type="datetimeFigureOut">
               <a:rPr lang="hu-HU" smtClean="0"/>
-              <a:t>2026.03.04.</a:t>
+              <a:t>2026.03.05.</a:t>
             </a:fld>
             <a:endParaRPr lang="hu-HU"/>
           </a:p>
@@ -2302,7 +2302,7 @@
           <a:p>
             <a:fld id="{DB0193E8-478D-464D-8400-8CD4306FD776}" type="datetimeFigureOut">
               <a:rPr lang="hu-HU" smtClean="0"/>
-              <a:t>2026.03.04.</a:t>
+              <a:t>2026.03.05.</a:t>
             </a:fld>
             <a:endParaRPr lang="hu-HU"/>
           </a:p>
@@ -2666,7 +2666,7 @@
           <a:p>
             <a:fld id="{DB0193E8-478D-464D-8400-8CD4306FD776}" type="datetimeFigureOut">
               <a:rPr lang="hu-HU" smtClean="0"/>
-              <a:t>2026.03.04.</a:t>
+              <a:t>2026.03.05.</a:t>
             </a:fld>
             <a:endParaRPr lang="hu-HU"/>
           </a:p>
@@ -2783,7 +2783,7 @@
           <a:p>
             <a:fld id="{DB0193E8-478D-464D-8400-8CD4306FD776}" type="datetimeFigureOut">
               <a:rPr lang="hu-HU" smtClean="0"/>
-              <a:t>2026.03.04.</a:t>
+              <a:t>2026.03.05.</a:t>
             </a:fld>
             <a:endParaRPr lang="hu-HU"/>
           </a:p>
@@ -2878,7 +2878,7 @@
           <a:p>
             <a:fld id="{DB0193E8-478D-464D-8400-8CD4306FD776}" type="datetimeFigureOut">
               <a:rPr lang="hu-HU" smtClean="0"/>
-              <a:t>2026.03.04.</a:t>
+              <a:t>2026.03.05.</a:t>
             </a:fld>
             <a:endParaRPr lang="hu-HU"/>
           </a:p>
@@ -3153,7 +3153,7 @@
           <a:p>
             <a:fld id="{DB0193E8-478D-464D-8400-8CD4306FD776}" type="datetimeFigureOut">
               <a:rPr lang="hu-HU" smtClean="0"/>
-              <a:t>2026.03.04.</a:t>
+              <a:t>2026.03.05.</a:t>
             </a:fld>
             <a:endParaRPr lang="hu-HU"/>
           </a:p>
@@ -3405,7 +3405,7 @@
           <a:p>
             <a:fld id="{DB0193E8-478D-464D-8400-8CD4306FD776}" type="datetimeFigureOut">
               <a:rPr lang="hu-HU" smtClean="0"/>
-              <a:t>2026.03.04.</a:t>
+              <a:t>2026.03.05.</a:t>
             </a:fld>
             <a:endParaRPr lang="hu-HU"/>
           </a:p>
@@ -3616,7 +3616,7 @@
           <a:p>
             <a:fld id="{DB0193E8-478D-464D-8400-8CD4306FD776}" type="datetimeFigureOut">
               <a:rPr lang="hu-HU" smtClean="0"/>
-              <a:t>2026.03.04.</a:t>
+              <a:t>2026.03.05.</a:t>
             </a:fld>
             <a:endParaRPr lang="hu-HU"/>
           </a:p>
@@ -4087,59 +4087,6 @@
       </p:sp>
       <p:sp>
         <p:nvSpPr>
-          <p:cNvPr id="6" name="Szövegdoboz 5"/>
-          <p:cNvSpPr txBox="1"/>
-          <p:nvPr/>
-        </p:nvSpPr>
-        <p:spPr>
-          <a:xfrm>
-            <a:off x="2841566" y="4840780"/>
-            <a:ext cx="6508868" cy="1107996"/>
-          </a:xfrm>
-          <a:prstGeom prst="rect">
-            <a:avLst/>
-          </a:prstGeom>
-          <a:noFill/>
-        </p:spPr>
-        <p:txBody>
-          <a:bodyPr wrap="square" lIns="91440" tIns="45720" rIns="91440" bIns="45720" rtlCol="0" anchor="t">
-            <a:spAutoFit/>
-          </a:bodyPr>
-          <a:lstStyle/>
-          <a:p>
-            <a:pPr algn="ctr"/>
-            <a:r>
-              <a:rPr lang="hu-HU" sz="6600" b="1">
-                <a:gradFill>
-                  <a:gsLst>
-                    <a:gs pos="0">
-                      <a:schemeClr val="accent4"/>
-                    </a:gs>
-                    <a:gs pos="100000">
-                      <a:schemeClr val="accent4">
-                        <a:lumMod val="75000"/>
-                      </a:schemeClr>
-                    </a:gs>
-                  </a:gsLst>
-                  <a:lin ang="5400000" scaled="1"/>
-                </a:gradFill>
-                <a:effectLst>
-                  <a:outerShdw sx="97000" sy="97000" algn="ctr" rotWithShape="0">
-                    <a:schemeClr val="accent1">
-                      <a:lumMod val="20000"/>
-                      <a:lumOff val="80000"/>
-                    </a:schemeClr>
-                  </a:outerShdw>
-                </a:effectLst>
-                <a:latin typeface="Ink Free"/>
-              </a:rPr>
-              <a:t>DÓZSA CSÁRDA</a:t>
-            </a:r>
-          </a:p>
-        </p:txBody>
-      </p:sp>
-      <p:sp>
-        <p:nvSpPr>
           <p:cNvPr id="7" name="Szövegdoboz 6"/>
           <p:cNvSpPr txBox="1"/>
           <p:nvPr/>
@@ -4282,7 +4229,7 @@
         </p:blipFill>
         <p:spPr>
           <a:xfrm>
-            <a:off x="3715938" y="817544"/>
+            <a:off x="3734599" y="1157801"/>
             <a:ext cx="4359236" cy="4247123"/>
           </a:xfrm>
           <a:prstGeom prst="rect">
@@ -4349,7 +4296,7 @@
                                           </p:stCondLst>
                                         </p:cTn>
                                         <p:tgtEl>
-                                          <p:spTgt spid="6"/>
+                                          <p:spTgt spid="7"/>
                                         </p:tgtEl>
                                         <p:attrNameLst>
                                           <p:attrName>style.visibility</p:attrName>
@@ -4362,41 +4309,6 @@
                                     <p:animEffect transition="in" filter="randombar(horizontal)">
                                       <p:cBhvr>
                                         <p:cTn id="7" dur="500"/>
-                                        <p:tgtEl>
-                                          <p:spTgt spid="6"/>
-                                        </p:tgtEl>
-                                      </p:cBhvr>
-                                    </p:animEffect>
-                                  </p:childTnLst>
-                                </p:cTn>
-                              </p:par>
-                              <p:par>
-                                <p:cTn id="8" presetID="14" presetClass="entr" presetSubtype="10" fill="hold" grpId="0" nodeType="withEffect">
-                                  <p:stCondLst>
-                                    <p:cond delay="0"/>
-                                  </p:stCondLst>
-                                  <p:childTnLst>
-                                    <p:set>
-                                      <p:cBhvr>
-                                        <p:cTn id="9" dur="1" fill="hold">
-                                          <p:stCondLst>
-                                            <p:cond delay="0"/>
-                                          </p:stCondLst>
-                                        </p:cTn>
-                                        <p:tgtEl>
-                                          <p:spTgt spid="7"/>
-                                        </p:tgtEl>
-                                        <p:attrNameLst>
-                                          <p:attrName>style.visibility</p:attrName>
-                                        </p:attrNameLst>
-                                      </p:cBhvr>
-                                      <p:to>
-                                        <p:strVal val="visible"/>
-                                      </p:to>
-                                    </p:set>
-                                    <p:animEffect transition="in" filter="randombar(horizontal)">
-                                      <p:cBhvr>
-                                        <p:cTn id="10" dur="500"/>
                                         <p:tgtEl>
                                           <p:spTgt spid="7"/>
                                         </p:tgtEl>
@@ -4433,7 +4345,6 @@
       </p:par>
     </p:tnLst>
     <p:bldLst>
-      <p:bldP spid="6" grpId="0"/>
       <p:bldP spid="7" grpId="0"/>
     </p:bldLst>
   </p:timing>
@@ -4691,12 +4602,20 @@
           <a:lstStyle/>
           <a:p>
             <a:r>
+              <a:rPr lang="hu-HU" b="1" dirty="0">
+                <a:solidFill>
+                  <a:srgbClr val="BF9000"/>
+                </a:solidFill>
+              </a:rPr>
+              <a:t>5</a:t>
+            </a:r>
+            <a:r>
               <a:rPr lang="hu-HU" dirty="0">
                 <a:solidFill>
                   <a:srgbClr val="BF9000"/>
                 </a:solidFill>
               </a:rPr>
-              <a:t>5 kategória</a:t>
+              <a:t> kategória</a:t>
             </a:r>
           </a:p>
         </p:txBody>
@@ -5038,6 +4957,14 @@
           <a:prstGeom prst="rect">
             <a:avLst/>
           </a:prstGeom>
+          <a:ln w="38100">
+            <a:solidFill>
+              <a:schemeClr val="accent5">
+                <a:lumMod val="40000"/>
+                <a:lumOff val="60000"/>
+              </a:schemeClr>
+            </a:solidFill>
+          </a:ln>
         </p:spPr>
       </p:pic>
       <p:sp>
@@ -5054,7 +4981,7 @@
         </p:nvSpPr>
         <p:spPr>
           <a:xfrm>
-            <a:off x="0" y="4436020"/>
+            <a:off x="297905" y="4165432"/>
             <a:ext cx="3316941" cy="1200329"/>
           </a:xfrm>
           <a:prstGeom prst="rect">
@@ -6815,7 +6742,7 @@
         </p:blipFill>
         <p:spPr bwMode="auto">
           <a:xfrm>
-            <a:off x="11389997" y="765386"/>
+            <a:off x="11241370" y="967096"/>
             <a:ext cx="819151" cy="819151"/>
           </a:xfrm>
           <a:prstGeom prst="rect">
@@ -6885,12 +6812,20 @@
         </p:blipFill>
         <p:spPr>
           <a:xfrm>
-            <a:off x="4947681" y="2197001"/>
+            <a:off x="4947681" y="2143635"/>
             <a:ext cx="7128056" cy="4642616"/>
           </a:xfrm>
           <a:prstGeom prst="rect">
             <a:avLst/>
           </a:prstGeom>
+          <a:ln w="38100">
+            <a:solidFill>
+              <a:schemeClr val="accent5">
+                <a:lumMod val="40000"/>
+                <a:lumOff val="60000"/>
+              </a:schemeClr>
+            </a:solidFill>
+          </a:ln>
         </p:spPr>
       </p:pic>
       <p:sp>
@@ -6907,7 +6842,7 @@
         </p:nvSpPr>
         <p:spPr>
           <a:xfrm>
-            <a:off x="7487792" y="1732979"/>
+            <a:off x="7422187" y="1555414"/>
             <a:ext cx="2514047" cy="461665"/>
           </a:xfrm>
           <a:prstGeom prst="rect">
@@ -6962,6 +6897,14 @@
           <a:prstGeom prst="rect">
             <a:avLst/>
           </a:prstGeom>
+          <a:ln w="38100">
+            <a:solidFill>
+              <a:schemeClr val="accent5">
+                <a:lumMod val="40000"/>
+                <a:lumOff val="60000"/>
+              </a:schemeClr>
+            </a:solidFill>
+          </a:ln>
         </p:spPr>
       </p:pic>
       <p:pic>
@@ -6992,6 +6935,14 @@
           <a:prstGeom prst="rect">
             <a:avLst/>
           </a:prstGeom>
+          <a:ln w="38100">
+            <a:solidFill>
+              <a:schemeClr val="accent5">
+                <a:lumMod val="40000"/>
+                <a:lumOff val="60000"/>
+              </a:schemeClr>
+            </a:solidFill>
+          </a:ln>
         </p:spPr>
       </p:pic>
       <p:pic>
@@ -7022,6 +6973,14 @@
           <a:prstGeom prst="rect">
             <a:avLst/>
           </a:prstGeom>
+          <a:ln w="38100">
+            <a:solidFill>
+              <a:schemeClr val="accent5">
+                <a:lumMod val="40000"/>
+                <a:lumOff val="60000"/>
+              </a:schemeClr>
+            </a:solidFill>
+          </a:ln>
         </p:spPr>
       </p:pic>
       <p:sp>
@@ -11671,8 +11630,8 @@
         </p:nvSpPr>
         <p:spPr>
           <a:xfrm>
-            <a:off x="201707" y="893608"/>
-            <a:ext cx="5332785" cy="1938992"/>
+            <a:off x="3429607" y="646961"/>
+            <a:ext cx="5332785" cy="1569660"/>
           </a:xfrm>
           <a:prstGeom prst="rect">
             <a:avLst/>
@@ -11700,10 +11659,7 @@
             </a:endParaRPr>
           </a:p>
           <a:p>
-            <a:pPr marL="342900" indent="-342900">
-              <a:buFont typeface="Arial" panose="020B0604020202020204" pitchFamily="34" charset="0"/>
-              <a:buChar char="•"/>
-            </a:pPr>
+            <a:pPr algn="ctr"/>
             <a:r>
               <a:rPr lang="hu-HU" sz="2400" dirty="0">
                 <a:solidFill>
@@ -11799,6 +11755,7 @@
             </a:endParaRPr>
           </a:p>
           <a:p>
+            <a:pPr algn="ctr"/>
             <a:r>
               <a:rPr lang="hu-HU" sz="2400" dirty="0">
                 <a:solidFill>
@@ -11836,7 +11793,7 @@
         </p:blipFill>
         <p:spPr>
           <a:xfrm>
-            <a:off x="5401531" y="4833583"/>
+            <a:off x="4789551" y="4970610"/>
             <a:ext cx="4181475" cy="628650"/>
           </a:xfrm>
           <a:prstGeom prst="rect">
@@ -11874,7 +11831,7 @@
         </p:blipFill>
         <p:spPr>
           <a:xfrm>
-            <a:off x="4843865" y="5855563"/>
+            <a:off x="4789551" y="5761758"/>
             <a:ext cx="7172325" cy="866775"/>
           </a:xfrm>
           <a:prstGeom prst="rect">
@@ -11904,7 +11861,7 @@
         </p:nvSpPr>
         <p:spPr>
           <a:xfrm>
-            <a:off x="6262395" y="1395767"/>
+            <a:off x="87751" y="2263535"/>
             <a:ext cx="5535158" cy="830997"/>
           </a:xfrm>
           <a:prstGeom prst="rect">
@@ -12037,12 +11994,20 @@
         </p:blipFill>
         <p:spPr>
           <a:xfrm>
-            <a:off x="5401531" y="825944"/>
+            <a:off x="5313780" y="2378492"/>
             <a:ext cx="6790469" cy="563029"/>
           </a:xfrm>
           <a:prstGeom prst="rect">
             <a:avLst/>
           </a:prstGeom>
+          <a:ln w="38100">
+            <a:solidFill>
+              <a:schemeClr val="accent5">
+                <a:lumMod val="40000"/>
+                <a:lumOff val="60000"/>
+              </a:schemeClr>
+            </a:solidFill>
+          </a:ln>
         </p:spPr>
       </p:pic>
       <p:sp>
@@ -12059,7 +12024,7 @@
         </p:nvSpPr>
         <p:spPr>
           <a:xfrm>
-            <a:off x="810608" y="5462233"/>
+            <a:off x="87751" y="4963799"/>
             <a:ext cx="3526950" cy="461665"/>
           </a:xfrm>
           <a:prstGeom prst="rect">
@@ -12114,12 +12079,20 @@
         </p:blipFill>
         <p:spPr>
           <a:xfrm>
-            <a:off x="6601404" y="2358141"/>
+            <a:off x="5313780" y="3141446"/>
             <a:ext cx="3657246" cy="1456829"/>
           </a:xfrm>
           <a:prstGeom prst="rect">
             <a:avLst/>
           </a:prstGeom>
+          <a:ln w="38100">
+            <a:solidFill>
+              <a:schemeClr val="accent5">
+                <a:lumMod val="40000"/>
+                <a:lumOff val="60000"/>
+              </a:schemeClr>
+            </a:solidFill>
+          </a:ln>
         </p:spPr>
       </p:pic>
     </p:spTree>
@@ -12332,12 +12305,20 @@
         </p:blipFill>
         <p:spPr>
           <a:xfrm>
-            <a:off x="6876150" y="1124694"/>
+            <a:off x="6676096" y="1182972"/>
             <a:ext cx="4858428" cy="1381318"/>
           </a:xfrm>
           <a:prstGeom prst="rect">
             <a:avLst/>
           </a:prstGeom>
+          <a:ln w="38100">
+            <a:solidFill>
+              <a:schemeClr val="accent5">
+                <a:lumMod val="40000"/>
+                <a:lumOff val="60000"/>
+              </a:schemeClr>
+            </a:solidFill>
+          </a:ln>
         </p:spPr>
       </p:pic>
       <p:pic>
@@ -12362,12 +12343,20 @@
         </p:blipFill>
         <p:spPr>
           <a:xfrm>
-            <a:off x="6585597" y="2811556"/>
+            <a:off x="6676096" y="2717784"/>
             <a:ext cx="5439534" cy="2010056"/>
           </a:xfrm>
           <a:prstGeom prst="rect">
             <a:avLst/>
           </a:prstGeom>
+          <a:ln w="38100">
+            <a:solidFill>
+              <a:schemeClr val="accent5">
+                <a:lumMod val="40000"/>
+                <a:lumOff val="60000"/>
+              </a:schemeClr>
+            </a:solidFill>
+          </a:ln>
         </p:spPr>
       </p:pic>
       <p:pic>
@@ -12392,12 +12381,20 @@
         </p:blipFill>
         <p:spPr>
           <a:xfrm>
-            <a:off x="6676097" y="4950657"/>
+            <a:off x="6676096" y="4866681"/>
             <a:ext cx="5058481" cy="1857634"/>
           </a:xfrm>
           <a:prstGeom prst="rect">
             <a:avLst/>
           </a:prstGeom>
+          <a:ln w="38100">
+            <a:solidFill>
+              <a:schemeClr val="accent5">
+                <a:lumMod val="40000"/>
+                <a:lumOff val="60000"/>
+              </a:schemeClr>
+            </a:solidFill>
+          </a:ln>
         </p:spPr>
       </p:pic>
       <p:sp>
@@ -12414,7 +12411,7 @@
         </p:nvSpPr>
         <p:spPr>
           <a:xfrm>
-            <a:off x="2956327" y="1584520"/>
+            <a:off x="2756274" y="1559704"/>
             <a:ext cx="3919823" cy="461665"/>
           </a:xfrm>
           <a:prstGeom prst="rect">
@@ -12508,7 +12505,7 @@
         </p:nvSpPr>
         <p:spPr>
           <a:xfrm>
-            <a:off x="2884609" y="5502473"/>
+            <a:off x="2756273" y="5491852"/>
             <a:ext cx="3919823" cy="461665"/>
           </a:xfrm>
           <a:prstGeom prst="rect">
@@ -12974,12 +12971,20 @@
         </p:blipFill>
         <p:spPr>
           <a:xfrm>
-            <a:off x="1006028" y="982694"/>
-            <a:ext cx="10179944" cy="1194585"/>
-          </a:xfrm>
-          <a:prstGeom prst="rect">
-            <a:avLst/>
-          </a:prstGeom>
+            <a:off x="1237990" y="1004725"/>
+            <a:ext cx="9947982" cy="1194585"/>
+          </a:xfrm>
+          <a:prstGeom prst="rect">
+            <a:avLst/>
+          </a:prstGeom>
+          <a:ln w="38100">
+            <a:solidFill>
+              <a:schemeClr val="accent5">
+                <a:lumMod val="40000"/>
+                <a:lumOff val="60000"/>
+              </a:schemeClr>
+            </a:solidFill>
+          </a:ln>
         </p:spPr>
       </p:pic>
       <p:sp>
@@ -13042,12 +13047,20 @@
               </a:rPr>
             </a:br>
             <a:r>
+              <a:rPr lang="hu-HU" b="1" u="sng" dirty="0">
+                <a:solidFill>
+                  <a:srgbClr val="BF9000"/>
+                </a:solidFill>
+              </a:rPr>
+              <a:t>FONTOS!</a:t>
+            </a:r>
+            <a:r>
               <a:rPr lang="hu-HU" dirty="0">
                 <a:solidFill>
                   <a:srgbClr val="BF9000"/>
                 </a:solidFill>
               </a:rPr>
-              <a:t>FONTOS!: Nem kell utána semmit megnyitni, az </a:t>
+              <a:t>: Nem kell utána semmit megnyitni, az </a:t>
             </a:r>
             <a:r>
               <a:rPr lang="hu-HU" dirty="0" err="1">
@@ -13096,6 +13109,14 @@
           <a:prstGeom prst="rect">
             <a:avLst/>
           </a:prstGeom>
+          <a:ln w="38100">
+            <a:solidFill>
+              <a:schemeClr val="accent5">
+                <a:lumMod val="40000"/>
+                <a:lumOff val="60000"/>
+              </a:schemeClr>
+            </a:solidFill>
+          </a:ln>
         </p:spPr>
       </p:pic>
       <p:sp>
@@ -15062,7 +15083,7 @@
         </p:nvSpPr>
         <p:spPr>
           <a:xfrm>
-            <a:off x="5154706" y="1519602"/>
+            <a:off x="5237628" y="1519602"/>
             <a:ext cx="421341" cy="2116445"/>
           </a:xfrm>
           <a:prstGeom prst="upArrow">
@@ -15118,7 +15139,7 @@
         </p:nvSpPr>
         <p:spPr>
           <a:xfrm>
-            <a:off x="4715433" y="3681300"/>
+            <a:off x="4575474" y="3681300"/>
             <a:ext cx="1887072" cy="646331"/>
           </a:xfrm>
           <a:prstGeom prst="rect">
@@ -15132,6 +15153,7 @@
           </a:bodyPr>
           <a:lstStyle/>
           <a:p>
+            <a:pPr algn="ctr"/>
             <a:r>
               <a:rPr lang="hu-HU" dirty="0" err="1">
                 <a:solidFill>
@@ -15372,7 +15394,7 @@
         </p:nvSpPr>
         <p:spPr>
           <a:xfrm>
-            <a:off x="1828795" y="3118354"/>
+            <a:off x="1617010" y="3094963"/>
             <a:ext cx="2261352" cy="646331"/>
           </a:xfrm>
           <a:prstGeom prst="rect">
@@ -15386,6 +15408,7 @@
           </a:bodyPr>
           <a:lstStyle/>
           <a:p>
+            <a:pPr algn="ctr"/>
             <a:r>
               <a:rPr lang="hu-HU" dirty="0">
                 <a:solidFill>
@@ -15687,6 +15710,14 @@
           <a:prstGeom prst="rect">
             <a:avLst/>
           </a:prstGeom>
+          <a:ln w="38100">
+            <a:solidFill>
+              <a:schemeClr val="accent5">
+                <a:lumMod val="40000"/>
+                <a:lumOff val="60000"/>
+              </a:schemeClr>
+            </a:solidFill>
+          </a:ln>
         </p:spPr>
       </p:pic>
       <p:sp>
@@ -15703,8 +15734,8 @@
         </p:nvSpPr>
         <p:spPr>
           <a:xfrm>
-            <a:off x="7404847" y="3567953"/>
-            <a:ext cx="268941" cy="1210235"/>
+            <a:off x="7367524" y="3666400"/>
+            <a:ext cx="268941" cy="1124705"/>
           </a:xfrm>
           <a:prstGeom prst="upArrow">
             <a:avLst/>
@@ -15773,6 +15804,14 @@
           <a:prstGeom prst="rect">
             <a:avLst/>
           </a:prstGeom>
+          <a:ln w="38100">
+            <a:solidFill>
+              <a:schemeClr val="accent5">
+                <a:lumMod val="40000"/>
+                <a:lumOff val="60000"/>
+              </a:schemeClr>
+            </a:solidFill>
+          </a:ln>
         </p:spPr>
       </p:pic>
       <p:sp>
@@ -15789,7 +15828,7 @@
         </p:nvSpPr>
         <p:spPr>
           <a:xfrm>
-            <a:off x="4536141" y="1047062"/>
+            <a:off x="4498640" y="1047062"/>
             <a:ext cx="1207642" cy="216775"/>
           </a:xfrm>
           <a:prstGeom prst="leftArrow">

--- a/DózsaCsárda_PA_FB_PG.pptx
+++ b/DózsaCsárda_PA_FB_PG.pptx
@@ -5,7 +5,7 @@
     <p:sldMasterId id="2147483648" r:id="rId1"/>
   </p:sldMasterIdLst>
   <p:notesMasterIdLst>
-    <p:notesMasterId r:id="rId28"/>
+    <p:notesMasterId r:id="rId29"/>
   </p:notesMasterIdLst>
   <p:sldIdLst>
     <p:sldId id="256" r:id="rId2"/>
@@ -34,6 +34,7 @@
     <p:sldId id="270" r:id="rId25"/>
     <p:sldId id="283" r:id="rId26"/>
     <p:sldId id="280" r:id="rId27"/>
+    <p:sldId id="287" r:id="rId28"/>
   </p:sldIdLst>
   <p:sldSz cx="12192000" cy="6858000"/>
   <p:notesSz cx="6858000" cy="9144000"/>
@@ -13174,6 +13175,558 @@
 </p:sld>
 </file>
 
+<file path=ppt/slides/slide27.xml><?xml version="1.0" encoding="utf-8"?>
+<p:sld xmlns:a="http://schemas.openxmlformats.org/drawingml/2006/main" xmlns:r="http://schemas.openxmlformats.org/officeDocument/2006/relationships" xmlns:p="http://schemas.openxmlformats.org/presentationml/2006/main">
+  <p:cSld>
+    <p:bg>
+      <p:bgPr>
+        <a:solidFill>
+          <a:schemeClr val="accent4">
+            <a:lumMod val="20000"/>
+            <a:lumOff val="80000"/>
+          </a:schemeClr>
+        </a:solidFill>
+        <a:effectLst/>
+      </p:bgPr>
+    </p:bg>
+    <p:spTree>
+      <p:nvGrpSpPr>
+        <p:cNvPr id="1" name="">
+          <a:extLst>
+            <a:ext uri="{FF2B5EF4-FFF2-40B4-BE49-F238E27FC236}">
+              <a16:creationId xmlns:a16="http://schemas.microsoft.com/office/drawing/2014/main" id="{E16657FB-E914-0BD8-241A-425FA2DDD351}"/>
+            </a:ext>
+          </a:extLst>
+        </p:cNvPr>
+        <p:cNvGrpSpPr/>
+        <p:nvPr/>
+      </p:nvGrpSpPr>
+      <p:grpSpPr>
+        <a:xfrm>
+          <a:off x="0" y="0"/>
+          <a:ext cx="0" cy="0"/>
+          <a:chOff x="0" y="0"/>
+          <a:chExt cx="0" cy="0"/>
+        </a:xfrm>
+      </p:grpSpPr>
+      <p:sp>
+        <p:nvSpPr>
+          <p:cNvPr id="4" name="Téglalap 3">
+            <a:extLst>
+              <a:ext uri="{FF2B5EF4-FFF2-40B4-BE49-F238E27FC236}">
+                <a16:creationId xmlns:a16="http://schemas.microsoft.com/office/drawing/2014/main" id="{8954174F-1ECB-C531-91CA-330F0694812F}"/>
+              </a:ext>
+            </a:extLst>
+          </p:cNvPr>
+          <p:cNvSpPr/>
+          <p:nvPr/>
+        </p:nvSpPr>
+        <p:spPr>
+          <a:xfrm>
+            <a:off x="0" y="0"/>
+            <a:ext cx="12192000" cy="819150"/>
+          </a:xfrm>
+          <a:prstGeom prst="rect">
+            <a:avLst/>
+          </a:prstGeom>
+          <a:solidFill>
+            <a:schemeClr val="accent1">
+              <a:lumMod val="60000"/>
+              <a:lumOff val="40000"/>
+            </a:schemeClr>
+          </a:solidFill>
+          <a:ln>
+            <a:noFill/>
+          </a:ln>
+        </p:spPr>
+        <p:style>
+          <a:lnRef idx="2">
+            <a:schemeClr val="accent1">
+              <a:shade val="50000"/>
+            </a:schemeClr>
+          </a:lnRef>
+          <a:fillRef idx="1">
+            <a:schemeClr val="accent1"/>
+          </a:fillRef>
+          <a:effectRef idx="0">
+            <a:schemeClr val="accent1"/>
+          </a:effectRef>
+          <a:fontRef idx="minor">
+            <a:schemeClr val="lt1"/>
+          </a:fontRef>
+        </p:style>
+        <p:txBody>
+          <a:bodyPr rtlCol="0" anchor="ctr"/>
+          <a:lstStyle/>
+          <a:p>
+            <a:pPr algn="ctr"/>
+            <a:endParaRPr lang="hu-HU">
+              <a:solidFill>
+                <a:schemeClr val="tx1"/>
+              </a:solidFill>
+            </a:endParaRPr>
+          </a:p>
+        </p:txBody>
+      </p:sp>
+      <p:sp>
+        <p:nvSpPr>
+          <p:cNvPr id="2" name="Szövegdoboz 1">
+            <a:extLst>
+              <a:ext uri="{FF2B5EF4-FFF2-40B4-BE49-F238E27FC236}">
+                <a16:creationId xmlns:a16="http://schemas.microsoft.com/office/drawing/2014/main" id="{FC3185CA-9556-F2A5-08F5-D51EF214ED5E}"/>
+              </a:ext>
+            </a:extLst>
+          </p:cNvPr>
+          <p:cNvSpPr txBox="1"/>
+          <p:nvPr/>
+        </p:nvSpPr>
+        <p:spPr>
+          <a:xfrm>
+            <a:off x="2801383" y="24854"/>
+            <a:ext cx="6589234" cy="769441"/>
+          </a:xfrm>
+          <a:prstGeom prst="rect">
+            <a:avLst/>
+          </a:prstGeom>
+          <a:noFill/>
+        </p:spPr>
+        <p:txBody>
+          <a:bodyPr wrap="square" lIns="91440" tIns="45720" rIns="91440" bIns="45720" rtlCol="0" anchor="t">
+            <a:spAutoFit/>
+          </a:bodyPr>
+          <a:lstStyle/>
+          <a:p>
+            <a:pPr algn="ctr"/>
+            <a:r>
+              <a:rPr lang="hu-HU" sz="4400" b="1" dirty="0">
+                <a:ln w="6350">
+                  <a:solidFill>
+                    <a:schemeClr val="accent1">
+                      <a:lumMod val="75000"/>
+                    </a:schemeClr>
+                  </a:solidFill>
+                </a:ln>
+                <a:solidFill>
+                  <a:schemeClr val="bg1"/>
+                </a:solidFill>
+                <a:latin typeface="Ink Free"/>
+              </a:rPr>
+              <a:t>Szerver elindítása</a:t>
+            </a:r>
+            <a:endParaRPr lang="hu-HU" sz="4400" b="1" dirty="0">
+              <a:ln w="6350">
+                <a:solidFill>
+                  <a:srgbClr val="5B9BD5">
+                    <a:lumMod val="75000"/>
+                  </a:srgbClr>
+                </a:solidFill>
+              </a:ln>
+              <a:solidFill>
+                <a:schemeClr val="bg1"/>
+              </a:solidFill>
+              <a:latin typeface="Ink Free"/>
+            </a:endParaRPr>
+          </a:p>
+        </p:txBody>
+      </p:sp>
+      <p:pic>
+        <p:nvPicPr>
+          <p:cNvPr id="14" name="Kép 13" descr="A képen gyertya látható&#10;&#10;Lehet, hogy az AI által létrehozott tartalom helytelen.">
+            <a:extLst>
+              <a:ext uri="{FF2B5EF4-FFF2-40B4-BE49-F238E27FC236}">
+                <a16:creationId xmlns:a16="http://schemas.microsoft.com/office/drawing/2014/main" id="{AF240267-F5DC-4808-E9BD-C2C799C1699B}"/>
+              </a:ext>
+            </a:extLst>
+          </p:cNvPr>
+          <p:cNvPicPr>
+            <a:picLocks noChangeAspect="1"/>
+          </p:cNvPicPr>
+          <p:nvPr/>
+        </p:nvPicPr>
+        <p:blipFill>
+          <a:blip r:embed="rId2"/>
+          <a:stretch>
+            <a:fillRect/>
+          </a:stretch>
+        </p:blipFill>
+        <p:spPr>
+          <a:xfrm>
+            <a:off x="87751" y="58187"/>
+            <a:ext cx="722857" cy="707199"/>
+          </a:xfrm>
+          <a:prstGeom prst="rect">
+            <a:avLst/>
+          </a:prstGeom>
+        </p:spPr>
+      </p:pic>
+      <p:pic>
+        <p:nvPicPr>
+          <p:cNvPr id="2050" name="Picture 2" descr="A képen szöveg, képernyőkép, Betűtípus látható&#10;&#10;Lehet, hogy az AI által létrehozott tartalom helytelen.">
+            <a:extLst>
+              <a:ext uri="{FF2B5EF4-FFF2-40B4-BE49-F238E27FC236}">
+                <a16:creationId xmlns:a16="http://schemas.microsoft.com/office/drawing/2014/main" id="{0FF959F0-0FFA-426E-B236-18EFC4AB6E8D}"/>
+              </a:ext>
+            </a:extLst>
+          </p:cNvPr>
+          <p:cNvPicPr>
+            <a:picLocks noChangeAspect="1" noChangeArrowheads="1"/>
+          </p:cNvPicPr>
+          <p:nvPr/>
+        </p:nvPicPr>
+        <p:blipFill>
+          <a:blip r:embed="rId3">
+            <a:extLst>
+              <a:ext uri="{28A0092B-C50C-407E-A947-70E740481C1C}">
+                <a14:useLocalDpi xmlns:a14="http://schemas.microsoft.com/office/drawing/2010/main" val="0"/>
+              </a:ext>
+            </a:extLst>
+          </a:blip>
+          <a:srcRect/>
+          <a:stretch>
+            <a:fillRect/>
+          </a:stretch>
+        </p:blipFill>
+        <p:spPr bwMode="auto">
+          <a:xfrm>
+            <a:off x="235792" y="857250"/>
+            <a:ext cx="4629150" cy="2571750"/>
+          </a:xfrm>
+          <a:prstGeom prst="rect">
+            <a:avLst/>
+          </a:prstGeom>
+          <a:noFill/>
+          <a:extLst>
+            <a:ext uri="{909E8E84-426E-40DD-AFC4-6F175D3DCCD1}">
+              <a14:hiddenFill xmlns:a14="http://schemas.microsoft.com/office/drawing/2010/main">
+                <a:solidFill>
+                  <a:srgbClr val="FFFFFF"/>
+                </a:solidFill>
+              </a14:hiddenFill>
+            </a:ext>
+          </a:extLst>
+        </p:spPr>
+      </p:pic>
+      <p:sp>
+        <p:nvSpPr>
+          <p:cNvPr id="12" name="Szövegdoboz 11">
+            <a:extLst>
+              <a:ext uri="{FF2B5EF4-FFF2-40B4-BE49-F238E27FC236}">
+                <a16:creationId xmlns:a16="http://schemas.microsoft.com/office/drawing/2014/main" id="{C9275FDE-A41B-401C-B814-BF30E7E93E85}"/>
+              </a:ext>
+            </a:extLst>
+          </p:cNvPr>
+          <p:cNvSpPr txBox="1"/>
+          <p:nvPr/>
+        </p:nvSpPr>
+        <p:spPr>
+          <a:xfrm>
+            <a:off x="3048778" y="3244334"/>
+            <a:ext cx="6097554" cy="369332"/>
+          </a:xfrm>
+          <a:prstGeom prst="rect">
+            <a:avLst/>
+          </a:prstGeom>
+          <a:noFill/>
+        </p:spPr>
+        <p:txBody>
+          <a:bodyPr wrap="square">
+            <a:spAutoFit/>
+          </a:bodyPr>
+          <a:lstStyle/>
+          <a:p>
+            <a:r>
+              <a:rPr lang="hu-HU" b="0" i="0" dirty="0">
+                <a:solidFill>
+                  <a:srgbClr val="000000"/>
+                </a:solidFill>
+                <a:effectLst/>
+                <a:latin typeface="Times New Roman" panose="02020603050405020304" pitchFamily="18" charset="0"/>
+              </a:rPr>
+              <a:t> </a:t>
+            </a:r>
+            <a:endParaRPr lang="hu-HU" dirty="0"/>
+          </a:p>
+        </p:txBody>
+      </p:sp>
+      <p:sp>
+        <p:nvSpPr>
+          <p:cNvPr id="15" name="Szövegdoboz 14">
+            <a:extLst>
+              <a:ext uri="{FF2B5EF4-FFF2-40B4-BE49-F238E27FC236}">
+                <a16:creationId xmlns:a16="http://schemas.microsoft.com/office/drawing/2014/main" id="{E94674D1-C8CC-4DD4-8F12-F4FD7FFF9DE3}"/>
+              </a:ext>
+            </a:extLst>
+          </p:cNvPr>
+          <p:cNvSpPr txBox="1"/>
+          <p:nvPr/>
+        </p:nvSpPr>
+        <p:spPr>
+          <a:xfrm>
+            <a:off x="4942892" y="1062245"/>
+            <a:ext cx="6097554" cy="646331"/>
+          </a:xfrm>
+          <a:prstGeom prst="rect">
+            <a:avLst/>
+          </a:prstGeom>
+          <a:noFill/>
+        </p:spPr>
+        <p:txBody>
+          <a:bodyPr wrap="square">
+            <a:spAutoFit/>
+          </a:bodyPr>
+          <a:lstStyle/>
+          <a:p>
+            <a:r>
+              <a:rPr lang="hu-HU" sz="1800" b="0" i="0" u="none" strike="noStrike">
+                <a:solidFill>
+                  <a:srgbClr val="BF9000"/>
+                </a:solidFill>
+                <a:effectLst/>
+                <a:latin typeface="Calibri" panose="020F0502020204030204" pitchFamily="34" charset="0"/>
+              </a:rPr>
+              <a:t>A RUN_SEED értéke dönti el, hogy fel kell-e tölteni az adatbázist alap adatokkal, vagy sem.</a:t>
+            </a:r>
+            <a:r>
+              <a:rPr lang="hu-HU" sz="1800" b="0" i="0">
+                <a:solidFill>
+                  <a:srgbClr val="000000"/>
+                </a:solidFill>
+                <a:effectLst/>
+                <a:latin typeface="Calibri" panose="020F0502020204030204" pitchFamily="34" charset="0"/>
+              </a:rPr>
+              <a:t>​</a:t>
+            </a:r>
+            <a:endParaRPr lang="hu-HU" dirty="0"/>
+          </a:p>
+        </p:txBody>
+      </p:sp>
+      <p:sp>
+        <p:nvSpPr>
+          <p:cNvPr id="17" name="Szövegdoboz 16">
+            <a:extLst>
+              <a:ext uri="{FF2B5EF4-FFF2-40B4-BE49-F238E27FC236}">
+                <a16:creationId xmlns:a16="http://schemas.microsoft.com/office/drawing/2014/main" id="{8FD366AF-3BBD-44C2-BF37-771A45B01135}"/>
+              </a:ext>
+            </a:extLst>
+          </p:cNvPr>
+          <p:cNvSpPr txBox="1"/>
+          <p:nvPr/>
+        </p:nvSpPr>
+        <p:spPr>
+          <a:xfrm>
+            <a:off x="4864942" y="2451231"/>
+            <a:ext cx="4157760" cy="646331"/>
+          </a:xfrm>
+          <a:prstGeom prst="rect">
+            <a:avLst/>
+          </a:prstGeom>
+          <a:noFill/>
+        </p:spPr>
+        <p:txBody>
+          <a:bodyPr wrap="square">
+            <a:spAutoFit/>
+          </a:bodyPr>
+          <a:lstStyle/>
+          <a:p>
+            <a:r>
+              <a:rPr lang="hu-HU" sz="1800" b="0" i="0" u="none" strike="noStrike" dirty="0">
+                <a:solidFill>
+                  <a:srgbClr val="BF9000"/>
+                </a:solidFill>
+                <a:effectLst/>
+                <a:latin typeface="Calibri" panose="020F0502020204030204" pitchFamily="34" charset="0"/>
+              </a:rPr>
+              <a:t>Ha </a:t>
+            </a:r>
+            <a:r>
+              <a:rPr lang="hu-HU" sz="1800" b="0" i="0" u="none" strike="noStrike" dirty="0" err="1">
+                <a:solidFill>
+                  <a:srgbClr val="BF9000"/>
+                </a:solidFill>
+                <a:effectLst/>
+                <a:latin typeface="Calibri" panose="020F0502020204030204" pitchFamily="34" charset="0"/>
+              </a:rPr>
+              <a:t>True</a:t>
+            </a:r>
+            <a:r>
+              <a:rPr lang="hu-HU" sz="1800" b="0" i="0" u="none" strike="noStrike" dirty="0">
+                <a:solidFill>
+                  <a:srgbClr val="BF9000"/>
+                </a:solidFill>
+                <a:effectLst/>
+                <a:latin typeface="Calibri" panose="020F0502020204030204" pitchFamily="34" charset="0"/>
+              </a:rPr>
+              <a:t>, akkor feltölti, ha </a:t>
+            </a:r>
+            <a:r>
+              <a:rPr lang="hu-HU" sz="1800" b="0" i="0" u="none" strike="noStrike" dirty="0" err="1">
+                <a:solidFill>
+                  <a:srgbClr val="BF9000"/>
+                </a:solidFill>
+                <a:effectLst/>
+                <a:latin typeface="Calibri" panose="020F0502020204030204" pitchFamily="34" charset="0"/>
+              </a:rPr>
+              <a:t>false</a:t>
+            </a:r>
+            <a:r>
+              <a:rPr lang="hu-HU" sz="1800" b="0" i="0" u="none" strike="noStrike" dirty="0">
+                <a:solidFill>
+                  <a:srgbClr val="BF9000"/>
+                </a:solidFill>
+                <a:effectLst/>
+                <a:latin typeface="Calibri" panose="020F0502020204030204" pitchFamily="34" charset="0"/>
+              </a:rPr>
+              <a:t> akkor nem tölti fel adatokkal</a:t>
+            </a:r>
+            <a:r>
+              <a:rPr lang="hu-HU" sz="1800" b="0" i="0" dirty="0">
+                <a:solidFill>
+                  <a:srgbClr val="000000"/>
+                </a:solidFill>
+                <a:effectLst/>
+                <a:latin typeface="Calibri" panose="020F0502020204030204" pitchFamily="34" charset="0"/>
+              </a:rPr>
+              <a:t>​</a:t>
+            </a:r>
+            <a:endParaRPr lang="hu-HU" dirty="0"/>
+          </a:p>
+        </p:txBody>
+      </p:sp>
+      <p:pic>
+        <p:nvPicPr>
+          <p:cNvPr id="2052" name="Picture 4" descr="A képen szöveg, képernyőkép, Betűtípus, sor látható&#10;&#10;Lehet, hogy az AI által létrehozott tartalom helytelen.">
+            <a:extLst>
+              <a:ext uri="{FF2B5EF4-FFF2-40B4-BE49-F238E27FC236}">
+                <a16:creationId xmlns:a16="http://schemas.microsoft.com/office/drawing/2014/main" id="{1050CC27-98F0-440E-8370-EB278E728039}"/>
+              </a:ext>
+            </a:extLst>
+          </p:cNvPr>
+          <p:cNvPicPr>
+            <a:picLocks noChangeAspect="1" noChangeArrowheads="1"/>
+          </p:cNvPicPr>
+          <p:nvPr/>
+        </p:nvPicPr>
+        <p:blipFill>
+          <a:blip r:embed="rId4">
+            <a:extLst>
+              <a:ext uri="{28A0092B-C50C-407E-A947-70E740481C1C}">
+                <a14:useLocalDpi xmlns:a14="http://schemas.microsoft.com/office/drawing/2010/main" val="0"/>
+              </a:ext>
+            </a:extLst>
+          </a:blip>
+          <a:srcRect/>
+          <a:stretch>
+            <a:fillRect/>
+          </a:stretch>
+        </p:blipFill>
+        <p:spPr bwMode="auto">
+          <a:xfrm>
+            <a:off x="317144" y="4299945"/>
+            <a:ext cx="8086725" cy="666750"/>
+          </a:xfrm>
+          <a:prstGeom prst="rect">
+            <a:avLst/>
+          </a:prstGeom>
+          <a:noFill/>
+          <a:extLst>
+            <a:ext uri="{909E8E84-426E-40DD-AFC4-6F175D3DCCD1}">
+              <a14:hiddenFill xmlns:a14="http://schemas.microsoft.com/office/drawing/2010/main">
+                <a:solidFill>
+                  <a:srgbClr val="FFFFFF"/>
+                </a:solidFill>
+              </a14:hiddenFill>
+            </a:ext>
+          </a:extLst>
+        </p:spPr>
+      </p:pic>
+      <p:sp>
+        <p:nvSpPr>
+          <p:cNvPr id="20" name="Szövegdoboz 19">
+            <a:extLst>
+              <a:ext uri="{FF2B5EF4-FFF2-40B4-BE49-F238E27FC236}">
+                <a16:creationId xmlns:a16="http://schemas.microsoft.com/office/drawing/2014/main" id="{83A30A70-7B63-44B5-9414-F6588F24C0A8}"/>
+              </a:ext>
+            </a:extLst>
+          </p:cNvPr>
+          <p:cNvSpPr txBox="1"/>
+          <p:nvPr/>
+        </p:nvSpPr>
+        <p:spPr>
+          <a:xfrm>
+            <a:off x="235791" y="5022981"/>
+            <a:ext cx="8168077" cy="369332"/>
+          </a:xfrm>
+          <a:prstGeom prst="rect">
+            <a:avLst/>
+          </a:prstGeom>
+          <a:noFill/>
+        </p:spPr>
+        <p:txBody>
+          <a:bodyPr wrap="square">
+            <a:spAutoFit/>
+          </a:bodyPr>
+          <a:lstStyle/>
+          <a:p>
+            <a:r>
+              <a:rPr lang="hu-HU" sz="1800" b="0" i="0" u="none" strike="noStrike" dirty="0">
+                <a:solidFill>
+                  <a:srgbClr val="BF9000"/>
+                </a:solidFill>
+                <a:effectLst/>
+                <a:latin typeface="Calibri" panose="020F0502020204030204" pitchFamily="34" charset="0"/>
+              </a:rPr>
+              <a:t>Ha a RUN_SEED értéke </a:t>
+            </a:r>
+            <a:r>
+              <a:rPr lang="hu-HU" sz="1800" b="0" i="0" u="none" strike="noStrike" dirty="0" err="1">
+                <a:solidFill>
+                  <a:srgbClr val="BF9000"/>
+                </a:solidFill>
+                <a:effectLst/>
+                <a:latin typeface="Calibri" panose="020F0502020204030204" pitchFamily="34" charset="0"/>
+              </a:rPr>
+              <a:t>false</a:t>
+            </a:r>
+            <a:r>
+              <a:rPr lang="hu-HU" sz="1800" b="0" i="0" u="none" strike="noStrike" dirty="0">
+                <a:solidFill>
+                  <a:srgbClr val="BF9000"/>
+                </a:solidFill>
+                <a:effectLst/>
+                <a:latin typeface="Calibri" panose="020F0502020204030204" pitchFamily="34" charset="0"/>
+              </a:rPr>
+              <a:t>, akkor ezt az üzenetet kapjuk vissza a Backend Szerveren.</a:t>
+            </a:r>
+            <a:r>
+              <a:rPr lang="hu-HU" sz="1800" b="0" i="0" dirty="0">
+                <a:solidFill>
+                  <a:srgbClr val="000000"/>
+                </a:solidFill>
+                <a:effectLst/>
+                <a:latin typeface="Calibri" panose="020F0502020204030204" pitchFamily="34" charset="0"/>
+              </a:rPr>
+              <a:t>​</a:t>
+            </a:r>
+            <a:endParaRPr lang="hu-HU" dirty="0"/>
+          </a:p>
+        </p:txBody>
+      </p:sp>
+    </p:spTree>
+    <p:extLst>
+      <p:ext uri="{BB962C8B-B14F-4D97-AF65-F5344CB8AC3E}">
+        <p14:creationId xmlns:p14="http://schemas.microsoft.com/office/powerpoint/2010/main" val="579864578"/>
+      </p:ext>
+    </p:extLst>
+  </p:cSld>
+  <p:clrMapOvr>
+    <a:masterClrMapping/>
+  </p:clrMapOvr>
+  <p:transition spd="med">
+    <p:pull/>
+  </p:transition>
+</p:sld>
+</file>
+
 <file path=ppt/slides/slide3.xml><?xml version="1.0" encoding="utf-8"?>
 <p:sld xmlns:a="http://schemas.openxmlformats.org/drawingml/2006/main" xmlns:r="http://schemas.openxmlformats.org/officeDocument/2006/relationships" xmlns:p="http://schemas.openxmlformats.org/presentationml/2006/main">
   <p:cSld>

--- a/DózsaCsárda_PA_FB_PG.pptx
+++ b/DózsaCsárda_PA_FB_PG.pptx
@@ -5,7 +5,7 @@
     <p:sldMasterId id="2147483648" r:id="rId1"/>
   </p:sldMasterIdLst>
   <p:notesMasterIdLst>
-    <p:notesMasterId r:id="rId29"/>
+    <p:notesMasterId r:id="rId32"/>
   </p:notesMasterIdLst>
   <p:sldIdLst>
     <p:sldId id="256" r:id="rId2"/>
@@ -19,22 +19,25 @@
     <p:sldId id="281" r:id="rId10"/>
     <p:sldId id="275" r:id="rId11"/>
     <p:sldId id="268" r:id="rId12"/>
-    <p:sldId id="258" r:id="rId13"/>
-    <p:sldId id="261" r:id="rId14"/>
-    <p:sldId id="259" r:id="rId15"/>
-    <p:sldId id="285" r:id="rId16"/>
-    <p:sldId id="286" r:id="rId17"/>
-    <p:sldId id="260" r:id="rId18"/>
-    <p:sldId id="262" r:id="rId19"/>
-    <p:sldId id="263" r:id="rId20"/>
-    <p:sldId id="267" r:id="rId21"/>
-    <p:sldId id="269" r:id="rId22"/>
-    <p:sldId id="279" r:id="rId23"/>
-    <p:sldId id="264" r:id="rId24"/>
-    <p:sldId id="270" r:id="rId25"/>
-    <p:sldId id="283" r:id="rId26"/>
-    <p:sldId id="280" r:id="rId27"/>
-    <p:sldId id="287" r:id="rId28"/>
+    <p:sldId id="289" r:id="rId13"/>
+    <p:sldId id="290" r:id="rId14"/>
+    <p:sldId id="258" r:id="rId15"/>
+    <p:sldId id="261" r:id="rId16"/>
+    <p:sldId id="259" r:id="rId17"/>
+    <p:sldId id="285" r:id="rId18"/>
+    <p:sldId id="286" r:id="rId19"/>
+    <p:sldId id="260" r:id="rId20"/>
+    <p:sldId id="262" r:id="rId21"/>
+    <p:sldId id="263" r:id="rId22"/>
+    <p:sldId id="267" r:id="rId23"/>
+    <p:sldId id="269" r:id="rId24"/>
+    <p:sldId id="279" r:id="rId25"/>
+    <p:sldId id="264" r:id="rId26"/>
+    <p:sldId id="270" r:id="rId27"/>
+    <p:sldId id="283" r:id="rId28"/>
+    <p:sldId id="280" r:id="rId29"/>
+    <p:sldId id="287" r:id="rId30"/>
+    <p:sldId id="288" r:id="rId31"/>
   </p:sldIdLst>
   <p:sldSz cx="12192000" cy="6858000"/>
   <p:notesSz cx="6858000" cy="9144000"/>
@@ -1167,7 +1170,7 @@
           <a:p>
             <a:fld id="{28F78079-BF18-4298-A5A3-7BDA287CF324}" type="slidenum">
               <a:rPr lang="hu-HU" smtClean="0"/>
-              <a:t>23</a:t>
+              <a:t>25</a:t>
             </a:fld>
             <a:endParaRPr lang="hu-HU"/>
           </a:p>
@@ -5055,7 +5058,13 @@
     </p:bg>
     <p:spTree>
       <p:nvGrpSpPr>
-        <p:cNvPr id="1" name=""/>
+        <p:cNvPr id="1" name="">
+          <a:extLst>
+            <a:ext uri="{FF2B5EF4-FFF2-40B4-BE49-F238E27FC236}">
+              <a16:creationId xmlns:a16="http://schemas.microsoft.com/office/drawing/2014/main" id="{093FDFC5-6B53-CF5A-C9EB-5A1EAB9AF346}"/>
+            </a:ext>
+          </a:extLst>
+        </p:cNvPr>
         <p:cNvGrpSpPr/>
         <p:nvPr/>
       </p:nvGrpSpPr>
@@ -5069,7 +5078,13 @@
       </p:grpSpPr>
       <p:sp>
         <p:nvSpPr>
-          <p:cNvPr id="4" name="Téglalap 3"/>
+          <p:cNvPr id="4" name="Téglalap 3">
+            <a:extLst>
+              <a:ext uri="{FF2B5EF4-FFF2-40B4-BE49-F238E27FC236}">
+                <a16:creationId xmlns:a16="http://schemas.microsoft.com/office/drawing/2014/main" id="{388636D0-263B-C9FE-6BA0-7E96C0FD0126}"/>
+              </a:ext>
+            </a:extLst>
+          </p:cNvPr>
           <p:cNvSpPr/>
           <p:nvPr/>
         </p:nvSpPr>
@@ -5122,14 +5137,20 @@
       </p:sp>
       <p:sp>
         <p:nvSpPr>
-          <p:cNvPr id="2" name="Szövegdoboz 1"/>
+          <p:cNvPr id="2" name="Szövegdoboz 1">
+            <a:extLst>
+              <a:ext uri="{FF2B5EF4-FFF2-40B4-BE49-F238E27FC236}">
+                <a16:creationId xmlns:a16="http://schemas.microsoft.com/office/drawing/2014/main" id="{0C9DC7C9-E4AB-1E64-02AE-427317C4F318}"/>
+              </a:ext>
+            </a:extLst>
+          </p:cNvPr>
           <p:cNvSpPr txBox="1"/>
           <p:nvPr/>
         </p:nvSpPr>
         <p:spPr>
           <a:xfrm>
-            <a:off x="2788443" y="47687"/>
-            <a:ext cx="6615113" cy="769441"/>
+            <a:off x="2245200" y="24854"/>
+            <a:ext cx="7379565" cy="769441"/>
           </a:xfrm>
           <a:prstGeom prst="rect">
             <a:avLst/>
@@ -5137,7 +5158,7 @@
           <a:noFill/>
         </p:spPr>
         <p:txBody>
-          <a:bodyPr wrap="square" rtlCol="0">
+          <a:bodyPr wrap="square" lIns="91440" tIns="45720" rIns="91440" bIns="45720" rtlCol="0" anchor="t">
             <a:spAutoFit/>
           </a:bodyPr>
           <a:lstStyle/>
@@ -5155,330 +5176,94 @@
                 <a:solidFill>
                   <a:schemeClr val="bg1"/>
                 </a:solidFill>
-                <a:latin typeface="Ink Free" panose="03080402000500000000" pitchFamily="66" charset="0"/>
-              </a:rPr>
-              <a:t>Fejlesztési környezet</a:t>
-            </a:r>
+                <a:latin typeface="Ink Free"/>
+              </a:rPr>
+              <a:t>WPF </a:t>
+            </a:r>
+            <a:r>
+              <a:rPr lang="hu-HU" sz="4400" b="1" dirty="0" err="1">
+                <a:ln w="6350">
+                  <a:solidFill>
+                    <a:schemeClr val="accent1">
+                      <a:lumMod val="75000"/>
+                    </a:schemeClr>
+                  </a:solidFill>
+                </a:ln>
+                <a:solidFill>
+                  <a:schemeClr val="bg1"/>
+                </a:solidFill>
+                <a:latin typeface="Ink Free"/>
+              </a:rPr>
+              <a:t>admin</a:t>
+            </a:r>
+            <a:r>
+              <a:rPr lang="hu-HU" sz="4400" b="1" dirty="0">
+                <a:ln w="6350">
+                  <a:solidFill>
+                    <a:schemeClr val="accent1">
+                      <a:lumMod val="75000"/>
+                    </a:schemeClr>
+                  </a:solidFill>
+                </a:ln>
+                <a:solidFill>
+                  <a:schemeClr val="bg1"/>
+                </a:solidFill>
+                <a:latin typeface="Ink Free"/>
+              </a:rPr>
+              <a:t>  felület: Alap ötlet</a:t>
+            </a:r>
+            <a:endParaRPr lang="hu-HU" sz="4400" b="1" dirty="0">
+              <a:ln w="6350">
+                <a:solidFill>
+                  <a:srgbClr val="5B9BD5">
+                    <a:lumMod val="75000"/>
+                  </a:srgbClr>
+                </a:solidFill>
+              </a:ln>
+              <a:solidFill>
+                <a:schemeClr val="bg1"/>
+              </a:solidFill>
+              <a:latin typeface="Ink Free"/>
+            </a:endParaRPr>
           </a:p>
         </p:txBody>
       </p:sp>
       <p:pic>
         <p:nvPicPr>
-          <p:cNvPr id="1026" name="Picture 2" descr="undefined"/>
+          <p:cNvPr id="8" name="Kép 7" descr="A képen gyertya látható&#10;&#10;Lehet, hogy az AI által létrehozott tartalom helytelen.">
+            <a:extLst>
+              <a:ext uri="{FF2B5EF4-FFF2-40B4-BE49-F238E27FC236}">
+                <a16:creationId xmlns:a16="http://schemas.microsoft.com/office/drawing/2014/main" id="{84BCDA3D-FFE2-56B5-F922-738894B8BF3C}"/>
+              </a:ext>
+            </a:extLst>
+          </p:cNvPr>
           <p:cNvPicPr>
-            <a:picLocks noChangeAspect="1" noChangeArrowheads="1"/>
+            <a:picLocks noChangeAspect="1"/>
           </p:cNvPicPr>
           <p:nvPr/>
         </p:nvPicPr>
         <p:blipFill>
-          <a:blip r:embed="rId2" cstate="print">
-            <a:extLst>
-              <a:ext uri="{28A0092B-C50C-407E-A947-70E740481C1C}">
-                <a14:useLocalDpi xmlns:a14="http://schemas.microsoft.com/office/drawing/2010/main" val="0"/>
-              </a:ext>
-            </a:extLst>
-          </a:blip>
-          <a:srcRect/>
+          <a:blip r:embed="rId2"/>
           <a:stretch>
             <a:fillRect/>
           </a:stretch>
         </p:blipFill>
-        <p:spPr bwMode="auto">
-          <a:xfrm>
-            <a:off x="512964" y="1264346"/>
-            <a:ext cx="1709738" cy="1709738"/>
-          </a:xfrm>
-          <a:prstGeom prst="rect">
-            <a:avLst/>
-          </a:prstGeom>
-          <a:noFill/>
-          <a:extLst>
-            <a:ext uri="{909E8E84-426E-40DD-AFC4-6F175D3DCCD1}">
-              <a14:hiddenFill xmlns:a14="http://schemas.microsoft.com/office/drawing/2010/main">
-                <a:solidFill>
-                  <a:srgbClr val="FFFFFF"/>
-                </a:solidFill>
-              </a14:hiddenFill>
-            </a:ext>
-          </a:extLst>
+        <p:spPr>
+          <a:xfrm>
+            <a:off x="87751" y="58187"/>
+            <a:ext cx="722857" cy="707199"/>
+          </a:xfrm>
+          <a:prstGeom prst="rect">
+            <a:avLst/>
+          </a:prstGeom>
         </p:spPr>
       </p:pic>
-      <p:sp>
-        <p:nvSpPr>
-          <p:cNvPr id="5" name="Szövegdoboz 4">
-            <a:extLst>
-              <a:ext uri="{FF2B5EF4-FFF2-40B4-BE49-F238E27FC236}">
-                <a16:creationId xmlns:a16="http://schemas.microsoft.com/office/drawing/2014/main" id="{81A0252E-27AE-4E33-B442-E4993C15E856}"/>
-              </a:ext>
-            </a:extLst>
-          </p:cNvPr>
-          <p:cNvSpPr txBox="1"/>
-          <p:nvPr/>
-        </p:nvSpPr>
-        <p:spPr>
-          <a:xfrm>
-            <a:off x="2280839" y="1218892"/>
-            <a:ext cx="5132719" cy="1569660"/>
-          </a:xfrm>
-          <a:prstGeom prst="rect">
-            <a:avLst/>
-          </a:prstGeom>
-          <a:noFill/>
-        </p:spPr>
-        <p:txBody>
-          <a:bodyPr wrap="square" rtlCol="0">
-            <a:spAutoFit/>
-          </a:bodyPr>
-          <a:lstStyle/>
-          <a:p>
-            <a:pPr marL="342900" indent="-342900">
-              <a:buFont typeface="Arial" panose="020B0604020202020204" pitchFamily="34" charset="0"/>
-              <a:buChar char="•"/>
-            </a:pPr>
-            <a:r>
-              <a:rPr lang="hu-HU" sz="2400" b="1" dirty="0">
-                <a:solidFill>
-                  <a:schemeClr val="accent4">
-                    <a:lumMod val="75000"/>
-                  </a:schemeClr>
-                </a:solidFill>
-              </a:rPr>
-              <a:t>Visual </a:t>
-            </a:r>
-            <a:r>
-              <a:rPr lang="hu-HU" sz="2400" b="1" dirty="0" err="1">
-                <a:solidFill>
-                  <a:schemeClr val="accent4">
-                    <a:lumMod val="75000"/>
-                  </a:schemeClr>
-                </a:solidFill>
-              </a:rPr>
-              <a:t>Studio</a:t>
-            </a:r>
-            <a:r>
-              <a:rPr lang="hu-HU" sz="2400" b="1" dirty="0">
-                <a:solidFill>
-                  <a:schemeClr val="accent4">
-                    <a:lumMod val="75000"/>
-                  </a:schemeClr>
-                </a:solidFill>
-              </a:rPr>
-              <a:t> </a:t>
-            </a:r>
-            <a:r>
-              <a:rPr lang="hu-HU" sz="2400" b="1" dirty="0" err="1">
-                <a:solidFill>
-                  <a:schemeClr val="accent4">
-                    <a:lumMod val="75000"/>
-                  </a:schemeClr>
-                </a:solidFill>
-              </a:rPr>
-              <a:t>Code</a:t>
-            </a:r>
-            <a:r>
-              <a:rPr lang="hu-HU" sz="2400" b="1" dirty="0">
-                <a:solidFill>
-                  <a:schemeClr val="accent4">
-                    <a:lumMod val="75000"/>
-                  </a:schemeClr>
-                </a:solidFill>
-              </a:rPr>
-              <a:t>(VSC)</a:t>
-            </a:r>
-            <a:r>
-              <a:rPr lang="hu-HU" sz="2400" dirty="0">
-                <a:solidFill>
-                  <a:schemeClr val="accent4">
-                    <a:lumMod val="75000"/>
-                  </a:schemeClr>
-                </a:solidFill>
-              </a:rPr>
-              <a:t>: Egy fejlesztői környezet, amiben a szerver, a frontend(</a:t>
-            </a:r>
-            <a:r>
-              <a:rPr lang="hu-HU" sz="2400" dirty="0" err="1">
-                <a:solidFill>
-                  <a:schemeClr val="accent4">
-                    <a:lumMod val="75000"/>
-                  </a:schemeClr>
-                </a:solidFill>
-              </a:rPr>
-              <a:t>html</a:t>
-            </a:r>
-            <a:r>
-              <a:rPr lang="hu-HU" sz="2400" dirty="0">
-                <a:solidFill>
-                  <a:schemeClr val="accent4">
-                    <a:lumMod val="75000"/>
-                  </a:schemeClr>
-                </a:solidFill>
-              </a:rPr>
-              <a:t>, </a:t>
-            </a:r>
-            <a:r>
-              <a:rPr lang="hu-HU" sz="2400" dirty="0" err="1">
-                <a:solidFill>
-                  <a:schemeClr val="accent4">
-                    <a:lumMod val="75000"/>
-                  </a:schemeClr>
-                </a:solidFill>
-              </a:rPr>
-              <a:t>css</a:t>
-            </a:r>
-            <a:r>
-              <a:rPr lang="hu-HU" sz="2400" dirty="0">
-                <a:solidFill>
-                  <a:schemeClr val="accent4">
-                    <a:lumMod val="75000"/>
-                  </a:schemeClr>
-                </a:solidFill>
-              </a:rPr>
-              <a:t>, </a:t>
-            </a:r>
-            <a:r>
-              <a:rPr lang="hu-HU" sz="2400" dirty="0" err="1">
-                <a:solidFill>
-                  <a:schemeClr val="accent4">
-                    <a:lumMod val="75000"/>
-                  </a:schemeClr>
-                </a:solidFill>
-              </a:rPr>
-              <a:t>javascript</a:t>
-            </a:r>
-            <a:r>
-              <a:rPr lang="hu-HU" sz="2400" dirty="0">
-                <a:solidFill>
-                  <a:schemeClr val="accent4">
-                    <a:lumMod val="75000"/>
-                  </a:schemeClr>
-                </a:solidFill>
-              </a:rPr>
-              <a:t>, </a:t>
-            </a:r>
-            <a:r>
-              <a:rPr lang="hu-HU" sz="2400" dirty="0" err="1">
-                <a:solidFill>
-                  <a:schemeClr val="accent4">
-                    <a:lumMod val="75000"/>
-                  </a:schemeClr>
-                </a:solidFill>
-              </a:rPr>
-              <a:t>ejs</a:t>
-            </a:r>
-            <a:r>
-              <a:rPr lang="hu-HU" sz="2400" dirty="0">
-                <a:solidFill>
-                  <a:schemeClr val="accent4">
-                    <a:lumMod val="75000"/>
-                  </a:schemeClr>
-                </a:solidFill>
-              </a:rPr>
-              <a:t>) készült</a:t>
-            </a:r>
-          </a:p>
-        </p:txBody>
-      </p:sp>
-      <p:sp>
-        <p:nvSpPr>
-          <p:cNvPr id="8" name="Szövegdoboz 7">
-            <a:extLst>
-              <a:ext uri="{FF2B5EF4-FFF2-40B4-BE49-F238E27FC236}">
-                <a16:creationId xmlns:a16="http://schemas.microsoft.com/office/drawing/2014/main" id="{9DBC5AD3-A244-47DE-9DDF-DEF316BF5867}"/>
-              </a:ext>
-            </a:extLst>
-          </p:cNvPr>
-          <p:cNvSpPr txBox="1"/>
-          <p:nvPr/>
-        </p:nvSpPr>
-        <p:spPr>
-          <a:xfrm>
-            <a:off x="2280839" y="4180344"/>
-            <a:ext cx="4272954" cy="1569660"/>
-          </a:xfrm>
-          <a:prstGeom prst="rect">
-            <a:avLst/>
-          </a:prstGeom>
-          <a:noFill/>
-        </p:spPr>
-        <p:txBody>
-          <a:bodyPr wrap="square" rtlCol="0">
-            <a:spAutoFit/>
-          </a:bodyPr>
-          <a:lstStyle/>
-          <a:p>
-            <a:pPr marL="342900" indent="-342900">
-              <a:buFont typeface="Arial" panose="020B0604020202020204" pitchFamily="34" charset="0"/>
-              <a:buChar char="•"/>
-            </a:pPr>
-            <a:r>
-              <a:rPr lang="hu-HU" sz="2400" b="1" dirty="0">
-                <a:solidFill>
-                  <a:schemeClr val="accent4">
-                    <a:lumMod val="75000"/>
-                  </a:schemeClr>
-                </a:solidFill>
-              </a:rPr>
-              <a:t>Visual </a:t>
-            </a:r>
-            <a:r>
-              <a:rPr lang="hu-HU" sz="2400" b="1" dirty="0" err="1">
-                <a:solidFill>
-                  <a:schemeClr val="accent4">
-                    <a:lumMod val="75000"/>
-                  </a:schemeClr>
-                </a:solidFill>
-              </a:rPr>
-              <a:t>Studio</a:t>
-            </a:r>
-            <a:r>
-              <a:rPr lang="hu-HU" sz="2400" b="1" dirty="0">
-                <a:solidFill>
-                  <a:schemeClr val="accent4">
-                    <a:lumMod val="75000"/>
-                  </a:schemeClr>
-                </a:solidFill>
-              </a:rPr>
-              <a:t>(VS): </a:t>
-            </a:r>
-            <a:r>
-              <a:rPr lang="hu-HU" sz="2400" dirty="0">
-                <a:solidFill>
-                  <a:schemeClr val="accent4">
-                    <a:lumMod val="75000"/>
-                  </a:schemeClr>
-                </a:solidFill>
-              </a:rPr>
-              <a:t>Szintén egy fejlesztői környezet, amelyben az </a:t>
-            </a:r>
-            <a:r>
-              <a:rPr lang="hu-HU" sz="2400" dirty="0" err="1">
-                <a:solidFill>
-                  <a:schemeClr val="accent4">
-                    <a:lumMod val="75000"/>
-                  </a:schemeClr>
-                </a:solidFill>
-              </a:rPr>
-              <a:t>admin</a:t>
-            </a:r>
-            <a:r>
-              <a:rPr lang="hu-HU" sz="2400" dirty="0">
-                <a:solidFill>
-                  <a:schemeClr val="accent4">
-                    <a:lumMod val="75000"/>
-                  </a:schemeClr>
-                </a:solidFill>
-              </a:rPr>
-              <a:t> felület készült C# nyelven WPF-ben</a:t>
-            </a:r>
-          </a:p>
-        </p:txBody>
-      </p:sp>
       <p:pic>
         <p:nvPicPr>
-          <p:cNvPr id="7" name="Kép 6">
-            <a:extLst>
-              <a:ext uri="{FF2B5EF4-FFF2-40B4-BE49-F238E27FC236}">
-                <a16:creationId xmlns:a16="http://schemas.microsoft.com/office/drawing/2014/main" id="{7A4ACDEF-306B-49A4-86F8-78EF8203A3E6}"/>
+          <p:cNvPr id="5" name="Kép 4">
+            <a:extLst>
+              <a:ext uri="{FF2B5EF4-FFF2-40B4-BE49-F238E27FC236}">
+                <a16:creationId xmlns:a16="http://schemas.microsoft.com/office/drawing/2014/main" id="{133A7B2F-5C9B-4A49-AA73-E56CA5F409B1}"/>
               </a:ext>
             </a:extLst>
           </p:cNvPr>
@@ -5495,15 +5280,15 @@
         </p:blipFill>
         <p:spPr>
           <a:xfrm>
-            <a:off x="7272248" y="1807373"/>
-            <a:ext cx="4761808" cy="3471210"/>
+            <a:off x="220179" y="3814089"/>
+            <a:ext cx="5143671" cy="2931665"/>
           </a:xfrm>
           <a:prstGeom prst="rect">
             <a:avLst/>
           </a:prstGeom>
           <a:ln w="38100">
             <a:solidFill>
-              <a:schemeClr val="accent1">
+              <a:schemeClr val="accent5">
                 <a:lumMod val="40000"/>
                 <a:lumOff val="60000"/>
               </a:schemeClr>
@@ -5513,10 +5298,10 @@
       </p:pic>
       <p:pic>
         <p:nvPicPr>
-          <p:cNvPr id="6" name="Picture 5" descr="Visual Studio logo and symbol, meaning, history, PNG">
-            <a:extLst>
-              <a:ext uri="{FF2B5EF4-FFF2-40B4-BE49-F238E27FC236}">
-                <a16:creationId xmlns:a16="http://schemas.microsoft.com/office/drawing/2014/main" id="{C7CE94B2-3D26-E347-A01E-85D2E943C3FF}"/>
+          <p:cNvPr id="10" name="Kép 9">
+            <a:extLst>
+              <a:ext uri="{FF2B5EF4-FFF2-40B4-BE49-F238E27FC236}">
+                <a16:creationId xmlns:a16="http://schemas.microsoft.com/office/drawing/2014/main" id="{F6A83A99-FE52-4FB1-A975-71FA5B2E599E}"/>
               </a:ext>
             </a:extLst>
           </p:cNvPr>
@@ -5533,20 +5318,203 @@
         </p:blipFill>
         <p:spPr>
           <a:xfrm>
-            <a:off x="-222129" y="4051376"/>
-            <a:ext cx="3177249" cy="1832416"/>
+            <a:off x="0" y="877337"/>
+            <a:ext cx="12192000" cy="725220"/>
           </a:xfrm>
           <a:prstGeom prst="rect">
             <a:avLst/>
           </a:prstGeom>
         </p:spPr>
       </p:pic>
+      <p:sp>
+        <p:nvSpPr>
+          <p:cNvPr id="3" name="Nyíl: felfelé mutató 2">
+            <a:extLst>
+              <a:ext uri="{FF2B5EF4-FFF2-40B4-BE49-F238E27FC236}">
+                <a16:creationId xmlns:a16="http://schemas.microsoft.com/office/drawing/2014/main" id="{BFDD886B-0D4C-4A1C-AC78-C5CE1AE73C60}"/>
+              </a:ext>
+            </a:extLst>
+          </p:cNvPr>
+          <p:cNvSpPr/>
+          <p:nvPr/>
+        </p:nvSpPr>
+        <p:spPr>
+          <a:xfrm rot="3819809">
+            <a:off x="3339484" y="1021199"/>
+            <a:ext cx="622169" cy="2828282"/>
+          </a:xfrm>
+          <a:prstGeom prst="upArrow">
+            <a:avLst/>
+          </a:prstGeom>
+          <a:solidFill>
+            <a:srgbClr val="FF0000"/>
+          </a:solidFill>
+          <a:ln>
+            <a:noFill/>
+          </a:ln>
+        </p:spPr>
+        <p:style>
+          <a:lnRef idx="2">
+            <a:schemeClr val="accent1">
+              <a:shade val="50000"/>
+            </a:schemeClr>
+          </a:lnRef>
+          <a:fillRef idx="1">
+            <a:schemeClr val="accent1"/>
+          </a:fillRef>
+          <a:effectRef idx="0">
+            <a:schemeClr val="accent1"/>
+          </a:effectRef>
+          <a:fontRef idx="minor">
+            <a:schemeClr val="lt1"/>
+          </a:fontRef>
+        </p:style>
+        <p:txBody>
+          <a:bodyPr rtlCol="0" anchor="ctr"/>
+          <a:lstStyle/>
+          <a:p>
+            <a:pPr algn="ctr"/>
+            <a:endParaRPr lang="hu-HU">
+              <a:solidFill>
+                <a:schemeClr val="tx1"/>
+              </a:solidFill>
+            </a:endParaRPr>
+          </a:p>
+        </p:txBody>
+      </p:sp>
+      <p:sp>
+        <p:nvSpPr>
+          <p:cNvPr id="6" name="Folyamatábra: Bekötés 5">
+            <a:extLst>
+              <a:ext uri="{FF2B5EF4-FFF2-40B4-BE49-F238E27FC236}">
+                <a16:creationId xmlns:a16="http://schemas.microsoft.com/office/drawing/2014/main" id="{4C1219F9-E96D-4760-95E7-26B71FD40CC6}"/>
+              </a:ext>
+            </a:extLst>
+          </p:cNvPr>
+          <p:cNvSpPr/>
+          <p:nvPr/>
+        </p:nvSpPr>
+        <p:spPr>
+          <a:xfrm>
+            <a:off x="4901937" y="794295"/>
+            <a:ext cx="952108" cy="923183"/>
+          </a:xfrm>
+          <a:prstGeom prst="flowChartConnector">
+            <a:avLst/>
+          </a:prstGeom>
+          <a:noFill/>
+          <a:ln w="38100">
+            <a:solidFill>
+              <a:srgbClr val="FF0000"/>
+            </a:solidFill>
+          </a:ln>
+        </p:spPr>
+        <p:style>
+          <a:lnRef idx="2">
+            <a:schemeClr val="accent1">
+              <a:shade val="50000"/>
+            </a:schemeClr>
+          </a:lnRef>
+          <a:fillRef idx="1">
+            <a:schemeClr val="accent1"/>
+          </a:fillRef>
+          <a:effectRef idx="0">
+            <a:schemeClr val="accent1"/>
+          </a:effectRef>
+          <a:fontRef idx="minor">
+            <a:schemeClr val="lt1"/>
+          </a:fontRef>
+        </p:style>
+        <p:txBody>
+          <a:bodyPr rtlCol="0" anchor="ctr"/>
+          <a:lstStyle/>
+          <a:p>
+            <a:pPr algn="ctr"/>
+            <a:endParaRPr lang="hu-HU">
+              <a:solidFill>
+                <a:schemeClr val="tx1"/>
+              </a:solidFill>
+            </a:endParaRPr>
+          </a:p>
+        </p:txBody>
+      </p:sp>
+      <p:sp>
+        <p:nvSpPr>
+          <p:cNvPr id="11" name="Szövegdoboz 10">
+            <a:extLst>
+              <a:ext uri="{FF2B5EF4-FFF2-40B4-BE49-F238E27FC236}">
+                <a16:creationId xmlns:a16="http://schemas.microsoft.com/office/drawing/2014/main" id="{C4CC2A59-911E-4085-ACBB-6011D548EB58}"/>
+              </a:ext>
+            </a:extLst>
+          </p:cNvPr>
+          <p:cNvSpPr txBox="1"/>
+          <p:nvPr/>
+        </p:nvSpPr>
+        <p:spPr>
+          <a:xfrm>
+            <a:off x="810608" y="3172345"/>
+            <a:ext cx="4340083" cy="646331"/>
+          </a:xfrm>
+          <a:prstGeom prst="rect">
+            <a:avLst/>
+          </a:prstGeom>
+          <a:noFill/>
+        </p:spPr>
+        <p:txBody>
+          <a:bodyPr wrap="square" rtlCol="0">
+            <a:spAutoFit/>
+          </a:bodyPr>
+          <a:lstStyle/>
+          <a:p>
+            <a:r>
+              <a:rPr lang="hu-HU" dirty="0">
+                <a:solidFill>
+                  <a:srgbClr val="BF9000"/>
+                </a:solidFill>
+              </a:rPr>
+              <a:t>Gomb, amely elindítja az </a:t>
+            </a:r>
+            <a:r>
+              <a:rPr lang="hu-HU" dirty="0" err="1">
+                <a:solidFill>
+                  <a:srgbClr val="BF9000"/>
+                </a:solidFill>
+              </a:rPr>
+              <a:t>admin</a:t>
+            </a:r>
+            <a:r>
+              <a:rPr lang="hu-HU" dirty="0">
+                <a:solidFill>
+                  <a:srgbClr val="BF9000"/>
+                </a:solidFill>
+              </a:rPr>
+              <a:t> alkalmazást, ha az </a:t>
+            </a:r>
+            <a:r>
+              <a:rPr lang="hu-HU" dirty="0" err="1">
+                <a:solidFill>
+                  <a:srgbClr val="BF9000"/>
+                </a:solidFill>
+              </a:rPr>
+              <a:t>admin</a:t>
+            </a:r>
+            <a:r>
+              <a:rPr lang="hu-HU" dirty="0">
+                <a:solidFill>
+                  <a:srgbClr val="BF9000"/>
+                </a:solidFill>
+              </a:rPr>
+              <a:t> jelentkezett be.</a:t>
+            </a:r>
+          </a:p>
+        </p:txBody>
+      </p:sp>
       <p:pic>
         <p:nvPicPr>
-          <p:cNvPr id="11" name="Kép 10" descr="A képen gyertya látható&#10;&#10;Lehet, hogy az AI által létrehozott tartalom helytelen.">
-            <a:extLst>
-              <a:ext uri="{FF2B5EF4-FFF2-40B4-BE49-F238E27FC236}">
-                <a16:creationId xmlns:a16="http://schemas.microsoft.com/office/drawing/2014/main" id="{03D8D4D1-318E-3690-178D-4D9A323179DA}"/>
+          <p:cNvPr id="12" name="Kép 11">
+            <a:extLst>
+              <a:ext uri="{FF2B5EF4-FFF2-40B4-BE49-F238E27FC236}">
+                <a16:creationId xmlns:a16="http://schemas.microsoft.com/office/drawing/2014/main" id="{A311E7EF-2DEE-4C22-B935-98AC7D3F78AB}"/>
               </a:ext>
             </a:extLst>
           </p:cNvPr>
@@ -5563,18 +5531,216 @@
         </p:blipFill>
         <p:spPr>
           <a:xfrm>
-            <a:off x="87751" y="58187"/>
-            <a:ext cx="722857" cy="707199"/>
+            <a:off x="7162297" y="1663061"/>
+            <a:ext cx="5010849" cy="1343212"/>
           </a:xfrm>
           <a:prstGeom prst="rect">
             <a:avLst/>
           </a:prstGeom>
         </p:spPr>
       </p:pic>
+      <p:sp>
+        <p:nvSpPr>
+          <p:cNvPr id="14" name="Nyíl: felfelé mutató 13">
+            <a:extLst>
+              <a:ext uri="{FF2B5EF4-FFF2-40B4-BE49-F238E27FC236}">
+                <a16:creationId xmlns:a16="http://schemas.microsoft.com/office/drawing/2014/main" id="{B795DECF-4E19-49B1-868E-26CE4BD2BDD3}"/>
+              </a:ext>
+            </a:extLst>
+          </p:cNvPr>
+          <p:cNvSpPr/>
+          <p:nvPr/>
+        </p:nvSpPr>
+        <p:spPr>
+          <a:xfrm>
+            <a:off x="9459050" y="2726392"/>
+            <a:ext cx="622169" cy="1230234"/>
+          </a:xfrm>
+          <a:prstGeom prst="upArrow">
+            <a:avLst/>
+          </a:prstGeom>
+          <a:solidFill>
+            <a:srgbClr val="FF0000"/>
+          </a:solidFill>
+          <a:ln>
+            <a:noFill/>
+          </a:ln>
+        </p:spPr>
+        <p:style>
+          <a:lnRef idx="2">
+            <a:schemeClr val="accent1">
+              <a:shade val="50000"/>
+            </a:schemeClr>
+          </a:lnRef>
+          <a:fillRef idx="1">
+            <a:schemeClr val="accent1"/>
+          </a:fillRef>
+          <a:effectRef idx="0">
+            <a:schemeClr val="accent1"/>
+          </a:effectRef>
+          <a:fontRef idx="minor">
+            <a:schemeClr val="lt1"/>
+          </a:fontRef>
+        </p:style>
+        <p:txBody>
+          <a:bodyPr rtlCol="0" anchor="ctr"/>
+          <a:lstStyle/>
+          <a:p>
+            <a:pPr algn="ctr"/>
+            <a:endParaRPr lang="hu-HU">
+              <a:solidFill>
+                <a:schemeClr val="tx1"/>
+              </a:solidFill>
+            </a:endParaRPr>
+          </a:p>
+        </p:txBody>
+      </p:sp>
+      <p:sp>
+        <p:nvSpPr>
+          <p:cNvPr id="15" name="Szövegdoboz 14">
+            <a:extLst>
+              <a:ext uri="{FF2B5EF4-FFF2-40B4-BE49-F238E27FC236}">
+                <a16:creationId xmlns:a16="http://schemas.microsoft.com/office/drawing/2014/main" id="{5079AF11-340D-4115-87DC-4DD4143C5B44}"/>
+              </a:ext>
+            </a:extLst>
+          </p:cNvPr>
+          <p:cNvSpPr txBox="1"/>
+          <p:nvPr/>
+        </p:nvSpPr>
+        <p:spPr>
+          <a:xfrm>
+            <a:off x="7591741" y="4069604"/>
+            <a:ext cx="4340083" cy="923330"/>
+          </a:xfrm>
+          <a:prstGeom prst="rect">
+            <a:avLst/>
+          </a:prstGeom>
+          <a:noFill/>
+        </p:spPr>
+        <p:txBody>
+          <a:bodyPr wrap="square" rtlCol="0">
+            <a:spAutoFit/>
+          </a:bodyPr>
+          <a:lstStyle/>
+          <a:p>
+            <a:r>
+              <a:rPr lang="hu-HU" dirty="0">
+                <a:solidFill>
+                  <a:srgbClr val="BF9000"/>
+                </a:solidFill>
+              </a:rPr>
+              <a:t>A Gomb lenyomása elindított volna egy hivatkozást, a regisztrációs adatbázisban a </a:t>
+            </a:r>
+            <a:r>
+              <a:rPr lang="hu-HU" dirty="0" err="1">
+                <a:solidFill>
+                  <a:srgbClr val="BF9000"/>
+                </a:solidFill>
+              </a:rPr>
+              <a:t>windows</a:t>
+            </a:r>
+            <a:r>
+              <a:rPr lang="hu-HU" dirty="0">
+                <a:solidFill>
+                  <a:srgbClr val="BF9000"/>
+                </a:solidFill>
+              </a:rPr>
+              <a:t>-ban. (</a:t>
+            </a:r>
+            <a:r>
+              <a:rPr lang="hu-HU" dirty="0" err="1">
+                <a:solidFill>
+                  <a:srgbClr val="BF9000"/>
+                </a:solidFill>
+              </a:rPr>
+              <a:t>Regedit</a:t>
+            </a:r>
+            <a:r>
+              <a:rPr lang="hu-HU" dirty="0">
+                <a:solidFill>
+                  <a:srgbClr val="BF9000"/>
+                </a:solidFill>
+              </a:rPr>
+              <a:t>/</a:t>
+            </a:r>
+            <a:r>
+              <a:rPr lang="hu-HU" dirty="0" err="1">
+                <a:solidFill>
+                  <a:srgbClr val="BF9000"/>
+                </a:solidFill>
+              </a:rPr>
+              <a:t>Dozsaadmin</a:t>
+            </a:r>
+            <a:r>
+              <a:rPr lang="hu-HU" dirty="0">
+                <a:solidFill>
+                  <a:srgbClr val="BF9000"/>
+                </a:solidFill>
+              </a:rPr>
+              <a:t>)</a:t>
+            </a:r>
+          </a:p>
+        </p:txBody>
+      </p:sp>
+      <p:sp>
+        <p:nvSpPr>
+          <p:cNvPr id="16" name="Szövegdoboz 15">
+            <a:extLst>
+              <a:ext uri="{FF2B5EF4-FFF2-40B4-BE49-F238E27FC236}">
+                <a16:creationId xmlns:a16="http://schemas.microsoft.com/office/drawing/2014/main" id="{10397239-E9B5-42FA-89D9-F6B48ED1B720}"/>
+              </a:ext>
+            </a:extLst>
+          </p:cNvPr>
+          <p:cNvSpPr txBox="1"/>
+          <p:nvPr/>
+        </p:nvSpPr>
+        <p:spPr>
+          <a:xfrm>
+            <a:off x="7591740" y="5279921"/>
+            <a:ext cx="4340083" cy="1200329"/>
+          </a:xfrm>
+          <a:prstGeom prst="rect">
+            <a:avLst/>
+          </a:prstGeom>
+          <a:noFill/>
+        </p:spPr>
+        <p:txBody>
+          <a:bodyPr wrap="square" rtlCol="0">
+            <a:spAutoFit/>
+          </a:bodyPr>
+          <a:lstStyle/>
+          <a:p>
+            <a:r>
+              <a:rPr lang="hu-HU" dirty="0">
+                <a:solidFill>
+                  <a:srgbClr val="BF9000"/>
+                </a:solidFill>
+              </a:rPr>
+              <a:t>Ezt eredetileg egy generált </a:t>
+            </a:r>
+            <a:r>
+              <a:rPr lang="hu-HU" dirty="0" err="1">
+                <a:solidFill>
+                  <a:srgbClr val="BF9000"/>
+                </a:solidFill>
+              </a:rPr>
+              <a:t>exe</a:t>
+            </a:r>
+            <a:r>
+              <a:rPr lang="hu-HU" dirty="0">
+                <a:solidFill>
+                  <a:srgbClr val="BF9000"/>
+                </a:solidFill>
+              </a:rPr>
+              <a:t> fájlal telepítette volna a program, így elhelyezte volna a megfelelő helyen, a megfelelő hivatkozást.</a:t>
+            </a:r>
+          </a:p>
+        </p:txBody>
+      </p:sp>
     </p:spTree>
     <p:extLst>
       <p:ext uri="{BB962C8B-B14F-4D97-AF65-F5344CB8AC3E}">
-        <p14:creationId xmlns:p14="http://schemas.microsoft.com/office/powerpoint/2010/main" val="702753272"/>
+        <p14:creationId xmlns:p14="http://schemas.microsoft.com/office/powerpoint/2010/main" val="1991479979"/>
       </p:ext>
     </p:extLst>
   </p:cSld>
@@ -5603,7 +5769,13 @@
     </p:bg>
     <p:spTree>
       <p:nvGrpSpPr>
-        <p:cNvPr id="1" name=""/>
+        <p:cNvPr id="1" name="">
+          <a:extLst>
+            <a:ext uri="{FF2B5EF4-FFF2-40B4-BE49-F238E27FC236}">
+              <a16:creationId xmlns:a16="http://schemas.microsoft.com/office/drawing/2014/main" id="{093FDFC5-6B53-CF5A-C9EB-5A1EAB9AF346}"/>
+            </a:ext>
+          </a:extLst>
+        </p:cNvPr>
         <p:cNvGrpSpPr/>
         <p:nvPr/>
       </p:nvGrpSpPr>
@@ -5617,7 +5789,13 @@
       </p:grpSpPr>
       <p:sp>
         <p:nvSpPr>
-          <p:cNvPr id="4" name="Téglalap 3"/>
+          <p:cNvPr id="4" name="Téglalap 3">
+            <a:extLst>
+              <a:ext uri="{FF2B5EF4-FFF2-40B4-BE49-F238E27FC236}">
+                <a16:creationId xmlns:a16="http://schemas.microsoft.com/office/drawing/2014/main" id="{388636D0-263B-C9FE-6BA0-7E96C0FD0126}"/>
+              </a:ext>
+            </a:extLst>
+          </p:cNvPr>
           <p:cNvSpPr/>
           <p:nvPr/>
         </p:nvSpPr>
@@ -5670,14 +5848,20 @@
       </p:sp>
       <p:sp>
         <p:nvSpPr>
-          <p:cNvPr id="2" name="Szövegdoboz 1"/>
+          <p:cNvPr id="2" name="Szövegdoboz 1">
+            <a:extLst>
+              <a:ext uri="{FF2B5EF4-FFF2-40B4-BE49-F238E27FC236}">
+                <a16:creationId xmlns:a16="http://schemas.microsoft.com/office/drawing/2014/main" id="{0C9DC7C9-E4AB-1E64-02AE-427317C4F318}"/>
+              </a:ext>
+            </a:extLst>
+          </p:cNvPr>
           <p:cNvSpPr txBox="1"/>
           <p:nvPr/>
         </p:nvSpPr>
         <p:spPr>
           <a:xfrm>
-            <a:off x="2277763" y="9700"/>
-            <a:ext cx="7593630" cy="769441"/>
+            <a:off x="2245200" y="24854"/>
+            <a:ext cx="7379565" cy="769441"/>
           </a:xfrm>
           <a:prstGeom prst="rect">
             <a:avLst/>
@@ -5685,7 +5869,7 @@
           <a:noFill/>
         </p:spPr>
         <p:txBody>
-          <a:bodyPr wrap="square" rtlCol="0">
+          <a:bodyPr wrap="square" lIns="91440" tIns="45720" rIns="91440" bIns="45720" rtlCol="0" anchor="t">
             <a:spAutoFit/>
           </a:bodyPr>
           <a:lstStyle/>
@@ -5703,433 +5887,545 @@
                 <a:solidFill>
                   <a:schemeClr val="bg1"/>
                 </a:solidFill>
-                <a:latin typeface="Ink Free" panose="03080402000500000000" pitchFamily="66" charset="0"/>
-              </a:rPr>
-              <a:t>Fejlesztési környezet</a:t>
-            </a:r>
-          </a:p>
-        </p:txBody>
-      </p:sp>
-      <p:sp>
-        <p:nvSpPr>
-          <p:cNvPr id="5" name="Szövegdoboz 4">
-            <a:extLst>
-              <a:ext uri="{FF2B5EF4-FFF2-40B4-BE49-F238E27FC236}">
-                <a16:creationId xmlns:a16="http://schemas.microsoft.com/office/drawing/2014/main" id="{81A0252E-27AE-4E33-B442-E4993C15E856}"/>
-              </a:ext>
-            </a:extLst>
-          </p:cNvPr>
-          <p:cNvSpPr txBox="1"/>
-          <p:nvPr/>
-        </p:nvSpPr>
-        <p:spPr>
-          <a:xfrm>
-            <a:off x="1925354" y="1324020"/>
-            <a:ext cx="5132719" cy="1200329"/>
-          </a:xfrm>
-          <a:prstGeom prst="rect">
-            <a:avLst/>
-          </a:prstGeom>
-          <a:noFill/>
-        </p:spPr>
-        <p:txBody>
-          <a:bodyPr wrap="square" rtlCol="0">
-            <a:spAutoFit/>
-          </a:bodyPr>
-          <a:lstStyle/>
-          <a:p>
-            <a:pPr marL="342900" indent="-342900">
-              <a:buFont typeface="Arial" panose="020B0604020202020204" pitchFamily="34" charset="0"/>
-              <a:buChar char="•"/>
-            </a:pPr>
-            <a:r>
-              <a:rPr lang="hu-HU" sz="2400" b="1" dirty="0">
-                <a:solidFill>
-                  <a:schemeClr val="accent4">
+                <a:latin typeface="Ink Free"/>
+              </a:rPr>
+              <a:t>WPF </a:t>
+            </a:r>
+            <a:r>
+              <a:rPr lang="hu-HU" sz="4400" b="1" dirty="0" err="1">
+                <a:ln w="6350">
+                  <a:solidFill>
+                    <a:schemeClr val="accent1">
+                      <a:lumMod val="75000"/>
+                    </a:schemeClr>
+                  </a:solidFill>
+                </a:ln>
+                <a:solidFill>
+                  <a:schemeClr val="bg1"/>
+                </a:solidFill>
+                <a:latin typeface="Ink Free"/>
+              </a:rPr>
+              <a:t>admin</a:t>
+            </a:r>
+            <a:r>
+              <a:rPr lang="hu-HU" sz="4400" b="1" dirty="0">
+                <a:ln w="6350">
+                  <a:solidFill>
+                    <a:schemeClr val="accent1">
+                      <a:lumMod val="75000"/>
+                    </a:schemeClr>
+                  </a:solidFill>
+                </a:ln>
+                <a:solidFill>
+                  <a:schemeClr val="bg1"/>
+                </a:solidFill>
+                <a:latin typeface="Ink Free"/>
+              </a:rPr>
+              <a:t>  felület: Alap ötlet</a:t>
+            </a:r>
+            <a:endParaRPr lang="hu-HU" sz="4400" b="1" dirty="0">
+              <a:ln w="6350">
+                <a:solidFill>
+                  <a:srgbClr val="5B9BD5">
                     <a:lumMod val="75000"/>
-                  </a:schemeClr>
-                </a:solidFill>
-              </a:rPr>
-              <a:t>HTML5</a:t>
-            </a:r>
-            <a:r>
-              <a:rPr lang="hu-HU" sz="2400" dirty="0">
-                <a:solidFill>
-                  <a:schemeClr val="accent4">
-                    <a:lumMod val="75000"/>
-                  </a:schemeClr>
-                </a:solidFill>
-              </a:rPr>
-              <a:t>: A weboldal készítés egyik alapja. Ezzel, a struktúráját, a vázát tudjuk elkészíteni</a:t>
-            </a:r>
-          </a:p>
-        </p:txBody>
-      </p:sp>
-      <p:sp>
-        <p:nvSpPr>
-          <p:cNvPr id="8" name="Szövegdoboz 7">
-            <a:extLst>
-              <a:ext uri="{FF2B5EF4-FFF2-40B4-BE49-F238E27FC236}">
-                <a16:creationId xmlns:a16="http://schemas.microsoft.com/office/drawing/2014/main" id="{9DBC5AD3-A244-47DE-9DDF-DEF316BF5867}"/>
-              </a:ext>
-            </a:extLst>
-          </p:cNvPr>
-          <p:cNvSpPr txBox="1"/>
-          <p:nvPr/>
-        </p:nvSpPr>
-        <p:spPr>
-          <a:xfrm>
-            <a:off x="1925354" y="3003272"/>
-            <a:ext cx="4272954" cy="1569660"/>
-          </a:xfrm>
-          <a:prstGeom prst="rect">
-            <a:avLst/>
-          </a:prstGeom>
-          <a:noFill/>
-        </p:spPr>
-        <p:txBody>
-          <a:bodyPr wrap="square" rtlCol="0">
-            <a:spAutoFit/>
-          </a:bodyPr>
-          <a:lstStyle/>
-          <a:p>
-            <a:pPr marL="342900" indent="-342900">
-              <a:buFont typeface="Arial" panose="020B0604020202020204" pitchFamily="34" charset="0"/>
-              <a:buChar char="•"/>
-            </a:pPr>
-            <a:r>
-              <a:rPr lang="hu-HU" sz="2400" b="1" dirty="0">
-                <a:solidFill>
-                  <a:schemeClr val="accent4">
-                    <a:lumMod val="75000"/>
-                  </a:schemeClr>
-                </a:solidFill>
-              </a:rPr>
-              <a:t>CSS3: </a:t>
-            </a:r>
-            <a:r>
-              <a:rPr lang="hu-HU" sz="2400" dirty="0">
-                <a:solidFill>
-                  <a:schemeClr val="accent4">
-                    <a:lumMod val="75000"/>
-                  </a:schemeClr>
-                </a:solidFill>
-              </a:rPr>
-              <a:t>Stílus kezelő nyelv a </a:t>
-            </a:r>
-            <a:r>
-              <a:rPr lang="hu-HU" sz="2400" dirty="0" err="1">
-                <a:solidFill>
-                  <a:schemeClr val="accent4">
-                    <a:lumMod val="75000"/>
-                  </a:schemeClr>
-                </a:solidFill>
-              </a:rPr>
-              <a:t>html-hez</a:t>
-            </a:r>
-            <a:r>
-              <a:rPr lang="hu-HU" sz="2400" dirty="0">
-                <a:solidFill>
-                  <a:schemeClr val="accent4">
-                    <a:lumMod val="75000"/>
-                  </a:schemeClr>
-                </a:solidFill>
-              </a:rPr>
-              <a:t>. Ezzel oldottuk meg a </a:t>
-            </a:r>
-            <a:r>
-              <a:rPr lang="hu-HU" sz="2400" dirty="0" err="1">
-                <a:solidFill>
-                  <a:schemeClr val="accent4">
-                    <a:lumMod val="75000"/>
-                  </a:schemeClr>
-                </a:solidFill>
-              </a:rPr>
-              <a:t>reszponzivitást</a:t>
-            </a:r>
-            <a:r>
-              <a:rPr lang="hu-HU" sz="2400" dirty="0">
-                <a:solidFill>
-                  <a:schemeClr val="accent4">
-                    <a:lumMod val="75000"/>
-                  </a:schemeClr>
-                </a:solidFill>
-              </a:rPr>
-              <a:t>, és az animációkat.</a:t>
-            </a:r>
-          </a:p>
-        </p:txBody>
-      </p:sp>
-      <p:sp>
-        <p:nvSpPr>
-          <p:cNvPr id="9" name="Szövegdoboz 8">
-            <a:extLst>
-              <a:ext uri="{FF2B5EF4-FFF2-40B4-BE49-F238E27FC236}">
-                <a16:creationId xmlns:a16="http://schemas.microsoft.com/office/drawing/2014/main" id="{DC408D15-66A1-4A4A-851B-EADA0E36EFB9}"/>
-              </a:ext>
-            </a:extLst>
-          </p:cNvPr>
-          <p:cNvSpPr txBox="1"/>
-          <p:nvPr/>
-        </p:nvSpPr>
-        <p:spPr>
-          <a:xfrm>
-            <a:off x="1925354" y="4708388"/>
-            <a:ext cx="4272954" cy="1569660"/>
-          </a:xfrm>
-          <a:prstGeom prst="rect">
-            <a:avLst/>
-          </a:prstGeom>
-          <a:noFill/>
-        </p:spPr>
-        <p:txBody>
-          <a:bodyPr wrap="square" rtlCol="0">
-            <a:spAutoFit/>
-          </a:bodyPr>
-          <a:lstStyle/>
-          <a:p>
-            <a:pPr marL="342900" indent="-342900">
-              <a:buFont typeface="Arial" panose="020B0604020202020204" pitchFamily="34" charset="0"/>
-              <a:buChar char="•"/>
-            </a:pPr>
-            <a:r>
-              <a:rPr lang="hu-HU" sz="2400" b="1" dirty="0">
-                <a:solidFill>
-                  <a:schemeClr val="accent4">
-                    <a:lumMod val="75000"/>
-                  </a:schemeClr>
-                </a:solidFill>
-              </a:rPr>
-              <a:t>JavaScript: </a:t>
-            </a:r>
-            <a:r>
-              <a:rPr lang="hu-HU" sz="2400" dirty="0">
-                <a:solidFill>
-                  <a:schemeClr val="accent4">
-                    <a:lumMod val="75000"/>
-                  </a:schemeClr>
-                </a:solidFill>
-              </a:rPr>
-              <a:t>Ez a nyelv a </a:t>
-            </a:r>
-            <a:r>
-              <a:rPr lang="hu-HU" sz="2400" dirty="0" err="1">
-                <a:solidFill>
-                  <a:schemeClr val="accent4">
-                    <a:lumMod val="75000"/>
-                  </a:schemeClr>
-                </a:solidFill>
-              </a:rPr>
-              <a:t>dinamikusságot</a:t>
-            </a:r>
-            <a:r>
-              <a:rPr lang="hu-HU" sz="2400" dirty="0">
-                <a:solidFill>
-                  <a:schemeClr val="accent4">
-                    <a:lumMod val="75000"/>
-                  </a:schemeClr>
-                </a:solidFill>
-              </a:rPr>
-              <a:t> adja az oldalakhoz, illetve az eseménykezeléseket.</a:t>
-            </a:r>
+                  </a:srgbClr>
+                </a:solidFill>
+              </a:ln>
+              <a:solidFill>
+                <a:schemeClr val="bg1"/>
+              </a:solidFill>
+              <a:latin typeface="Ink Free"/>
+            </a:endParaRPr>
           </a:p>
         </p:txBody>
       </p:sp>
       <p:pic>
         <p:nvPicPr>
-          <p:cNvPr id="1026" name="Picture 2" descr="undefined"/>
+          <p:cNvPr id="8" name="Kép 7" descr="A képen gyertya látható&#10;&#10;Lehet, hogy az AI által létrehozott tartalom helytelen.">
+            <a:extLst>
+              <a:ext uri="{FF2B5EF4-FFF2-40B4-BE49-F238E27FC236}">
+                <a16:creationId xmlns:a16="http://schemas.microsoft.com/office/drawing/2014/main" id="{84BCDA3D-FFE2-56B5-F922-738894B8BF3C}"/>
+              </a:ext>
+            </a:extLst>
+          </p:cNvPr>
           <p:cNvPicPr>
-            <a:picLocks noChangeAspect="1" noChangeArrowheads="1"/>
+            <a:picLocks noChangeAspect="1"/>
           </p:cNvPicPr>
           <p:nvPr/>
         </p:nvPicPr>
         <p:blipFill>
-          <a:blip r:embed="rId2" cstate="print">
-            <a:extLst>
-              <a:ext uri="{28A0092B-C50C-407E-A947-70E740481C1C}">
-                <a14:useLocalDpi xmlns:a14="http://schemas.microsoft.com/office/drawing/2010/main" val="0"/>
-              </a:ext>
-            </a:extLst>
-          </a:blip>
-          <a:srcRect/>
+          <a:blip r:embed="rId2"/>
           <a:stretch>
             <a:fillRect/>
           </a:stretch>
         </p:blipFill>
-        <p:spPr bwMode="auto">
-          <a:xfrm>
-            <a:off x="341311" y="1098911"/>
-            <a:ext cx="1584043" cy="1584043"/>
+        <p:spPr>
+          <a:xfrm>
+            <a:off x="87751" y="58187"/>
+            <a:ext cx="722857" cy="707199"/>
+          </a:xfrm>
+          <a:prstGeom prst="rect">
+            <a:avLst/>
+          </a:prstGeom>
+        </p:spPr>
+      </p:pic>
+      <p:sp>
+        <p:nvSpPr>
+          <p:cNvPr id="16" name="Szövegdoboz 15">
+            <a:extLst>
+              <a:ext uri="{FF2B5EF4-FFF2-40B4-BE49-F238E27FC236}">
+                <a16:creationId xmlns:a16="http://schemas.microsoft.com/office/drawing/2014/main" id="{10397239-E9B5-42FA-89D9-F6B48ED1B720}"/>
+              </a:ext>
+            </a:extLst>
+          </p:cNvPr>
+          <p:cNvSpPr txBox="1"/>
+          <p:nvPr/>
+        </p:nvSpPr>
+        <p:spPr>
+          <a:xfrm>
+            <a:off x="2114767" y="4638236"/>
+            <a:ext cx="4340083" cy="923330"/>
           </a:xfrm>
           <a:prstGeom prst="rect">
             <a:avLst/>
           </a:prstGeom>
           <a:noFill/>
-          <a:extLst>
-            <a:ext uri="{909E8E84-426E-40DD-AFC4-6F175D3DCCD1}">
-              <a14:hiddenFill xmlns:a14="http://schemas.microsoft.com/office/drawing/2010/main">
-                <a:solidFill>
-                  <a:srgbClr val="FFFFFF"/>
-                </a:solidFill>
-              </a14:hiddenFill>
-            </a:ext>
-          </a:extLst>
-        </p:spPr>
-      </p:pic>
+        </p:spPr>
+        <p:txBody>
+          <a:bodyPr wrap="square" rtlCol="0">
+            <a:spAutoFit/>
+          </a:bodyPr>
+          <a:lstStyle/>
+          <a:p>
+            <a:r>
+              <a:rPr lang="hu-HU" dirty="0">
+                <a:solidFill>
+                  <a:srgbClr val="BF9000"/>
+                </a:solidFill>
+              </a:rPr>
+              <a:t>A Regisztrációs adatbázisba ez a hivatkozás került volna be, ami biztosította hogy elindítsa az </a:t>
+            </a:r>
+            <a:r>
+              <a:rPr lang="hu-HU" dirty="0" err="1">
+                <a:solidFill>
+                  <a:srgbClr val="BF9000"/>
+                </a:solidFill>
+              </a:rPr>
+              <a:t>admin</a:t>
+            </a:r>
+            <a:r>
+              <a:rPr lang="hu-HU" dirty="0">
+                <a:solidFill>
+                  <a:srgbClr val="BF9000"/>
+                </a:solidFill>
+              </a:rPr>
+              <a:t> alkalmazást</a:t>
+            </a:r>
+          </a:p>
+        </p:txBody>
+      </p:sp>
       <p:pic>
         <p:nvPicPr>
-          <p:cNvPr id="1028" name="Picture 4" descr="undefined"/>
+          <p:cNvPr id="9" name="Kép 8">
+            <a:extLst>
+              <a:ext uri="{FF2B5EF4-FFF2-40B4-BE49-F238E27FC236}">
+                <a16:creationId xmlns:a16="http://schemas.microsoft.com/office/drawing/2014/main" id="{5C229837-0636-4736-BF62-E9860C47C382}"/>
+              </a:ext>
+            </a:extLst>
+          </p:cNvPr>
           <p:cNvPicPr>
-            <a:picLocks noChangeAspect="1" noChangeArrowheads="1"/>
+            <a:picLocks noChangeAspect="1"/>
           </p:cNvPicPr>
           <p:nvPr/>
         </p:nvPicPr>
         <p:blipFill>
-          <a:blip r:embed="rId3" cstate="print">
-            <a:extLst>
-              <a:ext uri="{28A0092B-C50C-407E-A947-70E740481C1C}">
-                <a14:useLocalDpi xmlns:a14="http://schemas.microsoft.com/office/drawing/2010/main" val="0"/>
-              </a:ext>
-            </a:extLst>
-          </a:blip>
-          <a:srcRect/>
+          <a:blip r:embed="rId3"/>
           <a:stretch>
             <a:fillRect/>
           </a:stretch>
         </p:blipFill>
-        <p:spPr bwMode="auto">
-          <a:xfrm>
-            <a:off x="455240" y="2970021"/>
-            <a:ext cx="1356187" cy="1356187"/>
+        <p:spPr>
+          <a:xfrm>
+            <a:off x="0" y="877336"/>
+            <a:ext cx="1960775" cy="5963687"/>
+          </a:xfrm>
+          <a:prstGeom prst="rect">
+            <a:avLst/>
+          </a:prstGeom>
+        </p:spPr>
+      </p:pic>
+      <p:sp>
+        <p:nvSpPr>
+          <p:cNvPr id="13" name="Téglalap 12">
+            <a:extLst>
+              <a:ext uri="{FF2B5EF4-FFF2-40B4-BE49-F238E27FC236}">
+                <a16:creationId xmlns:a16="http://schemas.microsoft.com/office/drawing/2014/main" id="{E61CFF86-4B89-49EA-8B72-2D6CA0266879}"/>
+              </a:ext>
+            </a:extLst>
+          </p:cNvPr>
+          <p:cNvSpPr/>
+          <p:nvPr/>
+        </p:nvSpPr>
+        <p:spPr>
+          <a:xfrm>
+            <a:off x="0" y="4779390"/>
+            <a:ext cx="1960775" cy="641022"/>
           </a:xfrm>
           <a:prstGeom prst="rect">
             <a:avLst/>
           </a:prstGeom>
           <a:noFill/>
-          <a:extLst>
-            <a:ext uri="{909E8E84-426E-40DD-AFC4-6F175D3DCCD1}">
-              <a14:hiddenFill xmlns:a14="http://schemas.microsoft.com/office/drawing/2010/main">
-                <a:solidFill>
-                  <a:srgbClr val="FFFFFF"/>
-                </a:solidFill>
-              </a14:hiddenFill>
-            </a:ext>
-          </a:extLst>
-        </p:spPr>
-      </p:pic>
+          <a:ln w="38100">
+            <a:solidFill>
+              <a:srgbClr val="FF0000"/>
+            </a:solidFill>
+          </a:ln>
+        </p:spPr>
+        <p:style>
+          <a:lnRef idx="2">
+            <a:schemeClr val="accent1">
+              <a:shade val="50000"/>
+            </a:schemeClr>
+          </a:lnRef>
+          <a:fillRef idx="1">
+            <a:schemeClr val="accent1"/>
+          </a:fillRef>
+          <a:effectRef idx="0">
+            <a:schemeClr val="accent1"/>
+          </a:effectRef>
+          <a:fontRef idx="minor">
+            <a:schemeClr val="lt1"/>
+          </a:fontRef>
+        </p:style>
+        <p:txBody>
+          <a:bodyPr rtlCol="0" anchor="ctr"/>
+          <a:lstStyle/>
+          <a:p>
+            <a:pPr algn="ctr"/>
+            <a:endParaRPr lang="hu-HU">
+              <a:solidFill>
+                <a:schemeClr val="tx1"/>
+              </a:solidFill>
+            </a:endParaRPr>
+          </a:p>
+        </p:txBody>
+      </p:sp>
       <p:pic>
         <p:nvPicPr>
-          <p:cNvPr id="1030" name="Picture 6" descr="undefined"/>
+          <p:cNvPr id="18" name="Kép 17">
+            <a:extLst>
+              <a:ext uri="{FF2B5EF4-FFF2-40B4-BE49-F238E27FC236}">
+                <a16:creationId xmlns:a16="http://schemas.microsoft.com/office/drawing/2014/main" id="{DE4DBBF7-414B-409A-9DB9-2AF5CB7EB3E4}"/>
+              </a:ext>
+            </a:extLst>
+          </p:cNvPr>
           <p:cNvPicPr>
-            <a:picLocks noChangeAspect="1" noChangeArrowheads="1"/>
+            <a:picLocks noChangeAspect="1"/>
           </p:cNvPicPr>
           <p:nvPr/>
         </p:nvPicPr>
         <p:blipFill>
-          <a:blip r:embed="rId4" cstate="print">
-            <a:extLst>
-              <a:ext uri="{28A0092B-C50C-407E-A947-70E740481C1C}">
-                <a14:useLocalDpi xmlns:a14="http://schemas.microsoft.com/office/drawing/2010/main" val="0"/>
-              </a:ext>
-            </a:extLst>
-          </a:blip>
-          <a:srcRect/>
+          <a:blip r:embed="rId4"/>
           <a:stretch>
             <a:fillRect/>
           </a:stretch>
         </p:blipFill>
-        <p:spPr bwMode="auto">
-          <a:xfrm>
-            <a:off x="367954" y="4675137"/>
-            <a:ext cx="1530761" cy="1530761"/>
+        <p:spPr>
+          <a:xfrm>
+            <a:off x="2315071" y="1001118"/>
+            <a:ext cx="5563376" cy="590632"/>
+          </a:xfrm>
+          <a:prstGeom prst="rect">
+            <a:avLst/>
+          </a:prstGeom>
+        </p:spPr>
+      </p:pic>
+      <p:sp>
+        <p:nvSpPr>
+          <p:cNvPr id="19" name="Szövegdoboz 18">
+            <a:extLst>
+              <a:ext uri="{FF2B5EF4-FFF2-40B4-BE49-F238E27FC236}">
+                <a16:creationId xmlns:a16="http://schemas.microsoft.com/office/drawing/2014/main" id="{32131AA8-BB19-4620-80A2-23A3486A321D}"/>
+              </a:ext>
+            </a:extLst>
+          </p:cNvPr>
+          <p:cNvSpPr txBox="1"/>
+          <p:nvPr/>
+        </p:nvSpPr>
+        <p:spPr>
+          <a:xfrm>
+            <a:off x="4284808" y="1591750"/>
+            <a:ext cx="1230178" cy="369332"/>
           </a:xfrm>
           <a:prstGeom prst="rect">
             <a:avLst/>
           </a:prstGeom>
           <a:noFill/>
-          <a:extLst>
-            <a:ext uri="{909E8E84-426E-40DD-AFC4-6F175D3DCCD1}">
-              <a14:hiddenFill xmlns:a14="http://schemas.microsoft.com/office/drawing/2010/main">
-                <a:solidFill>
-                  <a:srgbClr val="FFFFFF"/>
-                </a:solidFill>
-              </a14:hiddenFill>
-            </a:ext>
-          </a:extLst>
-        </p:spPr>
-      </p:pic>
+        </p:spPr>
+        <p:txBody>
+          <a:bodyPr wrap="square" rtlCol="0">
+            <a:spAutoFit/>
+          </a:bodyPr>
+          <a:lstStyle/>
+          <a:p>
+            <a:r>
+              <a:rPr lang="hu-HU" dirty="0">
+                <a:solidFill>
+                  <a:srgbClr val="BF9000"/>
+                </a:solidFill>
+              </a:rPr>
+              <a:t>Hivatkozás</a:t>
+            </a:r>
+          </a:p>
+        </p:txBody>
+      </p:sp>
       <p:pic>
         <p:nvPicPr>
-          <p:cNvPr id="6" name="Kép 5"/>
+          <p:cNvPr id="21" name="Kép 20">
+            <a:extLst>
+              <a:ext uri="{FF2B5EF4-FFF2-40B4-BE49-F238E27FC236}">
+                <a16:creationId xmlns:a16="http://schemas.microsoft.com/office/drawing/2014/main" id="{BED49B21-537B-4302-93E8-41D7419D5BB4}"/>
+              </a:ext>
+            </a:extLst>
+          </p:cNvPr>
           <p:cNvPicPr>
             <a:picLocks noChangeAspect="1"/>
           </p:cNvPicPr>
           <p:nvPr/>
         </p:nvPicPr>
         <p:blipFill>
-          <a:blip r:embed="rId5" cstate="print">
-            <a:extLst>
-              <a:ext uri="{28A0092B-C50C-407E-A947-70E740481C1C}">
-                <a14:useLocalDpi xmlns:a14="http://schemas.microsoft.com/office/drawing/2010/main" val="0"/>
-              </a:ext>
-            </a:extLst>
-          </a:blip>
+          <a:blip r:embed="rId5"/>
           <a:stretch>
             <a:fillRect/>
           </a:stretch>
         </p:blipFill>
         <p:spPr>
           <a:xfrm>
-            <a:off x="7810106" y="1098911"/>
-            <a:ext cx="2109967" cy="5582857"/>
-          </a:xfrm>
-          <a:prstGeom prst="rect">
-            <a:avLst/>
-          </a:prstGeom>
+            <a:off x="9624765" y="1001118"/>
+            <a:ext cx="2362530" cy="3391373"/>
+          </a:xfrm>
+          <a:prstGeom prst="rect">
+            <a:avLst/>
+          </a:prstGeom>
+        </p:spPr>
+      </p:pic>
+      <p:sp>
+        <p:nvSpPr>
+          <p:cNvPr id="22" name="Szövegdoboz 21">
+            <a:extLst>
+              <a:ext uri="{FF2B5EF4-FFF2-40B4-BE49-F238E27FC236}">
+                <a16:creationId xmlns:a16="http://schemas.microsoft.com/office/drawing/2014/main" id="{258D1CFF-78A7-4F5D-9DF5-9FD0C575BD1B}"/>
+              </a:ext>
+            </a:extLst>
+          </p:cNvPr>
+          <p:cNvSpPr txBox="1"/>
+          <p:nvPr/>
+        </p:nvSpPr>
+        <p:spPr>
+          <a:xfrm>
+            <a:off x="9395542" y="4409965"/>
+            <a:ext cx="2820976" cy="1477328"/>
+          </a:xfrm>
+          <a:prstGeom prst="rect">
+            <a:avLst/>
+          </a:prstGeom>
+          <a:noFill/>
+        </p:spPr>
+        <p:txBody>
+          <a:bodyPr wrap="square" rtlCol="0">
+            <a:spAutoFit/>
+          </a:bodyPr>
+          <a:lstStyle/>
+          <a:p>
+            <a:r>
+              <a:rPr lang="hu-HU" dirty="0">
+                <a:solidFill>
+                  <a:srgbClr val="BF9000"/>
+                </a:solidFill>
+              </a:rPr>
+              <a:t>A DózsaAdmin_Installer.exe, illetve az </a:t>
+            </a:r>
+            <a:r>
+              <a:rPr lang="hu-HU" dirty="0" err="1">
+                <a:solidFill>
+                  <a:srgbClr val="BF9000"/>
+                </a:solidFill>
+              </a:rPr>
+              <a:t>admininstaller.iss</a:t>
+            </a:r>
+            <a:endParaRPr lang="hu-HU" dirty="0">
+              <a:solidFill>
+                <a:srgbClr val="BF9000"/>
+              </a:solidFill>
+            </a:endParaRPr>
+          </a:p>
+          <a:p>
+            <a:r>
+              <a:rPr lang="hu-HU" dirty="0">
+                <a:solidFill>
+                  <a:srgbClr val="BF9000"/>
+                </a:solidFill>
+              </a:rPr>
+              <a:t>Fájlokat kellett volna elindítani, és az feltöltötte volna. </a:t>
+            </a:r>
+          </a:p>
+        </p:txBody>
+      </p:sp>
+      <p:sp>
+        <p:nvSpPr>
+          <p:cNvPr id="23" name="Téglalap 22">
+            <a:extLst>
+              <a:ext uri="{FF2B5EF4-FFF2-40B4-BE49-F238E27FC236}">
+                <a16:creationId xmlns:a16="http://schemas.microsoft.com/office/drawing/2014/main" id="{E822E13A-3337-484A-BCD1-EEF16C378172}"/>
+              </a:ext>
+            </a:extLst>
+          </p:cNvPr>
+          <p:cNvSpPr/>
+          <p:nvPr/>
+        </p:nvSpPr>
+        <p:spPr>
+          <a:xfrm>
+            <a:off x="9624765" y="3525625"/>
+            <a:ext cx="1414023" cy="165754"/>
+          </a:xfrm>
+          <a:prstGeom prst="rect">
+            <a:avLst/>
+          </a:prstGeom>
+          <a:noFill/>
           <a:ln w="38100">
             <a:solidFill>
-              <a:schemeClr val="accent1">
-                <a:lumMod val="60000"/>
-                <a:lumOff val="40000"/>
-              </a:schemeClr>
+              <a:srgbClr val="FF0000"/>
             </a:solidFill>
           </a:ln>
         </p:spPr>
-      </p:pic>
-      <p:pic>
-        <p:nvPicPr>
-          <p:cNvPr id="11" name="Kép 10" descr="A képen gyertya látható&#10;&#10;Lehet, hogy az AI által létrehozott tartalom helytelen.">
-            <a:extLst>
-              <a:ext uri="{FF2B5EF4-FFF2-40B4-BE49-F238E27FC236}">
-                <a16:creationId xmlns:a16="http://schemas.microsoft.com/office/drawing/2014/main" id="{D3DEDDEB-CC78-19AB-2DC6-A9FA1C77460C}"/>
-              </a:ext>
-            </a:extLst>
-          </p:cNvPr>
-          <p:cNvPicPr>
-            <a:picLocks noChangeAspect="1"/>
-          </p:cNvPicPr>
-          <p:nvPr/>
-        </p:nvPicPr>
-        <p:blipFill>
-          <a:blip r:embed="rId6"/>
-          <a:stretch>
-            <a:fillRect/>
-          </a:stretch>
-        </p:blipFill>
-        <p:spPr>
-          <a:xfrm>
-            <a:off x="87751" y="58187"/>
-            <a:ext cx="722857" cy="707199"/>
-          </a:xfrm>
-          <a:prstGeom prst="rect">
-            <a:avLst/>
-          </a:prstGeom>
-        </p:spPr>
-      </p:pic>
+        <p:style>
+          <a:lnRef idx="2">
+            <a:schemeClr val="accent1">
+              <a:shade val="50000"/>
+            </a:schemeClr>
+          </a:lnRef>
+          <a:fillRef idx="1">
+            <a:schemeClr val="accent1"/>
+          </a:fillRef>
+          <a:effectRef idx="0">
+            <a:schemeClr val="accent1"/>
+          </a:effectRef>
+          <a:fontRef idx="minor">
+            <a:schemeClr val="lt1"/>
+          </a:fontRef>
+        </p:style>
+        <p:txBody>
+          <a:bodyPr rtlCol="0" anchor="ctr"/>
+          <a:lstStyle/>
+          <a:p>
+            <a:pPr algn="ctr"/>
+            <a:endParaRPr lang="hu-HU">
+              <a:solidFill>
+                <a:schemeClr val="tx1"/>
+              </a:solidFill>
+            </a:endParaRPr>
+          </a:p>
+        </p:txBody>
+      </p:sp>
+      <p:sp>
+        <p:nvSpPr>
+          <p:cNvPr id="24" name="Téglalap 23">
+            <a:extLst>
+              <a:ext uri="{FF2B5EF4-FFF2-40B4-BE49-F238E27FC236}">
+                <a16:creationId xmlns:a16="http://schemas.microsoft.com/office/drawing/2014/main" id="{12390B52-0DAB-4AFB-A2C4-AC4BE94C919C}"/>
+              </a:ext>
+            </a:extLst>
+          </p:cNvPr>
+          <p:cNvSpPr/>
+          <p:nvPr/>
+        </p:nvSpPr>
+        <p:spPr>
+          <a:xfrm>
+            <a:off x="9796019" y="1213557"/>
+            <a:ext cx="1657548" cy="165754"/>
+          </a:xfrm>
+          <a:prstGeom prst="rect">
+            <a:avLst/>
+          </a:prstGeom>
+          <a:noFill/>
+          <a:ln w="38100">
+            <a:solidFill>
+              <a:srgbClr val="FF0000"/>
+            </a:solidFill>
+          </a:ln>
+        </p:spPr>
+        <p:style>
+          <a:lnRef idx="2">
+            <a:schemeClr val="accent1">
+              <a:shade val="50000"/>
+            </a:schemeClr>
+          </a:lnRef>
+          <a:fillRef idx="1">
+            <a:schemeClr val="accent1"/>
+          </a:fillRef>
+          <a:effectRef idx="0">
+            <a:schemeClr val="accent1"/>
+          </a:effectRef>
+          <a:fontRef idx="minor">
+            <a:schemeClr val="lt1"/>
+          </a:fontRef>
+        </p:style>
+        <p:txBody>
+          <a:bodyPr rtlCol="0" anchor="ctr"/>
+          <a:lstStyle/>
+          <a:p>
+            <a:pPr algn="ctr"/>
+            <a:endParaRPr lang="hu-HU">
+              <a:solidFill>
+                <a:schemeClr val="tx1"/>
+              </a:solidFill>
+            </a:endParaRPr>
+          </a:p>
+        </p:txBody>
+      </p:sp>
+      <p:sp>
+        <p:nvSpPr>
+          <p:cNvPr id="25" name="Szövegdoboz 24">
+            <a:extLst>
+              <a:ext uri="{FF2B5EF4-FFF2-40B4-BE49-F238E27FC236}">
+                <a16:creationId xmlns:a16="http://schemas.microsoft.com/office/drawing/2014/main" id="{F6B6F2B6-90AA-4C04-B96E-99CF2441D332}"/>
+              </a:ext>
+            </a:extLst>
+          </p:cNvPr>
+          <p:cNvSpPr txBox="1"/>
+          <p:nvPr/>
+        </p:nvSpPr>
+        <p:spPr>
+          <a:xfrm>
+            <a:off x="2952732" y="2871284"/>
+            <a:ext cx="5659031" cy="1200329"/>
+          </a:xfrm>
+          <a:prstGeom prst="rect">
+            <a:avLst/>
+          </a:prstGeom>
+          <a:noFill/>
+        </p:spPr>
+        <p:txBody>
+          <a:bodyPr wrap="square" rtlCol="0">
+            <a:spAutoFit/>
+          </a:bodyPr>
+          <a:lstStyle/>
+          <a:p>
+            <a:r>
+              <a:rPr lang="hu-HU" sz="2400" b="1" dirty="0">
+                <a:solidFill>
+                  <a:srgbClr val="BF9000"/>
+                </a:solidFill>
+              </a:rPr>
+              <a:t>A fejlesztés kihívásai, és a technológiai megoldások nehézségei miatt végül félbehagytuk, és kivettük a fejlesztésből!</a:t>
+            </a:r>
+          </a:p>
+        </p:txBody>
+      </p:sp>
     </p:spTree>
     <p:extLst>
       <p:ext uri="{BB962C8B-B14F-4D97-AF65-F5344CB8AC3E}">
-        <p14:creationId xmlns:p14="http://schemas.microsoft.com/office/powerpoint/2010/main" val="226778464"/>
+        <p14:creationId xmlns:p14="http://schemas.microsoft.com/office/powerpoint/2010/main" val="3436101648"/>
       </p:ext>
     </p:extLst>
   </p:cSld>
@@ -6231,8 +6527,8 @@
         </p:nvSpPr>
         <p:spPr>
           <a:xfrm>
-            <a:off x="1402888" y="18383"/>
-            <a:ext cx="9208245" cy="769441"/>
+            <a:off x="2788443" y="47687"/>
+            <a:ext cx="6615113" cy="769441"/>
           </a:xfrm>
           <a:prstGeom prst="rect">
             <a:avLst/>
@@ -6260,20 +6556,14 @@
                 </a:solidFill>
                 <a:latin typeface="Ink Free" panose="03080402000500000000" pitchFamily="66" charset="0"/>
               </a:rPr>
-              <a:t>Munka menedzsment/Verziókövetés</a:t>
+              <a:t>Fejlesztési környezet</a:t>
             </a:r>
           </a:p>
         </p:txBody>
       </p:sp>
       <p:pic>
         <p:nvPicPr>
-          <p:cNvPr id="5" name="Picture 2" descr="undefined">
-            <a:extLst>
-              <a:ext uri="{FF2B5EF4-FFF2-40B4-BE49-F238E27FC236}">
-                <a16:creationId xmlns:a16="http://schemas.microsoft.com/office/drawing/2014/main" id="{E6A87C9D-5229-4363-95A2-B453ADD8C8D7}"/>
-              </a:ext>
-            </a:extLst>
-          </p:cNvPr>
+          <p:cNvPr id="1026" name="Picture 2" descr="undefined"/>
           <p:cNvPicPr>
             <a:picLocks noChangeAspect="1" noChangeArrowheads="1"/>
           </p:cNvPicPr>
@@ -6294,8 +6584,8 @@
         </p:blipFill>
         <p:spPr bwMode="auto">
           <a:xfrm>
-            <a:off x="731043" y="1026546"/>
-            <a:ext cx="1761990" cy="1761990"/>
+            <a:off x="512964" y="1264346"/>
+            <a:ext cx="1709738" cy="1709738"/>
           </a:xfrm>
           <a:prstGeom prst="rect">
             <a:avLst/>
@@ -6312,187 +6602,300 @@
           </a:extLst>
         </p:spPr>
       </p:pic>
+      <p:sp>
+        <p:nvSpPr>
+          <p:cNvPr id="5" name="Szövegdoboz 4">
+            <a:extLst>
+              <a:ext uri="{FF2B5EF4-FFF2-40B4-BE49-F238E27FC236}">
+                <a16:creationId xmlns:a16="http://schemas.microsoft.com/office/drawing/2014/main" id="{81A0252E-27AE-4E33-B442-E4993C15E856}"/>
+              </a:ext>
+            </a:extLst>
+          </p:cNvPr>
+          <p:cNvSpPr txBox="1"/>
+          <p:nvPr/>
+        </p:nvSpPr>
+        <p:spPr>
+          <a:xfrm>
+            <a:off x="2280839" y="1218892"/>
+            <a:ext cx="5132719" cy="1569660"/>
+          </a:xfrm>
+          <a:prstGeom prst="rect">
+            <a:avLst/>
+          </a:prstGeom>
+          <a:noFill/>
+        </p:spPr>
+        <p:txBody>
+          <a:bodyPr wrap="square" rtlCol="0">
+            <a:spAutoFit/>
+          </a:bodyPr>
+          <a:lstStyle/>
+          <a:p>
+            <a:pPr marL="342900" indent="-342900">
+              <a:buFont typeface="Arial" panose="020B0604020202020204" pitchFamily="34" charset="0"/>
+              <a:buChar char="•"/>
+            </a:pPr>
+            <a:r>
+              <a:rPr lang="hu-HU" sz="2400" b="1" dirty="0">
+                <a:solidFill>
+                  <a:schemeClr val="accent4">
+                    <a:lumMod val="75000"/>
+                  </a:schemeClr>
+                </a:solidFill>
+              </a:rPr>
+              <a:t>Visual </a:t>
+            </a:r>
+            <a:r>
+              <a:rPr lang="hu-HU" sz="2400" b="1" dirty="0" err="1">
+                <a:solidFill>
+                  <a:schemeClr val="accent4">
+                    <a:lumMod val="75000"/>
+                  </a:schemeClr>
+                </a:solidFill>
+              </a:rPr>
+              <a:t>Studio</a:t>
+            </a:r>
+            <a:r>
+              <a:rPr lang="hu-HU" sz="2400" b="1" dirty="0">
+                <a:solidFill>
+                  <a:schemeClr val="accent4">
+                    <a:lumMod val="75000"/>
+                  </a:schemeClr>
+                </a:solidFill>
+              </a:rPr>
+              <a:t> </a:t>
+            </a:r>
+            <a:r>
+              <a:rPr lang="hu-HU" sz="2400" b="1" dirty="0" err="1">
+                <a:solidFill>
+                  <a:schemeClr val="accent4">
+                    <a:lumMod val="75000"/>
+                  </a:schemeClr>
+                </a:solidFill>
+              </a:rPr>
+              <a:t>Code</a:t>
+            </a:r>
+            <a:r>
+              <a:rPr lang="hu-HU" sz="2400" b="1" dirty="0">
+                <a:solidFill>
+                  <a:schemeClr val="accent4">
+                    <a:lumMod val="75000"/>
+                  </a:schemeClr>
+                </a:solidFill>
+              </a:rPr>
+              <a:t>(VSC)</a:t>
+            </a:r>
+            <a:r>
+              <a:rPr lang="hu-HU" sz="2400" dirty="0">
+                <a:solidFill>
+                  <a:schemeClr val="accent4">
+                    <a:lumMod val="75000"/>
+                  </a:schemeClr>
+                </a:solidFill>
+              </a:rPr>
+              <a:t>: Egy fejlesztői környezet, amiben a szerver, a frontend(</a:t>
+            </a:r>
+            <a:r>
+              <a:rPr lang="hu-HU" sz="2400" dirty="0" err="1">
+                <a:solidFill>
+                  <a:schemeClr val="accent4">
+                    <a:lumMod val="75000"/>
+                  </a:schemeClr>
+                </a:solidFill>
+              </a:rPr>
+              <a:t>html</a:t>
+            </a:r>
+            <a:r>
+              <a:rPr lang="hu-HU" sz="2400" dirty="0">
+                <a:solidFill>
+                  <a:schemeClr val="accent4">
+                    <a:lumMod val="75000"/>
+                  </a:schemeClr>
+                </a:solidFill>
+              </a:rPr>
+              <a:t>, </a:t>
+            </a:r>
+            <a:r>
+              <a:rPr lang="hu-HU" sz="2400" dirty="0" err="1">
+                <a:solidFill>
+                  <a:schemeClr val="accent4">
+                    <a:lumMod val="75000"/>
+                  </a:schemeClr>
+                </a:solidFill>
+              </a:rPr>
+              <a:t>css</a:t>
+            </a:r>
+            <a:r>
+              <a:rPr lang="hu-HU" sz="2400" dirty="0">
+                <a:solidFill>
+                  <a:schemeClr val="accent4">
+                    <a:lumMod val="75000"/>
+                  </a:schemeClr>
+                </a:solidFill>
+              </a:rPr>
+              <a:t>, </a:t>
+            </a:r>
+            <a:r>
+              <a:rPr lang="hu-HU" sz="2400" dirty="0" err="1">
+                <a:solidFill>
+                  <a:schemeClr val="accent4">
+                    <a:lumMod val="75000"/>
+                  </a:schemeClr>
+                </a:solidFill>
+              </a:rPr>
+              <a:t>javascript</a:t>
+            </a:r>
+            <a:r>
+              <a:rPr lang="hu-HU" sz="2400" dirty="0">
+                <a:solidFill>
+                  <a:schemeClr val="accent4">
+                    <a:lumMod val="75000"/>
+                  </a:schemeClr>
+                </a:solidFill>
+              </a:rPr>
+              <a:t>, </a:t>
+            </a:r>
+            <a:r>
+              <a:rPr lang="hu-HU" sz="2400" dirty="0" err="1">
+                <a:solidFill>
+                  <a:schemeClr val="accent4">
+                    <a:lumMod val="75000"/>
+                  </a:schemeClr>
+                </a:solidFill>
+              </a:rPr>
+              <a:t>ejs</a:t>
+            </a:r>
+            <a:r>
+              <a:rPr lang="hu-HU" sz="2400" dirty="0">
+                <a:solidFill>
+                  <a:schemeClr val="accent4">
+                    <a:lumMod val="75000"/>
+                  </a:schemeClr>
+                </a:solidFill>
+              </a:rPr>
+              <a:t>) készült</a:t>
+            </a:r>
+          </a:p>
+        </p:txBody>
+      </p:sp>
+      <p:sp>
+        <p:nvSpPr>
+          <p:cNvPr id="8" name="Szövegdoboz 7">
+            <a:extLst>
+              <a:ext uri="{FF2B5EF4-FFF2-40B4-BE49-F238E27FC236}">
+                <a16:creationId xmlns:a16="http://schemas.microsoft.com/office/drawing/2014/main" id="{9DBC5AD3-A244-47DE-9DDF-DEF316BF5867}"/>
+              </a:ext>
+            </a:extLst>
+          </p:cNvPr>
+          <p:cNvSpPr txBox="1"/>
+          <p:nvPr/>
+        </p:nvSpPr>
+        <p:spPr>
+          <a:xfrm>
+            <a:off x="2280839" y="4180344"/>
+            <a:ext cx="4272954" cy="1569660"/>
+          </a:xfrm>
+          <a:prstGeom prst="rect">
+            <a:avLst/>
+          </a:prstGeom>
+          <a:noFill/>
+        </p:spPr>
+        <p:txBody>
+          <a:bodyPr wrap="square" rtlCol="0">
+            <a:spAutoFit/>
+          </a:bodyPr>
+          <a:lstStyle/>
+          <a:p>
+            <a:pPr marL="342900" indent="-342900">
+              <a:buFont typeface="Arial" panose="020B0604020202020204" pitchFamily="34" charset="0"/>
+              <a:buChar char="•"/>
+            </a:pPr>
+            <a:r>
+              <a:rPr lang="hu-HU" sz="2400" b="1" dirty="0">
+                <a:solidFill>
+                  <a:schemeClr val="accent4">
+                    <a:lumMod val="75000"/>
+                  </a:schemeClr>
+                </a:solidFill>
+              </a:rPr>
+              <a:t>Visual </a:t>
+            </a:r>
+            <a:r>
+              <a:rPr lang="hu-HU" sz="2400" b="1" dirty="0" err="1">
+                <a:solidFill>
+                  <a:schemeClr val="accent4">
+                    <a:lumMod val="75000"/>
+                  </a:schemeClr>
+                </a:solidFill>
+              </a:rPr>
+              <a:t>Studio</a:t>
+            </a:r>
+            <a:r>
+              <a:rPr lang="hu-HU" sz="2400" b="1" dirty="0">
+                <a:solidFill>
+                  <a:schemeClr val="accent4">
+                    <a:lumMod val="75000"/>
+                  </a:schemeClr>
+                </a:solidFill>
+              </a:rPr>
+              <a:t>(VS): </a:t>
+            </a:r>
+            <a:r>
+              <a:rPr lang="hu-HU" sz="2400" dirty="0">
+                <a:solidFill>
+                  <a:schemeClr val="accent4">
+                    <a:lumMod val="75000"/>
+                  </a:schemeClr>
+                </a:solidFill>
+              </a:rPr>
+              <a:t>Szintén egy fejlesztői környezet, amelyben az </a:t>
+            </a:r>
+            <a:r>
+              <a:rPr lang="hu-HU" sz="2400" dirty="0" err="1">
+                <a:solidFill>
+                  <a:schemeClr val="accent4">
+                    <a:lumMod val="75000"/>
+                  </a:schemeClr>
+                </a:solidFill>
+              </a:rPr>
+              <a:t>admin</a:t>
+            </a:r>
+            <a:r>
+              <a:rPr lang="hu-HU" sz="2400" dirty="0">
+                <a:solidFill>
+                  <a:schemeClr val="accent4">
+                    <a:lumMod val="75000"/>
+                  </a:schemeClr>
+                </a:solidFill>
+              </a:rPr>
+              <a:t> felület készült C# nyelven WPF-ben</a:t>
+            </a:r>
+          </a:p>
+        </p:txBody>
+      </p:sp>
       <p:pic>
         <p:nvPicPr>
-          <p:cNvPr id="1028" name="Picture 4" descr="undefined">
-            <a:extLst>
-              <a:ext uri="{FF2B5EF4-FFF2-40B4-BE49-F238E27FC236}">
-                <a16:creationId xmlns:a16="http://schemas.microsoft.com/office/drawing/2014/main" id="{98EB6905-9258-4241-9966-9E93D7FBF100}"/>
+          <p:cNvPr id="7" name="Kép 6">
+            <a:extLst>
+              <a:ext uri="{FF2B5EF4-FFF2-40B4-BE49-F238E27FC236}">
+                <a16:creationId xmlns:a16="http://schemas.microsoft.com/office/drawing/2014/main" id="{7A4ACDEF-306B-49A4-86F8-78EF8203A3E6}"/>
               </a:ext>
             </a:extLst>
           </p:cNvPr>
           <p:cNvPicPr>
-            <a:picLocks noChangeAspect="1" noChangeArrowheads="1"/>
+            <a:picLocks noChangeAspect="1"/>
           </p:cNvPicPr>
           <p:nvPr/>
         </p:nvPicPr>
         <p:blipFill>
-          <a:blip r:embed="rId3" cstate="print">
-            <a:extLst>
-              <a:ext uri="{28A0092B-C50C-407E-A947-70E740481C1C}">
-                <a14:useLocalDpi xmlns:a14="http://schemas.microsoft.com/office/drawing/2010/main" val="0"/>
-              </a:ext>
-            </a:extLst>
-          </a:blip>
-          <a:srcRect/>
+          <a:blip r:embed="rId3"/>
           <a:stretch>
             <a:fillRect/>
           </a:stretch>
         </p:blipFill>
-        <p:spPr bwMode="auto">
-          <a:xfrm>
-            <a:off x="477140" y="4035422"/>
-            <a:ext cx="3534749" cy="1488461"/>
-          </a:xfrm>
-          <a:prstGeom prst="rect">
-            <a:avLst/>
-          </a:prstGeom>
-          <a:noFill/>
-          <a:extLst>
-            <a:ext uri="{909E8E84-426E-40DD-AFC4-6F175D3DCCD1}">
-              <a14:hiddenFill xmlns:a14="http://schemas.microsoft.com/office/drawing/2010/main">
-                <a:solidFill>
-                  <a:srgbClr val="FFFFFF"/>
-                </a:solidFill>
-              </a14:hiddenFill>
-            </a:ext>
-          </a:extLst>
-        </p:spPr>
-      </p:pic>
-      <p:sp>
-        <p:nvSpPr>
-          <p:cNvPr id="9" name="Szövegdoboz 8">
-            <a:extLst>
-              <a:ext uri="{FF2B5EF4-FFF2-40B4-BE49-F238E27FC236}">
-                <a16:creationId xmlns:a16="http://schemas.microsoft.com/office/drawing/2014/main" id="{D84E1BB5-C09F-466B-8C1B-51040ABBF068}"/>
-              </a:ext>
-            </a:extLst>
-          </p:cNvPr>
-          <p:cNvSpPr txBox="1"/>
-          <p:nvPr/>
-        </p:nvSpPr>
-        <p:spPr>
-          <a:xfrm>
-            <a:off x="2493033" y="1475858"/>
-            <a:ext cx="5132719" cy="1200329"/>
-          </a:xfrm>
-          <a:prstGeom prst="rect">
-            <a:avLst/>
-          </a:prstGeom>
-          <a:noFill/>
-        </p:spPr>
-        <p:txBody>
-          <a:bodyPr wrap="square" rtlCol="0">
-            <a:spAutoFit/>
-          </a:bodyPr>
-          <a:lstStyle/>
-          <a:p>
-            <a:pPr marL="342900" indent="-342900">
-              <a:buFont typeface="Arial" panose="020B0604020202020204" pitchFamily="34" charset="0"/>
-              <a:buChar char="•"/>
-            </a:pPr>
-            <a:r>
-              <a:rPr lang="hu-HU" sz="2400" b="1" dirty="0">
-                <a:solidFill>
-                  <a:schemeClr val="accent4">
-                    <a:lumMod val="75000"/>
-                  </a:schemeClr>
-                </a:solidFill>
-              </a:rPr>
-              <a:t>GitHub</a:t>
-            </a:r>
-            <a:r>
-              <a:rPr lang="hu-HU" sz="2400" dirty="0">
-                <a:solidFill>
-                  <a:schemeClr val="accent4">
-                    <a:lumMod val="75000"/>
-                  </a:schemeClr>
-                </a:solidFill>
-              </a:rPr>
-              <a:t>: Verziókövető eszköz, mely egyszerű átlátást biztosított arra, hogy mikor, ki, mit csinált.</a:t>
-            </a:r>
-          </a:p>
-        </p:txBody>
-      </p:sp>
-      <p:sp>
-        <p:nvSpPr>
-          <p:cNvPr id="10" name="Szövegdoboz 9">
-            <a:extLst>
-              <a:ext uri="{FF2B5EF4-FFF2-40B4-BE49-F238E27FC236}">
-                <a16:creationId xmlns:a16="http://schemas.microsoft.com/office/drawing/2014/main" id="{34D1C51D-087B-4BD8-9089-BE6663110493}"/>
-              </a:ext>
-            </a:extLst>
-          </p:cNvPr>
-          <p:cNvSpPr txBox="1"/>
-          <p:nvPr/>
-        </p:nvSpPr>
-        <p:spPr>
-          <a:xfrm>
-            <a:off x="4142095" y="4450991"/>
-            <a:ext cx="3955182" cy="1938992"/>
-          </a:xfrm>
-          <a:prstGeom prst="rect">
-            <a:avLst/>
-          </a:prstGeom>
-          <a:noFill/>
-        </p:spPr>
-        <p:txBody>
-          <a:bodyPr wrap="square" rtlCol="0">
-            <a:spAutoFit/>
-          </a:bodyPr>
-          <a:lstStyle/>
-          <a:p>
-            <a:pPr marL="342900" indent="-342900">
-              <a:buFont typeface="Arial" panose="020B0604020202020204" pitchFamily="34" charset="0"/>
-              <a:buChar char="•"/>
-            </a:pPr>
-            <a:r>
-              <a:rPr lang="hu-HU" sz="2400" b="1" dirty="0" err="1">
-                <a:solidFill>
-                  <a:schemeClr val="accent4">
-                    <a:lumMod val="75000"/>
-                  </a:schemeClr>
-                </a:solidFill>
-              </a:rPr>
-              <a:t>Jira</a:t>
-            </a:r>
-            <a:r>
-              <a:rPr lang="hu-HU" sz="2400" dirty="0">
-                <a:solidFill>
-                  <a:schemeClr val="accent4">
-                    <a:lumMod val="75000"/>
-                  </a:schemeClr>
-                </a:solidFill>
-              </a:rPr>
-              <a:t>: Projekt menedzsment eszköz, melyben 2 hetes sprintek alatt,  meghatározott feladatokat kellett elvégezni.</a:t>
-            </a:r>
-          </a:p>
-        </p:txBody>
-      </p:sp>
-      <p:pic>
-        <p:nvPicPr>
-          <p:cNvPr id="6" name="Kép 5">
-            <a:extLst>
-              <a:ext uri="{FF2B5EF4-FFF2-40B4-BE49-F238E27FC236}">
-                <a16:creationId xmlns:a16="http://schemas.microsoft.com/office/drawing/2014/main" id="{F0C82B73-4864-4368-BAF3-2042C6A64724}"/>
-              </a:ext>
-            </a:extLst>
-          </p:cNvPr>
-          <p:cNvPicPr>
-            <a:picLocks noChangeAspect="1"/>
-          </p:cNvPicPr>
-          <p:nvPr/>
-        </p:nvPicPr>
-        <p:blipFill>
-          <a:blip r:embed="rId4"/>
-          <a:stretch>
-            <a:fillRect/>
-          </a:stretch>
-        </p:blipFill>
-        <p:spPr>
-          <a:xfrm>
-            <a:off x="8097277" y="3655321"/>
-            <a:ext cx="3912351" cy="2823875"/>
+        <p:spPr>
+          <a:xfrm>
+            <a:off x="7272248" y="1807373"/>
+            <a:ext cx="4761808" cy="3471210"/>
           </a:xfrm>
           <a:prstGeom prst="rect">
             <a:avLst/>
@@ -6509,10 +6912,40 @@
       </p:pic>
       <p:pic>
         <p:nvPicPr>
-          <p:cNvPr id="7" name="Kép 6">
-            <a:extLst>
-              <a:ext uri="{FF2B5EF4-FFF2-40B4-BE49-F238E27FC236}">
-                <a16:creationId xmlns:a16="http://schemas.microsoft.com/office/drawing/2014/main" id="{6189322B-B141-438C-A937-984069E8432A}"/>
+          <p:cNvPr id="6" name="Picture 5" descr="Visual Studio logo and symbol, meaning, history, PNG">
+            <a:extLst>
+              <a:ext uri="{FF2B5EF4-FFF2-40B4-BE49-F238E27FC236}">
+                <a16:creationId xmlns:a16="http://schemas.microsoft.com/office/drawing/2014/main" id="{C7CE94B2-3D26-E347-A01E-85D2E943C3FF}"/>
+              </a:ext>
+            </a:extLst>
+          </p:cNvPr>
+          <p:cNvPicPr>
+            <a:picLocks noChangeAspect="1"/>
+          </p:cNvPicPr>
+          <p:nvPr/>
+        </p:nvPicPr>
+        <p:blipFill>
+          <a:blip r:embed="rId4"/>
+          <a:stretch>
+            <a:fillRect/>
+          </a:stretch>
+        </p:blipFill>
+        <p:spPr>
+          <a:xfrm>
+            <a:off x="-222129" y="4051376"/>
+            <a:ext cx="3177249" cy="1832416"/>
+          </a:xfrm>
+          <a:prstGeom prst="rect">
+            <a:avLst/>
+          </a:prstGeom>
+        </p:spPr>
+      </p:pic>
+      <p:pic>
+        <p:nvPicPr>
+          <p:cNvPr id="11" name="Kép 10" descr="A képen gyertya látható&#10;&#10;Lehet, hogy az AI által létrehozott tartalom helytelen.">
+            <a:extLst>
+              <a:ext uri="{FF2B5EF4-FFF2-40B4-BE49-F238E27FC236}">
+                <a16:creationId xmlns:a16="http://schemas.microsoft.com/office/drawing/2014/main" id="{03D8D4D1-318E-3690-178D-4D9A323179DA}"/>
               </a:ext>
             </a:extLst>
           </p:cNvPr>
@@ -6529,44 +6962,6 @@
         </p:blipFill>
         <p:spPr>
           <a:xfrm>
-            <a:off x="8097277" y="1090846"/>
-            <a:ext cx="3912351" cy="2432017"/>
-          </a:xfrm>
-          <a:prstGeom prst="rect">
-            <a:avLst/>
-          </a:prstGeom>
-          <a:ln w="38100">
-            <a:solidFill>
-              <a:schemeClr val="accent1">
-                <a:lumMod val="40000"/>
-                <a:lumOff val="60000"/>
-              </a:schemeClr>
-            </a:solidFill>
-          </a:ln>
-        </p:spPr>
-      </p:pic>
-      <p:pic>
-        <p:nvPicPr>
-          <p:cNvPr id="12" name="Kép 11" descr="A képen gyertya látható&#10;&#10;Lehet, hogy az AI által létrehozott tartalom helytelen.">
-            <a:extLst>
-              <a:ext uri="{FF2B5EF4-FFF2-40B4-BE49-F238E27FC236}">
-                <a16:creationId xmlns:a16="http://schemas.microsoft.com/office/drawing/2014/main" id="{4956971B-D0C6-57AC-A4A8-01751C6D8C0D}"/>
-              </a:ext>
-            </a:extLst>
-          </p:cNvPr>
-          <p:cNvPicPr>
-            <a:picLocks noChangeAspect="1"/>
-          </p:cNvPicPr>
-          <p:nvPr/>
-        </p:nvPicPr>
-        <p:blipFill>
-          <a:blip r:embed="rId6"/>
-          <a:stretch>
-            <a:fillRect/>
-          </a:stretch>
-        </p:blipFill>
-        <p:spPr>
-          <a:xfrm>
             <a:off x="87751" y="58187"/>
             <a:ext cx="722857" cy="707199"/>
           </a:xfrm>
@@ -6578,7 +6973,7 @@
     </p:spTree>
     <p:extLst>
       <p:ext uri="{BB962C8B-B14F-4D97-AF65-F5344CB8AC3E}">
-        <p14:creationId xmlns:p14="http://schemas.microsoft.com/office/powerpoint/2010/main" val="2003293117"/>
+        <p14:creationId xmlns:p14="http://schemas.microsoft.com/office/powerpoint/2010/main" val="702753272"/>
       </p:ext>
     </p:extLst>
   </p:cSld>
@@ -6680,8 +7075,8 @@
         </p:nvSpPr>
         <p:spPr>
           <a:xfrm>
-            <a:off x="1402888" y="18383"/>
-            <a:ext cx="9208245" cy="769441"/>
+            <a:off x="2277763" y="9700"/>
+            <a:ext cx="7593630" cy="769441"/>
           </a:xfrm>
           <a:prstGeom prst="rect">
             <a:avLst/>
@@ -6709,20 +7104,239 @@
                 </a:solidFill>
                 <a:latin typeface="Ink Free" panose="03080402000500000000" pitchFamily="66" charset="0"/>
               </a:rPr>
-              <a:t>Verziókövetés</a:t>
+              <a:t>Fejlesztési környezet</a:t>
+            </a:r>
+          </a:p>
+        </p:txBody>
+      </p:sp>
+      <p:sp>
+        <p:nvSpPr>
+          <p:cNvPr id="5" name="Szövegdoboz 4">
+            <a:extLst>
+              <a:ext uri="{FF2B5EF4-FFF2-40B4-BE49-F238E27FC236}">
+                <a16:creationId xmlns:a16="http://schemas.microsoft.com/office/drawing/2014/main" id="{81A0252E-27AE-4E33-B442-E4993C15E856}"/>
+              </a:ext>
+            </a:extLst>
+          </p:cNvPr>
+          <p:cNvSpPr txBox="1"/>
+          <p:nvPr/>
+        </p:nvSpPr>
+        <p:spPr>
+          <a:xfrm>
+            <a:off x="1925354" y="1324020"/>
+            <a:ext cx="5132719" cy="1200329"/>
+          </a:xfrm>
+          <a:prstGeom prst="rect">
+            <a:avLst/>
+          </a:prstGeom>
+          <a:noFill/>
+        </p:spPr>
+        <p:txBody>
+          <a:bodyPr wrap="square" rtlCol="0">
+            <a:spAutoFit/>
+          </a:bodyPr>
+          <a:lstStyle/>
+          <a:p>
+            <a:pPr marL="342900" indent="-342900">
+              <a:buFont typeface="Arial" panose="020B0604020202020204" pitchFamily="34" charset="0"/>
+              <a:buChar char="•"/>
+            </a:pPr>
+            <a:r>
+              <a:rPr lang="hu-HU" sz="2400" b="1" dirty="0">
+                <a:solidFill>
+                  <a:schemeClr val="accent4">
+                    <a:lumMod val="75000"/>
+                  </a:schemeClr>
+                </a:solidFill>
+              </a:rPr>
+              <a:t>HTML5</a:t>
+            </a:r>
+            <a:r>
+              <a:rPr lang="hu-HU" sz="2400" dirty="0">
+                <a:solidFill>
+                  <a:schemeClr val="accent4">
+                    <a:lumMod val="75000"/>
+                  </a:schemeClr>
+                </a:solidFill>
+              </a:rPr>
+              <a:t>: A weboldal készítés egyik alapja. Ezzel, a struktúráját, a vázát tudjuk elkészíteni</a:t>
+            </a:r>
+          </a:p>
+        </p:txBody>
+      </p:sp>
+      <p:sp>
+        <p:nvSpPr>
+          <p:cNvPr id="8" name="Szövegdoboz 7">
+            <a:extLst>
+              <a:ext uri="{FF2B5EF4-FFF2-40B4-BE49-F238E27FC236}">
+                <a16:creationId xmlns:a16="http://schemas.microsoft.com/office/drawing/2014/main" id="{9DBC5AD3-A244-47DE-9DDF-DEF316BF5867}"/>
+              </a:ext>
+            </a:extLst>
+          </p:cNvPr>
+          <p:cNvSpPr txBox="1"/>
+          <p:nvPr/>
+        </p:nvSpPr>
+        <p:spPr>
+          <a:xfrm>
+            <a:off x="1925354" y="3003272"/>
+            <a:ext cx="4272954" cy="1569660"/>
+          </a:xfrm>
+          <a:prstGeom prst="rect">
+            <a:avLst/>
+          </a:prstGeom>
+          <a:noFill/>
+        </p:spPr>
+        <p:txBody>
+          <a:bodyPr wrap="square" rtlCol="0">
+            <a:spAutoFit/>
+          </a:bodyPr>
+          <a:lstStyle/>
+          <a:p>
+            <a:pPr marL="342900" indent="-342900">
+              <a:buFont typeface="Arial" panose="020B0604020202020204" pitchFamily="34" charset="0"/>
+              <a:buChar char="•"/>
+            </a:pPr>
+            <a:r>
+              <a:rPr lang="hu-HU" sz="2400" b="1" dirty="0">
+                <a:solidFill>
+                  <a:schemeClr val="accent4">
+                    <a:lumMod val="75000"/>
+                  </a:schemeClr>
+                </a:solidFill>
+              </a:rPr>
+              <a:t>CSS3: </a:t>
+            </a:r>
+            <a:r>
+              <a:rPr lang="hu-HU" sz="2400" dirty="0">
+                <a:solidFill>
+                  <a:schemeClr val="accent4">
+                    <a:lumMod val="75000"/>
+                  </a:schemeClr>
+                </a:solidFill>
+              </a:rPr>
+              <a:t>Stílus kezelő nyelv a </a:t>
+            </a:r>
+            <a:r>
+              <a:rPr lang="hu-HU" sz="2400" dirty="0" err="1">
+                <a:solidFill>
+                  <a:schemeClr val="accent4">
+                    <a:lumMod val="75000"/>
+                  </a:schemeClr>
+                </a:solidFill>
+              </a:rPr>
+              <a:t>html-hez</a:t>
+            </a:r>
+            <a:r>
+              <a:rPr lang="hu-HU" sz="2400" dirty="0">
+                <a:solidFill>
+                  <a:schemeClr val="accent4">
+                    <a:lumMod val="75000"/>
+                  </a:schemeClr>
+                </a:solidFill>
+              </a:rPr>
+              <a:t>. Ezzel oldottuk meg a </a:t>
+            </a:r>
+            <a:r>
+              <a:rPr lang="hu-HU" sz="2400" dirty="0" err="1">
+                <a:solidFill>
+                  <a:schemeClr val="accent4">
+                    <a:lumMod val="75000"/>
+                  </a:schemeClr>
+                </a:solidFill>
+              </a:rPr>
+              <a:t>reszponzivitást</a:t>
+            </a:r>
+            <a:r>
+              <a:rPr lang="hu-HU" sz="2400" dirty="0">
+                <a:solidFill>
+                  <a:schemeClr val="accent4">
+                    <a:lumMod val="75000"/>
+                  </a:schemeClr>
+                </a:solidFill>
+              </a:rPr>
+              <a:t>, és az animációkat.</a:t>
+            </a:r>
+          </a:p>
+        </p:txBody>
+      </p:sp>
+      <p:sp>
+        <p:nvSpPr>
+          <p:cNvPr id="9" name="Szövegdoboz 8">
+            <a:extLst>
+              <a:ext uri="{FF2B5EF4-FFF2-40B4-BE49-F238E27FC236}">
+                <a16:creationId xmlns:a16="http://schemas.microsoft.com/office/drawing/2014/main" id="{DC408D15-66A1-4A4A-851B-EADA0E36EFB9}"/>
+              </a:ext>
+            </a:extLst>
+          </p:cNvPr>
+          <p:cNvSpPr txBox="1"/>
+          <p:nvPr/>
+        </p:nvSpPr>
+        <p:spPr>
+          <a:xfrm>
+            <a:off x="1925354" y="4708388"/>
+            <a:ext cx="4272954" cy="1569660"/>
+          </a:xfrm>
+          <a:prstGeom prst="rect">
+            <a:avLst/>
+          </a:prstGeom>
+          <a:noFill/>
+        </p:spPr>
+        <p:txBody>
+          <a:bodyPr wrap="square" rtlCol="0">
+            <a:spAutoFit/>
+          </a:bodyPr>
+          <a:lstStyle/>
+          <a:p>
+            <a:pPr marL="342900" indent="-342900">
+              <a:buFont typeface="Arial" panose="020B0604020202020204" pitchFamily="34" charset="0"/>
+              <a:buChar char="•"/>
+            </a:pPr>
+            <a:r>
+              <a:rPr lang="hu-HU" sz="2400" b="1" dirty="0">
+                <a:solidFill>
+                  <a:schemeClr val="accent4">
+                    <a:lumMod val="75000"/>
+                  </a:schemeClr>
+                </a:solidFill>
+              </a:rPr>
+              <a:t>JavaScript: </a:t>
+            </a:r>
+            <a:r>
+              <a:rPr lang="hu-HU" sz="2400" dirty="0">
+                <a:solidFill>
+                  <a:schemeClr val="accent4">
+                    <a:lumMod val="75000"/>
+                  </a:schemeClr>
+                </a:solidFill>
+              </a:rPr>
+              <a:t>Ez a nyelv a </a:t>
+            </a:r>
+            <a:r>
+              <a:rPr lang="hu-HU" sz="2400" dirty="0" err="1">
+                <a:solidFill>
+                  <a:schemeClr val="accent4">
+                    <a:lumMod val="75000"/>
+                  </a:schemeClr>
+                </a:solidFill>
+              </a:rPr>
+              <a:t>dinamikusságot</a:t>
+            </a:r>
+            <a:r>
+              <a:rPr lang="hu-HU" sz="2400" dirty="0">
+                <a:solidFill>
+                  <a:schemeClr val="accent4">
+                    <a:lumMod val="75000"/>
+                  </a:schemeClr>
+                </a:solidFill>
+              </a:rPr>
+              <a:t> adja az oldalakhoz, illetve az eseménykezeléseket.</a:t>
             </a:r>
           </a:p>
         </p:txBody>
       </p:sp>
       <p:pic>
         <p:nvPicPr>
-          <p:cNvPr id="5" name="Picture 2" descr="undefined">
-            <a:extLst>
-              <a:ext uri="{FF2B5EF4-FFF2-40B4-BE49-F238E27FC236}">
-                <a16:creationId xmlns:a16="http://schemas.microsoft.com/office/drawing/2014/main" id="{E6A87C9D-5229-4363-95A2-B453ADD8C8D7}"/>
-              </a:ext>
-            </a:extLst>
-          </p:cNvPr>
+          <p:cNvPr id="1026" name="Picture 2" descr="undefined"/>
           <p:cNvPicPr>
             <a:picLocks noChangeAspect="1" noChangeArrowheads="1"/>
           </p:cNvPicPr>
@@ -6743,8 +7357,8 @@
         </p:blipFill>
         <p:spPr bwMode="auto">
           <a:xfrm>
-            <a:off x="11241370" y="967096"/>
-            <a:ext cx="819151" cy="819151"/>
+            <a:off x="341311" y="1098911"/>
+            <a:ext cx="1584043" cy="1584043"/>
           </a:xfrm>
           <a:prstGeom prst="rect">
             <a:avLst/>
@@ -6763,146 +7377,119 @@
       </p:pic>
       <p:pic>
         <p:nvPicPr>
-          <p:cNvPr id="12" name="Kép 11" descr="A képen gyertya látható&#10;&#10;Lehet, hogy az AI által létrehozott tartalom helytelen.">
-            <a:extLst>
-              <a:ext uri="{FF2B5EF4-FFF2-40B4-BE49-F238E27FC236}">
-                <a16:creationId xmlns:a16="http://schemas.microsoft.com/office/drawing/2014/main" id="{4956971B-D0C6-57AC-A4A8-01751C6D8C0D}"/>
-              </a:ext>
-            </a:extLst>
-          </p:cNvPr>
+          <p:cNvPr id="1028" name="Picture 4" descr="undefined"/>
           <p:cNvPicPr>
-            <a:picLocks noChangeAspect="1"/>
+            <a:picLocks noChangeAspect="1" noChangeArrowheads="1"/>
           </p:cNvPicPr>
           <p:nvPr/>
         </p:nvPicPr>
         <p:blipFill>
-          <a:blip r:embed="rId3"/>
+          <a:blip r:embed="rId3" cstate="print">
+            <a:extLst>
+              <a:ext uri="{28A0092B-C50C-407E-A947-70E740481C1C}">
+                <a14:useLocalDpi xmlns:a14="http://schemas.microsoft.com/office/drawing/2010/main" val="0"/>
+              </a:ext>
+            </a:extLst>
+          </a:blip>
+          <a:srcRect/>
           <a:stretch>
             <a:fillRect/>
           </a:stretch>
         </p:blipFill>
-        <p:spPr>
-          <a:xfrm>
-            <a:off x="87751" y="58187"/>
-            <a:ext cx="722857" cy="707199"/>
-          </a:xfrm>
-          <a:prstGeom prst="rect">
-            <a:avLst/>
-          </a:prstGeom>
+        <p:spPr bwMode="auto">
+          <a:xfrm>
+            <a:off x="455240" y="2970021"/>
+            <a:ext cx="1356187" cy="1356187"/>
+          </a:xfrm>
+          <a:prstGeom prst="rect">
+            <a:avLst/>
+          </a:prstGeom>
+          <a:noFill/>
+          <a:extLst>
+            <a:ext uri="{909E8E84-426E-40DD-AFC4-6F175D3DCCD1}">
+              <a14:hiddenFill xmlns:a14="http://schemas.microsoft.com/office/drawing/2010/main">
+                <a:solidFill>
+                  <a:srgbClr val="FFFFFF"/>
+                </a:solidFill>
+              </a14:hiddenFill>
+            </a:ext>
+          </a:extLst>
         </p:spPr>
       </p:pic>
       <p:pic>
         <p:nvPicPr>
-          <p:cNvPr id="8" name="Kép 7">
-            <a:extLst>
-              <a:ext uri="{FF2B5EF4-FFF2-40B4-BE49-F238E27FC236}">
-                <a16:creationId xmlns:a16="http://schemas.microsoft.com/office/drawing/2014/main" id="{00DEEAF1-9853-4F7B-8168-2A981E8B5540}"/>
-              </a:ext>
-            </a:extLst>
-          </p:cNvPr>
+          <p:cNvPr id="1030" name="Picture 6" descr="undefined"/>
           <p:cNvPicPr>
-            <a:picLocks noChangeAspect="1"/>
+            <a:picLocks noChangeAspect="1" noChangeArrowheads="1"/>
           </p:cNvPicPr>
           <p:nvPr/>
         </p:nvPicPr>
         <p:blipFill>
-          <a:blip r:embed="rId4"/>
+          <a:blip r:embed="rId4" cstate="print">
+            <a:extLst>
+              <a:ext uri="{28A0092B-C50C-407E-A947-70E740481C1C}">
+                <a14:useLocalDpi xmlns:a14="http://schemas.microsoft.com/office/drawing/2010/main" val="0"/>
+              </a:ext>
+            </a:extLst>
+          </a:blip>
+          <a:srcRect/>
           <a:stretch>
             <a:fillRect/>
           </a:stretch>
         </p:blipFill>
-        <p:spPr>
-          <a:xfrm>
-            <a:off x="4947681" y="2143635"/>
-            <a:ext cx="7128056" cy="4642616"/>
-          </a:xfrm>
-          <a:prstGeom prst="rect">
-            <a:avLst/>
-          </a:prstGeom>
-          <a:ln w="38100">
-            <a:solidFill>
-              <a:schemeClr val="accent5">
-                <a:lumMod val="40000"/>
-                <a:lumOff val="60000"/>
-              </a:schemeClr>
-            </a:solidFill>
-          </a:ln>
+        <p:spPr bwMode="auto">
+          <a:xfrm>
+            <a:off x="367954" y="4675137"/>
+            <a:ext cx="1530761" cy="1530761"/>
+          </a:xfrm>
+          <a:prstGeom prst="rect">
+            <a:avLst/>
+          </a:prstGeom>
+          <a:noFill/>
+          <a:extLst>
+            <a:ext uri="{909E8E84-426E-40DD-AFC4-6F175D3DCCD1}">
+              <a14:hiddenFill xmlns:a14="http://schemas.microsoft.com/office/drawing/2010/main">
+                <a:solidFill>
+                  <a:srgbClr val="FFFFFF"/>
+                </a:solidFill>
+              </a14:hiddenFill>
+            </a:ext>
+          </a:extLst>
         </p:spPr>
       </p:pic>
-      <p:sp>
-        <p:nvSpPr>
-          <p:cNvPr id="13" name="Szövegdoboz 12">
-            <a:extLst>
-              <a:ext uri="{FF2B5EF4-FFF2-40B4-BE49-F238E27FC236}">
-                <a16:creationId xmlns:a16="http://schemas.microsoft.com/office/drawing/2014/main" id="{13385620-EEBD-4E3D-8838-328CB44AE553}"/>
-              </a:ext>
-            </a:extLst>
-          </p:cNvPr>
-          <p:cNvSpPr txBox="1"/>
-          <p:nvPr/>
-        </p:nvSpPr>
-        <p:spPr>
-          <a:xfrm>
-            <a:off x="7422187" y="1555414"/>
-            <a:ext cx="2514047" cy="461665"/>
-          </a:xfrm>
-          <a:prstGeom prst="rect">
-            <a:avLst/>
-          </a:prstGeom>
-          <a:noFill/>
-        </p:spPr>
-        <p:txBody>
-          <a:bodyPr wrap="square" rtlCol="0">
-            <a:spAutoFit/>
-          </a:bodyPr>
-          <a:lstStyle/>
-          <a:p>
-            <a:r>
-              <a:rPr lang="hu-HU" sz="2400" dirty="0">
-                <a:solidFill>
-                  <a:schemeClr val="accent4">
-                    <a:lumMod val="75000"/>
-                  </a:schemeClr>
-                </a:solidFill>
-              </a:rPr>
-              <a:t>Az összes feltöltés</a:t>
-            </a:r>
-          </a:p>
-        </p:txBody>
-      </p:sp>
       <p:pic>
         <p:nvPicPr>
-          <p:cNvPr id="14" name="Kép 13">
-            <a:extLst>
-              <a:ext uri="{FF2B5EF4-FFF2-40B4-BE49-F238E27FC236}">
-                <a16:creationId xmlns:a16="http://schemas.microsoft.com/office/drawing/2014/main" id="{7206398F-3B35-4473-9CC0-D6E680B73509}"/>
-              </a:ext>
-            </a:extLst>
-          </p:cNvPr>
+          <p:cNvPr id="6" name="Kép 5"/>
           <p:cNvPicPr>
             <a:picLocks noChangeAspect="1"/>
           </p:cNvPicPr>
           <p:nvPr/>
         </p:nvPicPr>
         <p:blipFill>
-          <a:blip r:embed="rId5"/>
+          <a:blip r:embed="rId5" cstate="print">
+            <a:extLst>
+              <a:ext uri="{28A0092B-C50C-407E-A947-70E740481C1C}">
+                <a14:useLocalDpi xmlns:a14="http://schemas.microsoft.com/office/drawing/2010/main" val="0"/>
+              </a:ext>
+            </a:extLst>
+          </a:blip>
           <a:stretch>
             <a:fillRect/>
           </a:stretch>
         </p:blipFill>
         <p:spPr>
           <a:xfrm>
-            <a:off x="131478" y="1500554"/>
-            <a:ext cx="3381313" cy="1694473"/>
+            <a:off x="7810106" y="1098911"/>
+            <a:ext cx="2109967" cy="5582857"/>
           </a:xfrm>
           <a:prstGeom prst="rect">
             <a:avLst/>
           </a:prstGeom>
           <a:ln w="38100">
             <a:solidFill>
-              <a:schemeClr val="accent5">
-                <a:lumMod val="40000"/>
-                <a:lumOff val="60000"/>
+              <a:schemeClr val="accent1">
+                <a:lumMod val="60000"/>
+                <a:lumOff val="40000"/>
               </a:schemeClr>
             </a:solidFill>
           </a:ln>
@@ -6910,10 +7497,10 @@
       </p:pic>
       <p:pic>
         <p:nvPicPr>
-          <p:cNvPr id="16" name="Kép 15">
-            <a:extLst>
-              <a:ext uri="{FF2B5EF4-FFF2-40B4-BE49-F238E27FC236}">
-                <a16:creationId xmlns:a16="http://schemas.microsoft.com/office/drawing/2014/main" id="{A0D67C5F-3728-4EF5-9EC1-236B866A07C3}"/>
+          <p:cNvPr id="11" name="Kép 10" descr="A képen gyertya látható&#10;&#10;Lehet, hogy az AI által létrehozott tartalom helytelen.">
+            <a:extLst>
+              <a:ext uri="{FF2B5EF4-FFF2-40B4-BE49-F238E27FC236}">
+                <a16:creationId xmlns:a16="http://schemas.microsoft.com/office/drawing/2014/main" id="{D3DEDDEB-CC78-19AB-2DC6-A9FA1C77460C}"/>
               </a:ext>
             </a:extLst>
           </p:cNvPr>
@@ -6930,105 +7517,18 @@
         </p:blipFill>
         <p:spPr>
           <a:xfrm>
-            <a:off x="116263" y="3287111"/>
-            <a:ext cx="3411744" cy="1694474"/>
-          </a:xfrm>
-          <a:prstGeom prst="rect">
-            <a:avLst/>
-          </a:prstGeom>
-          <a:ln w="38100">
-            <a:solidFill>
-              <a:schemeClr val="accent5">
-                <a:lumMod val="40000"/>
-                <a:lumOff val="60000"/>
-              </a:schemeClr>
-            </a:solidFill>
-          </a:ln>
+            <a:off x="87751" y="58187"/>
+            <a:ext cx="722857" cy="707199"/>
+          </a:xfrm>
+          <a:prstGeom prst="rect">
+            <a:avLst/>
+          </a:prstGeom>
         </p:spPr>
       </p:pic>
-      <p:pic>
-        <p:nvPicPr>
-          <p:cNvPr id="18" name="Kép 17">
-            <a:extLst>
-              <a:ext uri="{FF2B5EF4-FFF2-40B4-BE49-F238E27FC236}">
-                <a16:creationId xmlns:a16="http://schemas.microsoft.com/office/drawing/2014/main" id="{5298B1E8-9C37-46C6-BA7B-751D04177143}"/>
-              </a:ext>
-            </a:extLst>
-          </p:cNvPr>
-          <p:cNvPicPr>
-            <a:picLocks noChangeAspect="1"/>
-          </p:cNvPicPr>
-          <p:nvPr/>
-        </p:nvPicPr>
-        <p:blipFill>
-          <a:blip r:embed="rId7"/>
-          <a:stretch>
-            <a:fillRect/>
-          </a:stretch>
-        </p:blipFill>
-        <p:spPr>
-          <a:xfrm>
-            <a:off x="116263" y="5100148"/>
-            <a:ext cx="3440256" cy="1686103"/>
-          </a:xfrm>
-          <a:prstGeom prst="rect">
-            <a:avLst/>
-          </a:prstGeom>
-          <a:ln w="38100">
-            <a:solidFill>
-              <a:schemeClr val="accent5">
-                <a:lumMod val="40000"/>
-                <a:lumOff val="60000"/>
-              </a:schemeClr>
-            </a:solidFill>
-          </a:ln>
-        </p:spPr>
-      </p:pic>
-      <p:sp>
-        <p:nvSpPr>
-          <p:cNvPr id="20" name="Szövegdoboz 19">
-            <a:extLst>
-              <a:ext uri="{FF2B5EF4-FFF2-40B4-BE49-F238E27FC236}">
-                <a16:creationId xmlns:a16="http://schemas.microsoft.com/office/drawing/2014/main" id="{75632A7A-9CCC-414A-9933-374016A208E6}"/>
-              </a:ext>
-            </a:extLst>
-          </p:cNvPr>
-          <p:cNvSpPr txBox="1"/>
-          <p:nvPr/>
-        </p:nvSpPr>
-        <p:spPr>
-          <a:xfrm>
-            <a:off x="131479" y="1046410"/>
-            <a:ext cx="3516694" cy="461665"/>
-          </a:xfrm>
-          <a:prstGeom prst="rect">
-            <a:avLst/>
-          </a:prstGeom>
-          <a:noFill/>
-        </p:spPr>
-        <p:txBody>
-          <a:bodyPr wrap="square" rtlCol="0">
-            <a:spAutoFit/>
-          </a:bodyPr>
-          <a:lstStyle/>
-          <a:p>
-            <a:r>
-              <a:rPr lang="hu-HU" sz="2400" dirty="0">
-                <a:solidFill>
-                  <a:schemeClr val="accent4">
-                    <a:lumMod val="75000"/>
-                  </a:schemeClr>
-                </a:solidFill>
-              </a:rPr>
-              <a:t>Személyenkénti feltöltések</a:t>
-            </a:r>
-          </a:p>
-        </p:txBody>
-      </p:sp>
     </p:spTree>
     <p:extLst>
       <p:ext uri="{BB962C8B-B14F-4D97-AF65-F5344CB8AC3E}">
-        <p14:creationId xmlns:p14="http://schemas.microsoft.com/office/powerpoint/2010/main" val="581726980"/>
+        <p14:creationId xmlns:p14="http://schemas.microsoft.com/office/powerpoint/2010/main" val="226778464"/>
       </p:ext>
     </p:extLst>
   </p:cSld>
@@ -7159,88 +7659,17 @@
                 </a:solidFill>
                 <a:latin typeface="Ink Free" panose="03080402000500000000" pitchFamily="66" charset="0"/>
               </a:rPr>
-              <a:t>Munka menedzsment</a:t>
+              <a:t>Munka menedzsment/Verziókövetés</a:t>
             </a:r>
           </a:p>
         </p:txBody>
       </p:sp>
       <p:pic>
         <p:nvPicPr>
-          <p:cNvPr id="12" name="Kép 11" descr="A képen gyertya látható&#10;&#10;Lehet, hogy az AI által létrehozott tartalom helytelen.">
-            <a:extLst>
-              <a:ext uri="{FF2B5EF4-FFF2-40B4-BE49-F238E27FC236}">
-                <a16:creationId xmlns:a16="http://schemas.microsoft.com/office/drawing/2014/main" id="{4956971B-D0C6-57AC-A4A8-01751C6D8C0D}"/>
-              </a:ext>
-            </a:extLst>
-          </p:cNvPr>
-          <p:cNvPicPr>
-            <a:picLocks noChangeAspect="1"/>
-          </p:cNvPicPr>
-          <p:nvPr/>
-        </p:nvPicPr>
-        <p:blipFill>
-          <a:blip r:embed="rId2"/>
-          <a:stretch>
-            <a:fillRect/>
-          </a:stretch>
-        </p:blipFill>
-        <p:spPr>
-          <a:xfrm>
-            <a:off x="87751" y="58187"/>
-            <a:ext cx="722857" cy="707199"/>
-          </a:xfrm>
-          <a:prstGeom prst="rect">
-            <a:avLst/>
-          </a:prstGeom>
-        </p:spPr>
-      </p:pic>
-      <p:sp>
-        <p:nvSpPr>
-          <p:cNvPr id="20" name="Szövegdoboz 19">
-            <a:extLst>
-              <a:ext uri="{FF2B5EF4-FFF2-40B4-BE49-F238E27FC236}">
-                <a16:creationId xmlns:a16="http://schemas.microsoft.com/office/drawing/2014/main" id="{75632A7A-9CCC-414A-9933-374016A208E6}"/>
-              </a:ext>
-            </a:extLst>
-          </p:cNvPr>
-          <p:cNvSpPr txBox="1"/>
-          <p:nvPr/>
-        </p:nvSpPr>
-        <p:spPr>
-          <a:xfrm>
-            <a:off x="1380489" y="1021954"/>
-            <a:ext cx="1735028" cy="461665"/>
-          </a:xfrm>
-          <a:prstGeom prst="rect">
-            <a:avLst/>
-          </a:prstGeom>
-          <a:noFill/>
-        </p:spPr>
-        <p:txBody>
-          <a:bodyPr wrap="square" rtlCol="0">
-            <a:spAutoFit/>
-          </a:bodyPr>
-          <a:lstStyle/>
-          <a:p>
-            <a:r>
-              <a:rPr lang="hu-HU" sz="2400" dirty="0">
-                <a:solidFill>
-                  <a:schemeClr val="accent4">
-                    <a:lumMod val="75000"/>
-                  </a:schemeClr>
-                </a:solidFill>
-              </a:rPr>
-              <a:t>Munkatábla</a:t>
-            </a:r>
-          </a:p>
-        </p:txBody>
-      </p:sp>
-      <p:pic>
-        <p:nvPicPr>
-          <p:cNvPr id="15" name="Picture 4" descr="undefined">
-            <a:extLst>
-              <a:ext uri="{FF2B5EF4-FFF2-40B4-BE49-F238E27FC236}">
-                <a16:creationId xmlns:a16="http://schemas.microsoft.com/office/drawing/2014/main" id="{B298515D-F181-48FA-9F6D-1E4B7F65DBDE}"/>
+          <p:cNvPr id="5" name="Picture 2" descr="undefined">
+            <a:extLst>
+              <a:ext uri="{FF2B5EF4-FFF2-40B4-BE49-F238E27FC236}">
+                <a16:creationId xmlns:a16="http://schemas.microsoft.com/office/drawing/2014/main" id="{E6A87C9D-5229-4363-95A2-B453ADD8C8D7}"/>
               </a:ext>
             </a:extLst>
           </p:cNvPr>
@@ -7250,7 +7679,7 @@
           <p:nvPr/>
         </p:nvPicPr>
         <p:blipFill>
-          <a:blip r:embed="rId3" cstate="print">
+          <a:blip r:embed="rId2" cstate="print">
             <a:extLst>
               <a:ext uri="{28A0092B-C50C-407E-A947-70E740481C1C}">
                 <a14:useLocalDpi xmlns:a14="http://schemas.microsoft.com/office/drawing/2010/main" val="0"/>
@@ -7264,8 +7693,8 @@
         </p:blipFill>
         <p:spPr bwMode="auto">
           <a:xfrm>
-            <a:off x="10482618" y="819174"/>
-            <a:ext cx="1577903" cy="664445"/>
+            <a:off x="731043" y="1026546"/>
+            <a:ext cx="1761990" cy="1761990"/>
           </a:xfrm>
           <a:prstGeom prst="rect">
             <a:avLst/>
@@ -7284,10 +7713,167 @@
       </p:pic>
       <p:pic>
         <p:nvPicPr>
+          <p:cNvPr id="1028" name="Picture 4" descr="undefined">
+            <a:extLst>
+              <a:ext uri="{FF2B5EF4-FFF2-40B4-BE49-F238E27FC236}">
+                <a16:creationId xmlns:a16="http://schemas.microsoft.com/office/drawing/2014/main" id="{98EB6905-9258-4241-9966-9E93D7FBF100}"/>
+              </a:ext>
+            </a:extLst>
+          </p:cNvPr>
+          <p:cNvPicPr>
+            <a:picLocks noChangeAspect="1" noChangeArrowheads="1"/>
+          </p:cNvPicPr>
+          <p:nvPr/>
+        </p:nvPicPr>
+        <p:blipFill>
+          <a:blip r:embed="rId3" cstate="print">
+            <a:extLst>
+              <a:ext uri="{28A0092B-C50C-407E-A947-70E740481C1C}">
+                <a14:useLocalDpi xmlns:a14="http://schemas.microsoft.com/office/drawing/2010/main" val="0"/>
+              </a:ext>
+            </a:extLst>
+          </a:blip>
+          <a:srcRect/>
+          <a:stretch>
+            <a:fillRect/>
+          </a:stretch>
+        </p:blipFill>
+        <p:spPr bwMode="auto">
+          <a:xfrm>
+            <a:off x="477140" y="4035422"/>
+            <a:ext cx="3534749" cy="1488461"/>
+          </a:xfrm>
+          <a:prstGeom prst="rect">
+            <a:avLst/>
+          </a:prstGeom>
+          <a:noFill/>
+          <a:extLst>
+            <a:ext uri="{909E8E84-426E-40DD-AFC4-6F175D3DCCD1}">
+              <a14:hiddenFill xmlns:a14="http://schemas.microsoft.com/office/drawing/2010/main">
+                <a:solidFill>
+                  <a:srgbClr val="FFFFFF"/>
+                </a:solidFill>
+              </a14:hiddenFill>
+            </a:ext>
+          </a:extLst>
+        </p:spPr>
+      </p:pic>
+      <p:sp>
+        <p:nvSpPr>
+          <p:cNvPr id="9" name="Szövegdoboz 8">
+            <a:extLst>
+              <a:ext uri="{FF2B5EF4-FFF2-40B4-BE49-F238E27FC236}">
+                <a16:creationId xmlns:a16="http://schemas.microsoft.com/office/drawing/2014/main" id="{D84E1BB5-C09F-466B-8C1B-51040ABBF068}"/>
+              </a:ext>
+            </a:extLst>
+          </p:cNvPr>
+          <p:cNvSpPr txBox="1"/>
+          <p:nvPr/>
+        </p:nvSpPr>
+        <p:spPr>
+          <a:xfrm>
+            <a:off x="2493033" y="1475858"/>
+            <a:ext cx="5132719" cy="1200329"/>
+          </a:xfrm>
+          <a:prstGeom prst="rect">
+            <a:avLst/>
+          </a:prstGeom>
+          <a:noFill/>
+        </p:spPr>
+        <p:txBody>
+          <a:bodyPr wrap="square" rtlCol="0">
+            <a:spAutoFit/>
+          </a:bodyPr>
+          <a:lstStyle/>
+          <a:p>
+            <a:pPr marL="342900" indent="-342900">
+              <a:buFont typeface="Arial" panose="020B0604020202020204" pitchFamily="34" charset="0"/>
+              <a:buChar char="•"/>
+            </a:pPr>
+            <a:r>
+              <a:rPr lang="hu-HU" sz="2400" b="1" dirty="0">
+                <a:solidFill>
+                  <a:schemeClr val="accent4">
+                    <a:lumMod val="75000"/>
+                  </a:schemeClr>
+                </a:solidFill>
+              </a:rPr>
+              <a:t>GitHub</a:t>
+            </a:r>
+            <a:r>
+              <a:rPr lang="hu-HU" sz="2400" dirty="0">
+                <a:solidFill>
+                  <a:schemeClr val="accent4">
+                    <a:lumMod val="75000"/>
+                  </a:schemeClr>
+                </a:solidFill>
+              </a:rPr>
+              <a:t>: Verziókövető eszköz, mely egyszerű átlátást biztosított arra, hogy mikor, ki, mit csinált.</a:t>
+            </a:r>
+          </a:p>
+        </p:txBody>
+      </p:sp>
+      <p:sp>
+        <p:nvSpPr>
+          <p:cNvPr id="10" name="Szövegdoboz 9">
+            <a:extLst>
+              <a:ext uri="{FF2B5EF4-FFF2-40B4-BE49-F238E27FC236}">
+                <a16:creationId xmlns:a16="http://schemas.microsoft.com/office/drawing/2014/main" id="{34D1C51D-087B-4BD8-9089-BE6663110493}"/>
+              </a:ext>
+            </a:extLst>
+          </p:cNvPr>
+          <p:cNvSpPr txBox="1"/>
+          <p:nvPr/>
+        </p:nvSpPr>
+        <p:spPr>
+          <a:xfrm>
+            <a:off x="4142095" y="4450991"/>
+            <a:ext cx="3955182" cy="1938992"/>
+          </a:xfrm>
+          <a:prstGeom prst="rect">
+            <a:avLst/>
+          </a:prstGeom>
+          <a:noFill/>
+        </p:spPr>
+        <p:txBody>
+          <a:bodyPr wrap="square" rtlCol="0">
+            <a:spAutoFit/>
+          </a:bodyPr>
+          <a:lstStyle/>
+          <a:p>
+            <a:pPr marL="342900" indent="-342900">
+              <a:buFont typeface="Arial" panose="020B0604020202020204" pitchFamily="34" charset="0"/>
+              <a:buChar char="•"/>
+            </a:pPr>
+            <a:r>
+              <a:rPr lang="hu-HU" sz="2400" b="1" dirty="0" err="1">
+                <a:solidFill>
+                  <a:schemeClr val="accent4">
+                    <a:lumMod val="75000"/>
+                  </a:schemeClr>
+                </a:solidFill>
+              </a:rPr>
+              <a:t>Jira</a:t>
+            </a:r>
+            <a:r>
+              <a:rPr lang="hu-HU" sz="2400" dirty="0">
+                <a:solidFill>
+                  <a:schemeClr val="accent4">
+                    <a:lumMod val="75000"/>
+                  </a:schemeClr>
+                </a:solidFill>
+              </a:rPr>
+              <a:t>: Projekt menedzsment eszköz, melyben 2 hetes sprintek alatt,  meghatározott feladatokat kellett elvégezni.</a:t>
+            </a:r>
+          </a:p>
+        </p:txBody>
+      </p:sp>
+      <p:pic>
+        <p:nvPicPr>
           <p:cNvPr id="6" name="Kép 5">
             <a:extLst>
               <a:ext uri="{FF2B5EF4-FFF2-40B4-BE49-F238E27FC236}">
-                <a16:creationId xmlns:a16="http://schemas.microsoft.com/office/drawing/2014/main" id="{CC6512B1-117A-4706-85F0-90C818109E51}"/>
+                <a16:creationId xmlns:a16="http://schemas.microsoft.com/office/drawing/2014/main" id="{F0C82B73-4864-4368-BAF3-2042C6A64724}"/>
               </a:ext>
             </a:extLst>
           </p:cNvPr>
@@ -7304,20 +7890,28 @@
         </p:blipFill>
         <p:spPr>
           <a:xfrm>
-            <a:off x="87751" y="1464067"/>
-            <a:ext cx="4320504" cy="5335746"/>
-          </a:xfrm>
-          <a:prstGeom prst="rect">
-            <a:avLst/>
-          </a:prstGeom>
+            <a:off x="8097277" y="3655321"/>
+            <a:ext cx="3912351" cy="2823875"/>
+          </a:xfrm>
+          <a:prstGeom prst="rect">
+            <a:avLst/>
+          </a:prstGeom>
+          <a:ln w="38100">
+            <a:solidFill>
+              <a:schemeClr val="accent1">
+                <a:lumMod val="40000"/>
+                <a:lumOff val="60000"/>
+              </a:schemeClr>
+            </a:solidFill>
+          </a:ln>
         </p:spPr>
       </p:pic>
       <p:pic>
         <p:nvPicPr>
-          <p:cNvPr id="9" name="Kép 8">
-            <a:extLst>
-              <a:ext uri="{FF2B5EF4-FFF2-40B4-BE49-F238E27FC236}">
-                <a16:creationId xmlns:a16="http://schemas.microsoft.com/office/drawing/2014/main" id="{A27E3F5A-E8B4-4C58-AF54-A8F884E8B94F}"/>
+          <p:cNvPr id="7" name="Kép 6">
+            <a:extLst>
+              <a:ext uri="{FF2B5EF4-FFF2-40B4-BE49-F238E27FC236}">
+                <a16:creationId xmlns:a16="http://schemas.microsoft.com/office/drawing/2014/main" id="{6189322B-B141-438C-A937-984069E8432A}"/>
               </a:ext>
             </a:extLst>
           </p:cNvPr>
@@ -7334,59 +7928,56 @@
         </p:blipFill>
         <p:spPr>
           <a:xfrm>
-            <a:off x="6725777" y="3818072"/>
-            <a:ext cx="5334744" cy="2981741"/>
-          </a:xfrm>
-          <a:prstGeom prst="rect">
-            <a:avLst/>
-          </a:prstGeom>
+            <a:off x="8097277" y="1090846"/>
+            <a:ext cx="3912351" cy="2432017"/>
+          </a:xfrm>
+          <a:prstGeom prst="rect">
+            <a:avLst/>
+          </a:prstGeom>
+          <a:ln w="38100">
+            <a:solidFill>
+              <a:schemeClr val="accent1">
+                <a:lumMod val="40000"/>
+                <a:lumOff val="60000"/>
+              </a:schemeClr>
+            </a:solidFill>
+          </a:ln>
         </p:spPr>
       </p:pic>
-      <p:sp>
-        <p:nvSpPr>
-          <p:cNvPr id="17" name="Szövegdoboz 16">
-            <a:extLst>
-              <a:ext uri="{FF2B5EF4-FFF2-40B4-BE49-F238E27FC236}">
-                <a16:creationId xmlns:a16="http://schemas.microsoft.com/office/drawing/2014/main" id="{BF7D5D01-CE4E-4161-A955-5A591B0B94AE}"/>
-              </a:ext>
-            </a:extLst>
-          </p:cNvPr>
-          <p:cNvSpPr txBox="1"/>
-          <p:nvPr/>
-        </p:nvSpPr>
-        <p:spPr>
-          <a:xfrm>
-            <a:off x="6725777" y="3300943"/>
-            <a:ext cx="5334744" cy="461665"/>
-          </a:xfrm>
-          <a:prstGeom prst="rect">
-            <a:avLst/>
-          </a:prstGeom>
-          <a:noFill/>
-        </p:spPr>
-        <p:txBody>
-          <a:bodyPr wrap="square" rtlCol="0">
-            <a:spAutoFit/>
-          </a:bodyPr>
-          <a:lstStyle/>
-          <a:p>
-            <a:r>
-              <a:rPr lang="hu-HU" sz="2400" dirty="0">
-                <a:solidFill>
-                  <a:schemeClr val="accent4">
-                    <a:lumMod val="75000"/>
-                  </a:schemeClr>
-                </a:solidFill>
-              </a:rPr>
-              <a:t>Munkamegosztás az utolsó 2 hónapban</a:t>
-            </a:r>
-          </a:p>
-        </p:txBody>
-      </p:sp>
+      <p:pic>
+        <p:nvPicPr>
+          <p:cNvPr id="12" name="Kép 11" descr="A képen gyertya látható&#10;&#10;Lehet, hogy az AI által létrehozott tartalom helytelen.">
+            <a:extLst>
+              <a:ext uri="{FF2B5EF4-FFF2-40B4-BE49-F238E27FC236}">
+                <a16:creationId xmlns:a16="http://schemas.microsoft.com/office/drawing/2014/main" id="{4956971B-D0C6-57AC-A4A8-01751C6D8C0D}"/>
+              </a:ext>
+            </a:extLst>
+          </p:cNvPr>
+          <p:cNvPicPr>
+            <a:picLocks noChangeAspect="1"/>
+          </p:cNvPicPr>
+          <p:nvPr/>
+        </p:nvPicPr>
+        <p:blipFill>
+          <a:blip r:embed="rId6"/>
+          <a:stretch>
+            <a:fillRect/>
+          </a:stretch>
+        </p:blipFill>
+        <p:spPr>
+          <a:xfrm>
+            <a:off x="87751" y="58187"/>
+            <a:ext cx="722857" cy="707199"/>
+          </a:xfrm>
+          <a:prstGeom prst="rect">
+            <a:avLst/>
+          </a:prstGeom>
+        </p:spPr>
+      </p:pic>
     </p:spTree>
     <p:extLst>
       <p:ext uri="{BB962C8B-B14F-4D97-AF65-F5344CB8AC3E}">
-        <p14:creationId xmlns:p14="http://schemas.microsoft.com/office/powerpoint/2010/main" val="2363637109"/>
+        <p14:creationId xmlns:p14="http://schemas.microsoft.com/office/powerpoint/2010/main" val="2003293117"/>
       </p:ext>
     </p:extLst>
   </p:cSld>
@@ -7488,6 +8079,814 @@
         </p:nvSpPr>
         <p:spPr>
           <a:xfrm>
+            <a:off x="1402888" y="18383"/>
+            <a:ext cx="9208245" cy="769441"/>
+          </a:xfrm>
+          <a:prstGeom prst="rect">
+            <a:avLst/>
+          </a:prstGeom>
+          <a:noFill/>
+        </p:spPr>
+        <p:txBody>
+          <a:bodyPr wrap="square" rtlCol="0">
+            <a:spAutoFit/>
+          </a:bodyPr>
+          <a:lstStyle/>
+          <a:p>
+            <a:pPr algn="ctr"/>
+            <a:r>
+              <a:rPr lang="hu-HU" sz="4400" b="1" dirty="0">
+                <a:ln w="6350">
+                  <a:solidFill>
+                    <a:schemeClr val="accent1">
+                      <a:lumMod val="75000"/>
+                    </a:schemeClr>
+                  </a:solidFill>
+                </a:ln>
+                <a:solidFill>
+                  <a:schemeClr val="bg1"/>
+                </a:solidFill>
+                <a:latin typeface="Ink Free" panose="03080402000500000000" pitchFamily="66" charset="0"/>
+              </a:rPr>
+              <a:t>Verziókövetés</a:t>
+            </a:r>
+          </a:p>
+        </p:txBody>
+      </p:sp>
+      <p:pic>
+        <p:nvPicPr>
+          <p:cNvPr id="5" name="Picture 2" descr="undefined">
+            <a:extLst>
+              <a:ext uri="{FF2B5EF4-FFF2-40B4-BE49-F238E27FC236}">
+                <a16:creationId xmlns:a16="http://schemas.microsoft.com/office/drawing/2014/main" id="{E6A87C9D-5229-4363-95A2-B453ADD8C8D7}"/>
+              </a:ext>
+            </a:extLst>
+          </p:cNvPr>
+          <p:cNvPicPr>
+            <a:picLocks noChangeAspect="1" noChangeArrowheads="1"/>
+          </p:cNvPicPr>
+          <p:nvPr/>
+        </p:nvPicPr>
+        <p:blipFill>
+          <a:blip r:embed="rId2" cstate="print">
+            <a:extLst>
+              <a:ext uri="{28A0092B-C50C-407E-A947-70E740481C1C}">
+                <a14:useLocalDpi xmlns:a14="http://schemas.microsoft.com/office/drawing/2010/main" val="0"/>
+              </a:ext>
+            </a:extLst>
+          </a:blip>
+          <a:srcRect/>
+          <a:stretch>
+            <a:fillRect/>
+          </a:stretch>
+        </p:blipFill>
+        <p:spPr bwMode="auto">
+          <a:xfrm>
+            <a:off x="11241370" y="967096"/>
+            <a:ext cx="819151" cy="819151"/>
+          </a:xfrm>
+          <a:prstGeom prst="rect">
+            <a:avLst/>
+          </a:prstGeom>
+          <a:noFill/>
+          <a:extLst>
+            <a:ext uri="{909E8E84-426E-40DD-AFC4-6F175D3DCCD1}">
+              <a14:hiddenFill xmlns:a14="http://schemas.microsoft.com/office/drawing/2010/main">
+                <a:solidFill>
+                  <a:srgbClr val="FFFFFF"/>
+                </a:solidFill>
+              </a14:hiddenFill>
+            </a:ext>
+          </a:extLst>
+        </p:spPr>
+      </p:pic>
+      <p:pic>
+        <p:nvPicPr>
+          <p:cNvPr id="12" name="Kép 11" descr="A képen gyertya látható&#10;&#10;Lehet, hogy az AI által létrehozott tartalom helytelen.">
+            <a:extLst>
+              <a:ext uri="{FF2B5EF4-FFF2-40B4-BE49-F238E27FC236}">
+                <a16:creationId xmlns:a16="http://schemas.microsoft.com/office/drawing/2014/main" id="{4956971B-D0C6-57AC-A4A8-01751C6D8C0D}"/>
+              </a:ext>
+            </a:extLst>
+          </p:cNvPr>
+          <p:cNvPicPr>
+            <a:picLocks noChangeAspect="1"/>
+          </p:cNvPicPr>
+          <p:nvPr/>
+        </p:nvPicPr>
+        <p:blipFill>
+          <a:blip r:embed="rId3"/>
+          <a:stretch>
+            <a:fillRect/>
+          </a:stretch>
+        </p:blipFill>
+        <p:spPr>
+          <a:xfrm>
+            <a:off x="87751" y="58187"/>
+            <a:ext cx="722857" cy="707199"/>
+          </a:xfrm>
+          <a:prstGeom prst="rect">
+            <a:avLst/>
+          </a:prstGeom>
+        </p:spPr>
+      </p:pic>
+      <p:pic>
+        <p:nvPicPr>
+          <p:cNvPr id="8" name="Kép 7">
+            <a:extLst>
+              <a:ext uri="{FF2B5EF4-FFF2-40B4-BE49-F238E27FC236}">
+                <a16:creationId xmlns:a16="http://schemas.microsoft.com/office/drawing/2014/main" id="{00DEEAF1-9853-4F7B-8168-2A981E8B5540}"/>
+              </a:ext>
+            </a:extLst>
+          </p:cNvPr>
+          <p:cNvPicPr>
+            <a:picLocks noChangeAspect="1"/>
+          </p:cNvPicPr>
+          <p:nvPr/>
+        </p:nvPicPr>
+        <p:blipFill>
+          <a:blip r:embed="rId4"/>
+          <a:stretch>
+            <a:fillRect/>
+          </a:stretch>
+        </p:blipFill>
+        <p:spPr>
+          <a:xfrm>
+            <a:off x="4947681" y="2143635"/>
+            <a:ext cx="7128056" cy="4642616"/>
+          </a:xfrm>
+          <a:prstGeom prst="rect">
+            <a:avLst/>
+          </a:prstGeom>
+          <a:ln w="38100">
+            <a:solidFill>
+              <a:schemeClr val="accent5">
+                <a:lumMod val="40000"/>
+                <a:lumOff val="60000"/>
+              </a:schemeClr>
+            </a:solidFill>
+          </a:ln>
+        </p:spPr>
+      </p:pic>
+      <p:sp>
+        <p:nvSpPr>
+          <p:cNvPr id="13" name="Szövegdoboz 12">
+            <a:extLst>
+              <a:ext uri="{FF2B5EF4-FFF2-40B4-BE49-F238E27FC236}">
+                <a16:creationId xmlns:a16="http://schemas.microsoft.com/office/drawing/2014/main" id="{13385620-EEBD-4E3D-8838-328CB44AE553}"/>
+              </a:ext>
+            </a:extLst>
+          </p:cNvPr>
+          <p:cNvSpPr txBox="1"/>
+          <p:nvPr/>
+        </p:nvSpPr>
+        <p:spPr>
+          <a:xfrm>
+            <a:off x="7422187" y="1555414"/>
+            <a:ext cx="2514047" cy="461665"/>
+          </a:xfrm>
+          <a:prstGeom prst="rect">
+            <a:avLst/>
+          </a:prstGeom>
+          <a:noFill/>
+        </p:spPr>
+        <p:txBody>
+          <a:bodyPr wrap="square" rtlCol="0">
+            <a:spAutoFit/>
+          </a:bodyPr>
+          <a:lstStyle/>
+          <a:p>
+            <a:r>
+              <a:rPr lang="hu-HU" sz="2400" dirty="0">
+                <a:solidFill>
+                  <a:schemeClr val="accent4">
+                    <a:lumMod val="75000"/>
+                  </a:schemeClr>
+                </a:solidFill>
+              </a:rPr>
+              <a:t>Az összes feltöltés</a:t>
+            </a:r>
+          </a:p>
+        </p:txBody>
+      </p:sp>
+      <p:pic>
+        <p:nvPicPr>
+          <p:cNvPr id="14" name="Kép 13">
+            <a:extLst>
+              <a:ext uri="{FF2B5EF4-FFF2-40B4-BE49-F238E27FC236}">
+                <a16:creationId xmlns:a16="http://schemas.microsoft.com/office/drawing/2014/main" id="{7206398F-3B35-4473-9CC0-D6E680B73509}"/>
+              </a:ext>
+            </a:extLst>
+          </p:cNvPr>
+          <p:cNvPicPr>
+            <a:picLocks noChangeAspect="1"/>
+          </p:cNvPicPr>
+          <p:nvPr/>
+        </p:nvPicPr>
+        <p:blipFill>
+          <a:blip r:embed="rId5"/>
+          <a:stretch>
+            <a:fillRect/>
+          </a:stretch>
+        </p:blipFill>
+        <p:spPr>
+          <a:xfrm>
+            <a:off x="131478" y="1500554"/>
+            <a:ext cx="3381313" cy="1694473"/>
+          </a:xfrm>
+          <a:prstGeom prst="rect">
+            <a:avLst/>
+          </a:prstGeom>
+          <a:ln w="38100">
+            <a:solidFill>
+              <a:schemeClr val="accent5">
+                <a:lumMod val="40000"/>
+                <a:lumOff val="60000"/>
+              </a:schemeClr>
+            </a:solidFill>
+          </a:ln>
+        </p:spPr>
+      </p:pic>
+      <p:pic>
+        <p:nvPicPr>
+          <p:cNvPr id="16" name="Kép 15">
+            <a:extLst>
+              <a:ext uri="{FF2B5EF4-FFF2-40B4-BE49-F238E27FC236}">
+                <a16:creationId xmlns:a16="http://schemas.microsoft.com/office/drawing/2014/main" id="{A0D67C5F-3728-4EF5-9EC1-236B866A07C3}"/>
+              </a:ext>
+            </a:extLst>
+          </p:cNvPr>
+          <p:cNvPicPr>
+            <a:picLocks noChangeAspect="1"/>
+          </p:cNvPicPr>
+          <p:nvPr/>
+        </p:nvPicPr>
+        <p:blipFill>
+          <a:blip r:embed="rId6"/>
+          <a:stretch>
+            <a:fillRect/>
+          </a:stretch>
+        </p:blipFill>
+        <p:spPr>
+          <a:xfrm>
+            <a:off x="116263" y="3287111"/>
+            <a:ext cx="3411744" cy="1694474"/>
+          </a:xfrm>
+          <a:prstGeom prst="rect">
+            <a:avLst/>
+          </a:prstGeom>
+          <a:ln w="38100">
+            <a:solidFill>
+              <a:schemeClr val="accent5">
+                <a:lumMod val="40000"/>
+                <a:lumOff val="60000"/>
+              </a:schemeClr>
+            </a:solidFill>
+          </a:ln>
+        </p:spPr>
+      </p:pic>
+      <p:pic>
+        <p:nvPicPr>
+          <p:cNvPr id="18" name="Kép 17">
+            <a:extLst>
+              <a:ext uri="{FF2B5EF4-FFF2-40B4-BE49-F238E27FC236}">
+                <a16:creationId xmlns:a16="http://schemas.microsoft.com/office/drawing/2014/main" id="{5298B1E8-9C37-46C6-BA7B-751D04177143}"/>
+              </a:ext>
+            </a:extLst>
+          </p:cNvPr>
+          <p:cNvPicPr>
+            <a:picLocks noChangeAspect="1"/>
+          </p:cNvPicPr>
+          <p:nvPr/>
+        </p:nvPicPr>
+        <p:blipFill>
+          <a:blip r:embed="rId7"/>
+          <a:stretch>
+            <a:fillRect/>
+          </a:stretch>
+        </p:blipFill>
+        <p:spPr>
+          <a:xfrm>
+            <a:off x="116263" y="5100148"/>
+            <a:ext cx="3440256" cy="1686103"/>
+          </a:xfrm>
+          <a:prstGeom prst="rect">
+            <a:avLst/>
+          </a:prstGeom>
+          <a:ln w="38100">
+            <a:solidFill>
+              <a:schemeClr val="accent5">
+                <a:lumMod val="40000"/>
+                <a:lumOff val="60000"/>
+              </a:schemeClr>
+            </a:solidFill>
+          </a:ln>
+        </p:spPr>
+      </p:pic>
+      <p:sp>
+        <p:nvSpPr>
+          <p:cNvPr id="20" name="Szövegdoboz 19">
+            <a:extLst>
+              <a:ext uri="{FF2B5EF4-FFF2-40B4-BE49-F238E27FC236}">
+                <a16:creationId xmlns:a16="http://schemas.microsoft.com/office/drawing/2014/main" id="{75632A7A-9CCC-414A-9933-374016A208E6}"/>
+              </a:ext>
+            </a:extLst>
+          </p:cNvPr>
+          <p:cNvSpPr txBox="1"/>
+          <p:nvPr/>
+        </p:nvSpPr>
+        <p:spPr>
+          <a:xfrm>
+            <a:off x="131479" y="1046410"/>
+            <a:ext cx="3516694" cy="461665"/>
+          </a:xfrm>
+          <a:prstGeom prst="rect">
+            <a:avLst/>
+          </a:prstGeom>
+          <a:noFill/>
+        </p:spPr>
+        <p:txBody>
+          <a:bodyPr wrap="square" rtlCol="0">
+            <a:spAutoFit/>
+          </a:bodyPr>
+          <a:lstStyle/>
+          <a:p>
+            <a:r>
+              <a:rPr lang="hu-HU" sz="2400" dirty="0">
+                <a:solidFill>
+                  <a:schemeClr val="accent4">
+                    <a:lumMod val="75000"/>
+                  </a:schemeClr>
+                </a:solidFill>
+              </a:rPr>
+              <a:t>Személyenkénti feltöltések</a:t>
+            </a:r>
+          </a:p>
+        </p:txBody>
+      </p:sp>
+    </p:spTree>
+    <p:extLst>
+      <p:ext uri="{BB962C8B-B14F-4D97-AF65-F5344CB8AC3E}">
+        <p14:creationId xmlns:p14="http://schemas.microsoft.com/office/powerpoint/2010/main" val="581726980"/>
+      </p:ext>
+    </p:extLst>
+  </p:cSld>
+  <p:clrMapOvr>
+    <a:masterClrMapping/>
+  </p:clrMapOvr>
+  <p:transition spd="med">
+    <p:pull/>
+  </p:transition>
+</p:sld>
+</file>
+
+<file path=ppt/slides/slide18.xml><?xml version="1.0" encoding="utf-8"?>
+<p:sld xmlns:a="http://schemas.openxmlformats.org/drawingml/2006/main" xmlns:r="http://schemas.openxmlformats.org/officeDocument/2006/relationships" xmlns:p="http://schemas.openxmlformats.org/presentationml/2006/main">
+  <p:cSld>
+    <p:bg>
+      <p:bgPr>
+        <a:solidFill>
+          <a:schemeClr val="accent4">
+            <a:lumMod val="20000"/>
+            <a:lumOff val="80000"/>
+          </a:schemeClr>
+        </a:solidFill>
+        <a:effectLst/>
+      </p:bgPr>
+    </p:bg>
+    <p:spTree>
+      <p:nvGrpSpPr>
+        <p:cNvPr id="1" name=""/>
+        <p:cNvGrpSpPr/>
+        <p:nvPr/>
+      </p:nvGrpSpPr>
+      <p:grpSpPr>
+        <a:xfrm>
+          <a:off x="0" y="0"/>
+          <a:ext cx="0" cy="0"/>
+          <a:chOff x="0" y="0"/>
+          <a:chExt cx="0" cy="0"/>
+        </a:xfrm>
+      </p:grpSpPr>
+      <p:sp>
+        <p:nvSpPr>
+          <p:cNvPr id="4" name="Téglalap 3"/>
+          <p:cNvSpPr/>
+          <p:nvPr/>
+        </p:nvSpPr>
+        <p:spPr>
+          <a:xfrm>
+            <a:off x="0" y="0"/>
+            <a:ext cx="12192000" cy="819150"/>
+          </a:xfrm>
+          <a:prstGeom prst="rect">
+            <a:avLst/>
+          </a:prstGeom>
+          <a:solidFill>
+            <a:schemeClr val="accent1">
+              <a:lumMod val="60000"/>
+              <a:lumOff val="40000"/>
+            </a:schemeClr>
+          </a:solidFill>
+          <a:ln>
+            <a:noFill/>
+          </a:ln>
+        </p:spPr>
+        <p:style>
+          <a:lnRef idx="2">
+            <a:schemeClr val="accent1">
+              <a:shade val="50000"/>
+            </a:schemeClr>
+          </a:lnRef>
+          <a:fillRef idx="1">
+            <a:schemeClr val="accent1"/>
+          </a:fillRef>
+          <a:effectRef idx="0">
+            <a:schemeClr val="accent1"/>
+          </a:effectRef>
+          <a:fontRef idx="minor">
+            <a:schemeClr val="lt1"/>
+          </a:fontRef>
+        </p:style>
+        <p:txBody>
+          <a:bodyPr rtlCol="0" anchor="ctr"/>
+          <a:lstStyle/>
+          <a:p>
+            <a:pPr algn="ctr"/>
+            <a:endParaRPr lang="hu-HU">
+              <a:solidFill>
+                <a:schemeClr val="tx1"/>
+              </a:solidFill>
+            </a:endParaRPr>
+          </a:p>
+        </p:txBody>
+      </p:sp>
+      <p:sp>
+        <p:nvSpPr>
+          <p:cNvPr id="2" name="Szövegdoboz 1"/>
+          <p:cNvSpPr txBox="1"/>
+          <p:nvPr/>
+        </p:nvSpPr>
+        <p:spPr>
+          <a:xfrm>
+            <a:off x="1402888" y="18383"/>
+            <a:ext cx="9208245" cy="769441"/>
+          </a:xfrm>
+          <a:prstGeom prst="rect">
+            <a:avLst/>
+          </a:prstGeom>
+          <a:noFill/>
+        </p:spPr>
+        <p:txBody>
+          <a:bodyPr wrap="square" rtlCol="0">
+            <a:spAutoFit/>
+          </a:bodyPr>
+          <a:lstStyle/>
+          <a:p>
+            <a:pPr algn="ctr"/>
+            <a:r>
+              <a:rPr lang="hu-HU" sz="4400" b="1" dirty="0">
+                <a:ln w="6350">
+                  <a:solidFill>
+                    <a:schemeClr val="accent1">
+                      <a:lumMod val="75000"/>
+                    </a:schemeClr>
+                  </a:solidFill>
+                </a:ln>
+                <a:solidFill>
+                  <a:schemeClr val="bg1"/>
+                </a:solidFill>
+                <a:latin typeface="Ink Free" panose="03080402000500000000" pitchFamily="66" charset="0"/>
+              </a:rPr>
+              <a:t>Munka menedzsment</a:t>
+            </a:r>
+          </a:p>
+        </p:txBody>
+      </p:sp>
+      <p:pic>
+        <p:nvPicPr>
+          <p:cNvPr id="12" name="Kép 11" descr="A képen gyertya látható&#10;&#10;Lehet, hogy az AI által létrehozott tartalom helytelen.">
+            <a:extLst>
+              <a:ext uri="{FF2B5EF4-FFF2-40B4-BE49-F238E27FC236}">
+                <a16:creationId xmlns:a16="http://schemas.microsoft.com/office/drawing/2014/main" id="{4956971B-D0C6-57AC-A4A8-01751C6D8C0D}"/>
+              </a:ext>
+            </a:extLst>
+          </p:cNvPr>
+          <p:cNvPicPr>
+            <a:picLocks noChangeAspect="1"/>
+          </p:cNvPicPr>
+          <p:nvPr/>
+        </p:nvPicPr>
+        <p:blipFill>
+          <a:blip r:embed="rId2"/>
+          <a:stretch>
+            <a:fillRect/>
+          </a:stretch>
+        </p:blipFill>
+        <p:spPr>
+          <a:xfrm>
+            <a:off x="87751" y="58187"/>
+            <a:ext cx="722857" cy="707199"/>
+          </a:xfrm>
+          <a:prstGeom prst="rect">
+            <a:avLst/>
+          </a:prstGeom>
+        </p:spPr>
+      </p:pic>
+      <p:sp>
+        <p:nvSpPr>
+          <p:cNvPr id="20" name="Szövegdoboz 19">
+            <a:extLst>
+              <a:ext uri="{FF2B5EF4-FFF2-40B4-BE49-F238E27FC236}">
+                <a16:creationId xmlns:a16="http://schemas.microsoft.com/office/drawing/2014/main" id="{75632A7A-9CCC-414A-9933-374016A208E6}"/>
+              </a:ext>
+            </a:extLst>
+          </p:cNvPr>
+          <p:cNvSpPr txBox="1"/>
+          <p:nvPr/>
+        </p:nvSpPr>
+        <p:spPr>
+          <a:xfrm>
+            <a:off x="1380489" y="1021954"/>
+            <a:ext cx="1735028" cy="461665"/>
+          </a:xfrm>
+          <a:prstGeom prst="rect">
+            <a:avLst/>
+          </a:prstGeom>
+          <a:noFill/>
+        </p:spPr>
+        <p:txBody>
+          <a:bodyPr wrap="square" rtlCol="0">
+            <a:spAutoFit/>
+          </a:bodyPr>
+          <a:lstStyle/>
+          <a:p>
+            <a:r>
+              <a:rPr lang="hu-HU" sz="2400" dirty="0">
+                <a:solidFill>
+                  <a:schemeClr val="accent4">
+                    <a:lumMod val="75000"/>
+                  </a:schemeClr>
+                </a:solidFill>
+              </a:rPr>
+              <a:t>Munkatábla</a:t>
+            </a:r>
+          </a:p>
+        </p:txBody>
+      </p:sp>
+      <p:pic>
+        <p:nvPicPr>
+          <p:cNvPr id="15" name="Picture 4" descr="undefined">
+            <a:extLst>
+              <a:ext uri="{FF2B5EF4-FFF2-40B4-BE49-F238E27FC236}">
+                <a16:creationId xmlns:a16="http://schemas.microsoft.com/office/drawing/2014/main" id="{B298515D-F181-48FA-9F6D-1E4B7F65DBDE}"/>
+              </a:ext>
+            </a:extLst>
+          </p:cNvPr>
+          <p:cNvPicPr>
+            <a:picLocks noChangeAspect="1" noChangeArrowheads="1"/>
+          </p:cNvPicPr>
+          <p:nvPr/>
+        </p:nvPicPr>
+        <p:blipFill>
+          <a:blip r:embed="rId3" cstate="print">
+            <a:extLst>
+              <a:ext uri="{28A0092B-C50C-407E-A947-70E740481C1C}">
+                <a14:useLocalDpi xmlns:a14="http://schemas.microsoft.com/office/drawing/2010/main" val="0"/>
+              </a:ext>
+            </a:extLst>
+          </a:blip>
+          <a:srcRect/>
+          <a:stretch>
+            <a:fillRect/>
+          </a:stretch>
+        </p:blipFill>
+        <p:spPr bwMode="auto">
+          <a:xfrm>
+            <a:off x="10482618" y="819174"/>
+            <a:ext cx="1577903" cy="664445"/>
+          </a:xfrm>
+          <a:prstGeom prst="rect">
+            <a:avLst/>
+          </a:prstGeom>
+          <a:noFill/>
+          <a:extLst>
+            <a:ext uri="{909E8E84-426E-40DD-AFC4-6F175D3DCCD1}">
+              <a14:hiddenFill xmlns:a14="http://schemas.microsoft.com/office/drawing/2010/main">
+                <a:solidFill>
+                  <a:srgbClr val="FFFFFF"/>
+                </a:solidFill>
+              </a14:hiddenFill>
+            </a:ext>
+          </a:extLst>
+        </p:spPr>
+      </p:pic>
+      <p:pic>
+        <p:nvPicPr>
+          <p:cNvPr id="6" name="Kép 5">
+            <a:extLst>
+              <a:ext uri="{FF2B5EF4-FFF2-40B4-BE49-F238E27FC236}">
+                <a16:creationId xmlns:a16="http://schemas.microsoft.com/office/drawing/2014/main" id="{CC6512B1-117A-4706-85F0-90C818109E51}"/>
+              </a:ext>
+            </a:extLst>
+          </p:cNvPr>
+          <p:cNvPicPr>
+            <a:picLocks noChangeAspect="1"/>
+          </p:cNvPicPr>
+          <p:nvPr/>
+        </p:nvPicPr>
+        <p:blipFill>
+          <a:blip r:embed="rId4"/>
+          <a:stretch>
+            <a:fillRect/>
+          </a:stretch>
+        </p:blipFill>
+        <p:spPr>
+          <a:xfrm>
+            <a:off x="87751" y="1464067"/>
+            <a:ext cx="4320504" cy="5335746"/>
+          </a:xfrm>
+          <a:prstGeom prst="rect">
+            <a:avLst/>
+          </a:prstGeom>
+        </p:spPr>
+      </p:pic>
+      <p:pic>
+        <p:nvPicPr>
+          <p:cNvPr id="9" name="Kép 8">
+            <a:extLst>
+              <a:ext uri="{FF2B5EF4-FFF2-40B4-BE49-F238E27FC236}">
+                <a16:creationId xmlns:a16="http://schemas.microsoft.com/office/drawing/2014/main" id="{A27E3F5A-E8B4-4C58-AF54-A8F884E8B94F}"/>
+              </a:ext>
+            </a:extLst>
+          </p:cNvPr>
+          <p:cNvPicPr>
+            <a:picLocks noChangeAspect="1"/>
+          </p:cNvPicPr>
+          <p:nvPr/>
+        </p:nvPicPr>
+        <p:blipFill>
+          <a:blip r:embed="rId5"/>
+          <a:stretch>
+            <a:fillRect/>
+          </a:stretch>
+        </p:blipFill>
+        <p:spPr>
+          <a:xfrm>
+            <a:off x="6725777" y="3818072"/>
+            <a:ext cx="5334744" cy="2981741"/>
+          </a:xfrm>
+          <a:prstGeom prst="rect">
+            <a:avLst/>
+          </a:prstGeom>
+        </p:spPr>
+      </p:pic>
+      <p:sp>
+        <p:nvSpPr>
+          <p:cNvPr id="17" name="Szövegdoboz 16">
+            <a:extLst>
+              <a:ext uri="{FF2B5EF4-FFF2-40B4-BE49-F238E27FC236}">
+                <a16:creationId xmlns:a16="http://schemas.microsoft.com/office/drawing/2014/main" id="{BF7D5D01-CE4E-4161-A955-5A591B0B94AE}"/>
+              </a:ext>
+            </a:extLst>
+          </p:cNvPr>
+          <p:cNvSpPr txBox="1"/>
+          <p:nvPr/>
+        </p:nvSpPr>
+        <p:spPr>
+          <a:xfrm>
+            <a:off x="6725777" y="3300943"/>
+            <a:ext cx="5334744" cy="461665"/>
+          </a:xfrm>
+          <a:prstGeom prst="rect">
+            <a:avLst/>
+          </a:prstGeom>
+          <a:noFill/>
+        </p:spPr>
+        <p:txBody>
+          <a:bodyPr wrap="square" rtlCol="0">
+            <a:spAutoFit/>
+          </a:bodyPr>
+          <a:lstStyle/>
+          <a:p>
+            <a:r>
+              <a:rPr lang="hu-HU" sz="2400" dirty="0">
+                <a:solidFill>
+                  <a:schemeClr val="accent4">
+                    <a:lumMod val="75000"/>
+                  </a:schemeClr>
+                </a:solidFill>
+              </a:rPr>
+              <a:t>Munkamegosztás az utolsó 2 hónapban</a:t>
+            </a:r>
+          </a:p>
+        </p:txBody>
+      </p:sp>
+    </p:spTree>
+    <p:extLst>
+      <p:ext uri="{BB962C8B-B14F-4D97-AF65-F5344CB8AC3E}">
+        <p14:creationId xmlns:p14="http://schemas.microsoft.com/office/powerpoint/2010/main" val="2363637109"/>
+      </p:ext>
+    </p:extLst>
+  </p:cSld>
+  <p:clrMapOvr>
+    <a:masterClrMapping/>
+  </p:clrMapOvr>
+  <p:transition spd="med">
+    <p:pull/>
+  </p:transition>
+</p:sld>
+</file>
+
+<file path=ppt/slides/slide19.xml><?xml version="1.0" encoding="utf-8"?>
+<p:sld xmlns:a="http://schemas.openxmlformats.org/drawingml/2006/main" xmlns:r="http://schemas.openxmlformats.org/officeDocument/2006/relationships" xmlns:p="http://schemas.openxmlformats.org/presentationml/2006/main">
+  <p:cSld>
+    <p:bg>
+      <p:bgPr>
+        <a:solidFill>
+          <a:schemeClr val="accent4">
+            <a:lumMod val="20000"/>
+            <a:lumOff val="80000"/>
+          </a:schemeClr>
+        </a:solidFill>
+        <a:effectLst/>
+      </p:bgPr>
+    </p:bg>
+    <p:spTree>
+      <p:nvGrpSpPr>
+        <p:cNvPr id="1" name=""/>
+        <p:cNvGrpSpPr/>
+        <p:nvPr/>
+      </p:nvGrpSpPr>
+      <p:grpSpPr>
+        <a:xfrm>
+          <a:off x="0" y="0"/>
+          <a:ext cx="0" cy="0"/>
+          <a:chOff x="0" y="0"/>
+          <a:chExt cx="0" cy="0"/>
+        </a:xfrm>
+      </p:grpSpPr>
+      <p:sp>
+        <p:nvSpPr>
+          <p:cNvPr id="4" name="Téglalap 3"/>
+          <p:cNvSpPr/>
+          <p:nvPr/>
+        </p:nvSpPr>
+        <p:spPr>
+          <a:xfrm>
+            <a:off x="0" y="0"/>
+            <a:ext cx="12192000" cy="819150"/>
+          </a:xfrm>
+          <a:prstGeom prst="rect">
+            <a:avLst/>
+          </a:prstGeom>
+          <a:solidFill>
+            <a:schemeClr val="accent1">
+              <a:lumMod val="60000"/>
+              <a:lumOff val="40000"/>
+            </a:schemeClr>
+          </a:solidFill>
+          <a:ln>
+            <a:noFill/>
+          </a:ln>
+        </p:spPr>
+        <p:style>
+          <a:lnRef idx="2">
+            <a:schemeClr val="accent1">
+              <a:shade val="50000"/>
+            </a:schemeClr>
+          </a:lnRef>
+          <a:fillRef idx="1">
+            <a:schemeClr val="accent1"/>
+          </a:fillRef>
+          <a:effectRef idx="0">
+            <a:schemeClr val="accent1"/>
+          </a:effectRef>
+          <a:fontRef idx="minor">
+            <a:schemeClr val="lt1"/>
+          </a:fontRef>
+        </p:style>
+        <p:txBody>
+          <a:bodyPr rtlCol="0" anchor="ctr"/>
+          <a:lstStyle/>
+          <a:p>
+            <a:pPr algn="ctr"/>
+            <a:endParaRPr lang="hu-HU">
+              <a:solidFill>
+                <a:schemeClr val="tx1"/>
+              </a:solidFill>
+            </a:endParaRPr>
+          </a:p>
+        </p:txBody>
+      </p:sp>
+      <p:sp>
+        <p:nvSpPr>
+          <p:cNvPr id="2" name="Szövegdoboz 1"/>
+          <p:cNvSpPr txBox="1"/>
+          <p:nvPr/>
+        </p:nvSpPr>
+        <p:spPr>
+          <a:xfrm>
             <a:off x="2801383" y="24854"/>
             <a:ext cx="6589234" cy="769441"/>
           </a:xfrm>
@@ -7936,7 +9335,713 @@
 </p:sld>
 </file>
 
-<file path=ppt/slides/slide18.xml><?xml version="1.0" encoding="utf-8"?>
+<file path=ppt/slides/slide2.xml><?xml version="1.0" encoding="utf-8"?>
+<p:sld xmlns:a="http://schemas.openxmlformats.org/drawingml/2006/main" xmlns:r="http://schemas.openxmlformats.org/officeDocument/2006/relationships" xmlns:p="http://schemas.openxmlformats.org/presentationml/2006/main">
+  <p:cSld>
+    <p:bg>
+      <p:bgPr>
+        <a:solidFill>
+          <a:schemeClr val="accent4">
+            <a:lumMod val="20000"/>
+            <a:lumOff val="80000"/>
+          </a:schemeClr>
+        </a:solidFill>
+        <a:effectLst/>
+      </p:bgPr>
+    </p:bg>
+    <p:spTree>
+      <p:nvGrpSpPr>
+        <p:cNvPr id="1" name="">
+          <a:extLst>
+            <a:ext uri="{FF2B5EF4-FFF2-40B4-BE49-F238E27FC236}">
+              <a16:creationId xmlns:a16="http://schemas.microsoft.com/office/drawing/2014/main" id="{ACEA82BF-DF87-C3EB-3C33-71EE012FBF13}"/>
+            </a:ext>
+          </a:extLst>
+        </p:cNvPr>
+        <p:cNvGrpSpPr/>
+        <p:nvPr/>
+      </p:nvGrpSpPr>
+      <p:grpSpPr>
+        <a:xfrm>
+          <a:off x="0" y="0"/>
+          <a:ext cx="0" cy="0"/>
+          <a:chOff x="0" y="0"/>
+          <a:chExt cx="0" cy="0"/>
+        </a:xfrm>
+      </p:grpSpPr>
+      <p:sp>
+        <p:nvSpPr>
+          <p:cNvPr id="4" name="Téglalap 3">
+            <a:extLst>
+              <a:ext uri="{FF2B5EF4-FFF2-40B4-BE49-F238E27FC236}">
+                <a16:creationId xmlns:a16="http://schemas.microsoft.com/office/drawing/2014/main" id="{55751E50-382A-3788-7808-A130F2706FEF}"/>
+              </a:ext>
+            </a:extLst>
+          </p:cNvPr>
+          <p:cNvSpPr/>
+          <p:nvPr/>
+        </p:nvSpPr>
+        <p:spPr>
+          <a:xfrm>
+            <a:off x="0" y="0"/>
+            <a:ext cx="12192000" cy="819150"/>
+          </a:xfrm>
+          <a:prstGeom prst="rect">
+            <a:avLst/>
+          </a:prstGeom>
+          <a:solidFill>
+            <a:schemeClr val="accent1">
+              <a:lumMod val="60000"/>
+              <a:lumOff val="40000"/>
+            </a:schemeClr>
+          </a:solidFill>
+          <a:ln>
+            <a:noFill/>
+          </a:ln>
+        </p:spPr>
+        <p:style>
+          <a:lnRef idx="2">
+            <a:schemeClr val="accent1">
+              <a:shade val="50000"/>
+            </a:schemeClr>
+          </a:lnRef>
+          <a:fillRef idx="1">
+            <a:schemeClr val="accent1"/>
+          </a:fillRef>
+          <a:effectRef idx="0">
+            <a:schemeClr val="accent1"/>
+          </a:effectRef>
+          <a:fontRef idx="minor">
+            <a:schemeClr val="lt1"/>
+          </a:fontRef>
+        </p:style>
+        <p:txBody>
+          <a:bodyPr rtlCol="0" anchor="ctr"/>
+          <a:lstStyle/>
+          <a:p>
+            <a:pPr algn="ctr"/>
+            <a:endParaRPr lang="hu-HU">
+              <a:solidFill>
+                <a:schemeClr val="tx1"/>
+              </a:solidFill>
+            </a:endParaRPr>
+          </a:p>
+        </p:txBody>
+      </p:sp>
+      <p:sp>
+        <p:nvSpPr>
+          <p:cNvPr id="2" name="Szövegdoboz 1">
+            <a:extLst>
+              <a:ext uri="{FF2B5EF4-FFF2-40B4-BE49-F238E27FC236}">
+                <a16:creationId xmlns:a16="http://schemas.microsoft.com/office/drawing/2014/main" id="{59AAEE34-A4BD-81AC-D7B2-01BECE2AC5D7}"/>
+              </a:ext>
+            </a:extLst>
+          </p:cNvPr>
+          <p:cNvSpPr txBox="1"/>
+          <p:nvPr/>
+        </p:nvSpPr>
+        <p:spPr>
+          <a:xfrm>
+            <a:off x="3322060" y="24854"/>
+            <a:ext cx="5547880" cy="769441"/>
+          </a:xfrm>
+          <a:prstGeom prst="rect">
+            <a:avLst/>
+          </a:prstGeom>
+          <a:noFill/>
+        </p:spPr>
+        <p:txBody>
+          <a:bodyPr wrap="square" lIns="91440" tIns="45720" rIns="91440" bIns="45720" rtlCol="0" anchor="t">
+            <a:spAutoFit/>
+          </a:bodyPr>
+          <a:lstStyle/>
+          <a:p>
+            <a:pPr algn="ctr"/>
+            <a:r>
+              <a:rPr lang="hu-HU" sz="4400" b="1" dirty="0">
+                <a:ln w="6350">
+                  <a:solidFill>
+                    <a:schemeClr val="accent1">
+                      <a:lumMod val="75000"/>
+                    </a:schemeClr>
+                  </a:solidFill>
+                </a:ln>
+                <a:solidFill>
+                  <a:schemeClr val="bg1"/>
+                </a:solidFill>
+                <a:latin typeface="Ink Free"/>
+              </a:rPr>
+              <a:t>Csapat Bemutatása</a:t>
+            </a:r>
+            <a:endParaRPr lang="hu-HU" dirty="0">
+              <a:solidFill>
+                <a:schemeClr val="bg1"/>
+              </a:solidFill>
+            </a:endParaRPr>
+          </a:p>
+        </p:txBody>
+      </p:sp>
+      <p:sp>
+        <p:nvSpPr>
+          <p:cNvPr id="6" name="Szövegdoboz 5">
+            <a:extLst>
+              <a:ext uri="{FF2B5EF4-FFF2-40B4-BE49-F238E27FC236}">
+                <a16:creationId xmlns:a16="http://schemas.microsoft.com/office/drawing/2014/main" id="{8C6B2B83-D553-1F50-A09E-E9FDFDDC863A}"/>
+              </a:ext>
+            </a:extLst>
+          </p:cNvPr>
+          <p:cNvSpPr txBox="1"/>
+          <p:nvPr/>
+        </p:nvSpPr>
+        <p:spPr>
+          <a:xfrm>
+            <a:off x="87751" y="1303159"/>
+            <a:ext cx="3433648" cy="2677656"/>
+          </a:xfrm>
+          <a:prstGeom prst="rect">
+            <a:avLst/>
+          </a:prstGeom>
+          <a:noFill/>
+        </p:spPr>
+        <p:txBody>
+          <a:bodyPr wrap="square" lIns="91440" tIns="45720" rIns="91440" bIns="45720" rtlCol="0" anchor="ctr">
+            <a:spAutoFit/>
+          </a:bodyPr>
+          <a:lstStyle/>
+          <a:p>
+            <a:pPr algn="just"/>
+            <a:r>
+              <a:rPr lang="hu-HU" sz="2400" dirty="0">
+                <a:solidFill>
+                  <a:schemeClr val="accent4">
+                    <a:lumMod val="75000"/>
+                  </a:schemeClr>
+                </a:solidFill>
+              </a:rPr>
+              <a:t>Farkas Bence:</a:t>
+            </a:r>
+          </a:p>
+          <a:p>
+            <a:pPr algn="just"/>
+            <a:endParaRPr lang="hu-HU" sz="2400" dirty="0">
+              <a:solidFill>
+                <a:schemeClr val="accent4">
+                  <a:lumMod val="75000"/>
+                </a:schemeClr>
+              </a:solidFill>
+              <a:ea typeface="Calibri" panose="020F0502020204030204"/>
+              <a:cs typeface="Calibri" panose="020F0502020204030204"/>
+            </a:endParaRPr>
+          </a:p>
+          <a:p>
+            <a:pPr marL="342900" indent="-342900" algn="just">
+              <a:buFont typeface="Calibri"/>
+              <a:buChar char="-"/>
+            </a:pPr>
+            <a:r>
+              <a:rPr lang="hu-HU" sz="2400" dirty="0">
+                <a:solidFill>
+                  <a:schemeClr val="accent4">
+                    <a:lumMod val="75000"/>
+                  </a:schemeClr>
+                </a:solidFill>
+                <a:ea typeface="Calibri" panose="020F0502020204030204"/>
+                <a:cs typeface="Calibri" panose="020F0502020204030204"/>
+              </a:rPr>
+              <a:t>Frontend fejlesztés</a:t>
+            </a:r>
+          </a:p>
+          <a:p>
+            <a:pPr marL="342900" indent="-342900" algn="just">
+              <a:buFont typeface="Calibri"/>
+              <a:buChar char="-"/>
+            </a:pPr>
+            <a:r>
+              <a:rPr lang="hu-HU" sz="2400" dirty="0">
+                <a:solidFill>
+                  <a:schemeClr val="accent4">
+                    <a:lumMod val="75000"/>
+                  </a:schemeClr>
+                </a:solidFill>
+                <a:ea typeface="Calibri" panose="020F0502020204030204"/>
+                <a:cs typeface="Calibri" panose="020F0502020204030204"/>
+              </a:rPr>
+              <a:t>Dokumentáció készítés</a:t>
+            </a:r>
+          </a:p>
+          <a:p>
+            <a:pPr marL="342900" indent="-342900" algn="just">
+              <a:buFont typeface="Calibri"/>
+              <a:buChar char="-"/>
+            </a:pPr>
+            <a:r>
+              <a:rPr lang="hu-HU" sz="2400" dirty="0">
+                <a:solidFill>
+                  <a:schemeClr val="accent4">
+                    <a:lumMod val="75000"/>
+                  </a:schemeClr>
+                </a:solidFill>
+                <a:ea typeface="Calibri" panose="020F0502020204030204"/>
+                <a:cs typeface="Calibri" panose="020F0502020204030204"/>
+              </a:rPr>
+              <a:t>Prezentáció készítés</a:t>
+            </a:r>
+          </a:p>
+          <a:p>
+            <a:pPr marL="342900" indent="-342900" algn="just">
+              <a:buFont typeface="Calibri"/>
+              <a:buChar char="-"/>
+            </a:pPr>
+            <a:r>
+              <a:rPr lang="hu-HU" sz="2400" dirty="0">
+                <a:solidFill>
+                  <a:schemeClr val="accent4">
+                    <a:lumMod val="75000"/>
+                  </a:schemeClr>
+                </a:solidFill>
+                <a:ea typeface="Calibri" panose="020F0502020204030204"/>
+                <a:cs typeface="Calibri" panose="020F0502020204030204"/>
+              </a:rPr>
+              <a:t>Kép/logó szerkesztés</a:t>
+            </a:r>
+          </a:p>
+          <a:p>
+            <a:pPr marL="342900" indent="-342900" algn="just">
+              <a:buFont typeface="Calibri"/>
+              <a:buChar char="-"/>
+            </a:pPr>
+            <a:r>
+              <a:rPr lang="hu-HU" sz="2400" dirty="0">
+                <a:solidFill>
+                  <a:schemeClr val="accent4">
+                    <a:lumMod val="75000"/>
+                  </a:schemeClr>
+                </a:solidFill>
+                <a:ea typeface="Calibri" panose="020F0502020204030204"/>
+                <a:cs typeface="Calibri" panose="020F0502020204030204"/>
+              </a:rPr>
+              <a:t>Csapat vezérlés</a:t>
+            </a:r>
+          </a:p>
+        </p:txBody>
+      </p:sp>
+      <p:sp>
+        <p:nvSpPr>
+          <p:cNvPr id="5" name="Szövegdoboz 4">
+            <a:extLst>
+              <a:ext uri="{FF2B5EF4-FFF2-40B4-BE49-F238E27FC236}">
+                <a16:creationId xmlns:a16="http://schemas.microsoft.com/office/drawing/2014/main" id="{A9CC54BC-8EB1-B4DD-25E2-9C717D5E9422}"/>
+              </a:ext>
+            </a:extLst>
+          </p:cNvPr>
+          <p:cNvSpPr txBox="1"/>
+          <p:nvPr/>
+        </p:nvSpPr>
+        <p:spPr>
+          <a:xfrm>
+            <a:off x="4384395" y="1259657"/>
+            <a:ext cx="3423210" cy="3416320"/>
+          </a:xfrm>
+          <a:prstGeom prst="rect">
+            <a:avLst/>
+          </a:prstGeom>
+          <a:noFill/>
+        </p:spPr>
+        <p:txBody>
+          <a:bodyPr wrap="square" lIns="91440" tIns="45720" rIns="91440" bIns="45720" rtlCol="0" anchor="ctr">
+            <a:spAutoFit/>
+          </a:bodyPr>
+          <a:lstStyle/>
+          <a:p>
+            <a:pPr algn="just"/>
+            <a:r>
+              <a:rPr lang="hu-HU" sz="2400" dirty="0">
+                <a:solidFill>
+                  <a:schemeClr val="accent4">
+                    <a:lumMod val="75000"/>
+                  </a:schemeClr>
+                </a:solidFill>
+              </a:rPr>
+              <a:t>Pálosi András:</a:t>
+            </a:r>
+          </a:p>
+          <a:p>
+            <a:pPr algn="just"/>
+            <a:endParaRPr lang="hu-HU" sz="2400" dirty="0">
+              <a:solidFill>
+                <a:schemeClr val="accent4">
+                  <a:lumMod val="75000"/>
+                </a:schemeClr>
+              </a:solidFill>
+              <a:ea typeface="Calibri"/>
+              <a:cs typeface="Calibri"/>
+            </a:endParaRPr>
+          </a:p>
+          <a:p>
+            <a:pPr marL="342900" indent="-342900" algn="just">
+              <a:buFont typeface="Calibri"/>
+              <a:buChar char="-"/>
+            </a:pPr>
+            <a:r>
+              <a:rPr lang="hu-HU" sz="2400" dirty="0">
+                <a:solidFill>
+                  <a:schemeClr val="accent4">
+                    <a:lumMod val="75000"/>
+                  </a:schemeClr>
+                </a:solidFill>
+                <a:ea typeface="Calibri"/>
+                <a:cs typeface="Calibri"/>
+              </a:rPr>
+              <a:t>Adatbázis fejlesztés</a:t>
+            </a:r>
+          </a:p>
+          <a:p>
+            <a:pPr marL="342900" indent="-342900" algn="just">
+              <a:buFont typeface="Calibri"/>
+              <a:buChar char="-"/>
+            </a:pPr>
+            <a:r>
+              <a:rPr lang="hu-HU" sz="2400" dirty="0">
+                <a:solidFill>
+                  <a:schemeClr val="accent4">
+                    <a:lumMod val="75000"/>
+                  </a:schemeClr>
+                </a:solidFill>
+                <a:ea typeface="Calibri"/>
+                <a:cs typeface="Calibri"/>
+              </a:rPr>
+              <a:t>Frontend fejlesztés</a:t>
+            </a:r>
+          </a:p>
+          <a:p>
+            <a:pPr marL="342900" indent="-342900" algn="just">
+              <a:buFont typeface="Calibri"/>
+              <a:buChar char="-"/>
+            </a:pPr>
+            <a:r>
+              <a:rPr lang="hu-HU" sz="2400" dirty="0">
+                <a:solidFill>
+                  <a:schemeClr val="accent4">
+                    <a:lumMod val="75000"/>
+                  </a:schemeClr>
+                </a:solidFill>
+                <a:ea typeface="Calibri"/>
+                <a:cs typeface="Calibri"/>
+              </a:rPr>
+              <a:t>Backend fejlesztés</a:t>
+            </a:r>
+          </a:p>
+          <a:p>
+            <a:pPr marL="342900" indent="-342900" algn="just">
+              <a:buFont typeface="Calibri"/>
+              <a:buChar char="-"/>
+            </a:pPr>
+            <a:r>
+              <a:rPr lang="hu-HU" sz="2400" dirty="0">
+                <a:solidFill>
+                  <a:schemeClr val="accent4">
+                    <a:lumMod val="75000"/>
+                  </a:schemeClr>
+                </a:solidFill>
+                <a:ea typeface="Calibri"/>
+                <a:cs typeface="Calibri"/>
+              </a:rPr>
+              <a:t>Prezentáció készítés</a:t>
+            </a:r>
+          </a:p>
+          <a:p>
+            <a:pPr marL="342900" indent="-342900" algn="just">
+              <a:buFont typeface="Calibri"/>
+              <a:buChar char="-"/>
+            </a:pPr>
+            <a:r>
+              <a:rPr lang="hu-HU" sz="2400" dirty="0">
+                <a:solidFill>
+                  <a:schemeClr val="accent4">
+                    <a:lumMod val="75000"/>
+                  </a:schemeClr>
+                </a:solidFill>
+                <a:ea typeface="Calibri"/>
+                <a:cs typeface="Calibri"/>
+              </a:rPr>
+              <a:t>Dokumentáció készítés</a:t>
+            </a:r>
+          </a:p>
+          <a:p>
+            <a:pPr marL="342900" indent="-342900" algn="just">
+              <a:buFont typeface="Calibri"/>
+              <a:buChar char="-"/>
+            </a:pPr>
+            <a:r>
+              <a:rPr lang="hu-HU" sz="2400" dirty="0">
+                <a:solidFill>
+                  <a:schemeClr val="accent4">
+                    <a:lumMod val="75000"/>
+                  </a:schemeClr>
+                </a:solidFill>
+                <a:ea typeface="Calibri"/>
+                <a:cs typeface="Calibri"/>
+              </a:rPr>
+              <a:t>Tesztelés</a:t>
+            </a:r>
+          </a:p>
+          <a:p>
+            <a:pPr marL="342900" indent="-342900" algn="just">
+              <a:buFont typeface="Calibri"/>
+              <a:buChar char="-"/>
+            </a:pPr>
+            <a:r>
+              <a:rPr lang="hu-HU" sz="2400" dirty="0">
+                <a:solidFill>
+                  <a:schemeClr val="accent4">
+                    <a:lumMod val="75000"/>
+                  </a:schemeClr>
+                </a:solidFill>
+                <a:ea typeface="Calibri"/>
+                <a:cs typeface="Calibri"/>
+              </a:rPr>
+              <a:t>Csapat vezérlés</a:t>
+            </a:r>
+            <a:endParaRPr lang="hu-HU" dirty="0">
+              <a:solidFill>
+                <a:schemeClr val="accent4">
+                  <a:lumMod val="75000"/>
+                </a:schemeClr>
+              </a:solidFill>
+            </a:endParaRPr>
+          </a:p>
+        </p:txBody>
+      </p:sp>
+      <p:sp>
+        <p:nvSpPr>
+          <p:cNvPr id="7" name="Szövegdoboz 6">
+            <a:extLst>
+              <a:ext uri="{FF2B5EF4-FFF2-40B4-BE49-F238E27FC236}">
+                <a16:creationId xmlns:a16="http://schemas.microsoft.com/office/drawing/2014/main" id="{9CD0A707-E39F-39DD-669F-A8B108C69320}"/>
+              </a:ext>
+            </a:extLst>
+          </p:cNvPr>
+          <p:cNvSpPr txBox="1"/>
+          <p:nvPr/>
+        </p:nvSpPr>
+        <p:spPr>
+          <a:xfrm>
+            <a:off x="8670601" y="1259657"/>
+            <a:ext cx="3611100" cy="3046988"/>
+          </a:xfrm>
+          <a:prstGeom prst="rect">
+            <a:avLst/>
+          </a:prstGeom>
+          <a:noFill/>
+        </p:spPr>
+        <p:txBody>
+          <a:bodyPr wrap="square" lIns="91440" tIns="45720" rIns="91440" bIns="45720" rtlCol="0" anchor="ctr">
+            <a:spAutoFit/>
+          </a:bodyPr>
+          <a:lstStyle/>
+          <a:p>
+            <a:pPr algn="just"/>
+            <a:r>
+              <a:rPr lang="hu-HU" sz="2400" dirty="0">
+                <a:solidFill>
+                  <a:schemeClr val="accent4">
+                    <a:lumMod val="75000"/>
+                  </a:schemeClr>
+                </a:solidFill>
+              </a:rPr>
+              <a:t>Pongrácz Gábor:</a:t>
+            </a:r>
+          </a:p>
+          <a:p>
+            <a:pPr algn="just"/>
+            <a:endParaRPr lang="hu-HU" sz="2400" dirty="0">
+              <a:solidFill>
+                <a:schemeClr val="accent4">
+                  <a:lumMod val="75000"/>
+                </a:schemeClr>
+              </a:solidFill>
+              <a:ea typeface="Calibri"/>
+              <a:cs typeface="Calibri"/>
+            </a:endParaRPr>
+          </a:p>
+          <a:p>
+            <a:pPr marL="342900" indent="-342900" algn="just">
+              <a:buFont typeface="Calibri"/>
+              <a:buChar char="-"/>
+            </a:pPr>
+            <a:r>
+              <a:rPr lang="hu-HU" sz="2400" dirty="0">
+                <a:solidFill>
+                  <a:schemeClr val="accent4">
+                    <a:lumMod val="75000"/>
+                  </a:schemeClr>
+                </a:solidFill>
+                <a:ea typeface="Calibri"/>
+                <a:cs typeface="Calibri"/>
+              </a:rPr>
+              <a:t>Adatbázis fejlesztés</a:t>
+            </a:r>
+          </a:p>
+          <a:p>
+            <a:pPr marL="342900" indent="-342900" algn="just">
+              <a:buFont typeface="Calibri"/>
+              <a:buChar char="-"/>
+            </a:pPr>
+            <a:r>
+              <a:rPr lang="hu-HU" sz="2400" dirty="0">
+                <a:solidFill>
+                  <a:schemeClr val="accent4">
+                    <a:lumMod val="75000"/>
+                  </a:schemeClr>
+                </a:solidFill>
+                <a:ea typeface="Calibri"/>
+                <a:cs typeface="Calibri"/>
+              </a:rPr>
+              <a:t>Backend fejlesztés</a:t>
+            </a:r>
+          </a:p>
+          <a:p>
+            <a:pPr marL="342900" indent="-342900" algn="just">
+              <a:buFont typeface="Calibri"/>
+              <a:buChar char="-"/>
+            </a:pPr>
+            <a:r>
+              <a:rPr lang="hu-HU" sz="2400" dirty="0">
+                <a:solidFill>
+                  <a:schemeClr val="accent4">
+                    <a:lumMod val="75000"/>
+                  </a:schemeClr>
+                </a:solidFill>
+                <a:ea typeface="Calibri"/>
+                <a:cs typeface="Calibri"/>
+              </a:rPr>
+              <a:t>WPF </a:t>
+            </a:r>
+            <a:r>
+              <a:rPr lang="hu-HU" sz="2400" dirty="0" err="1">
+                <a:solidFill>
+                  <a:schemeClr val="accent4">
+                    <a:lumMod val="75000"/>
+                  </a:schemeClr>
+                </a:solidFill>
+                <a:ea typeface="Calibri"/>
+                <a:cs typeface="Calibri"/>
+              </a:rPr>
+              <a:t>Admin</a:t>
+            </a:r>
+            <a:r>
+              <a:rPr lang="hu-HU" sz="2400" dirty="0">
+                <a:solidFill>
+                  <a:schemeClr val="accent4">
+                    <a:lumMod val="75000"/>
+                  </a:schemeClr>
+                </a:solidFill>
+                <a:ea typeface="Calibri"/>
+                <a:cs typeface="Calibri"/>
+              </a:rPr>
+              <a:t> applikáció</a:t>
+            </a:r>
+          </a:p>
+          <a:p>
+            <a:pPr marL="342900" indent="-342900" algn="just">
+              <a:buFont typeface="Calibri"/>
+              <a:buChar char="-"/>
+            </a:pPr>
+            <a:r>
+              <a:rPr lang="hu-HU" sz="2400" dirty="0">
+                <a:solidFill>
+                  <a:schemeClr val="accent4">
+                    <a:lumMod val="75000"/>
+                  </a:schemeClr>
+                </a:solidFill>
+                <a:ea typeface="Calibri"/>
+                <a:cs typeface="Calibri"/>
+              </a:rPr>
+              <a:t>Prezentáció készítés</a:t>
+            </a:r>
+          </a:p>
+          <a:p>
+            <a:pPr marL="342900" indent="-342900" algn="just">
+              <a:buFont typeface="Calibri"/>
+              <a:buChar char="-"/>
+            </a:pPr>
+            <a:r>
+              <a:rPr lang="hu-HU" sz="2400" dirty="0">
+                <a:solidFill>
+                  <a:schemeClr val="accent4">
+                    <a:lumMod val="75000"/>
+                  </a:schemeClr>
+                </a:solidFill>
+                <a:ea typeface="Calibri"/>
+                <a:cs typeface="Calibri"/>
+              </a:rPr>
+              <a:t>Csapat vezérlés</a:t>
+            </a:r>
+          </a:p>
+          <a:p>
+            <a:pPr marL="342900" indent="-342900" algn="just">
+              <a:buFont typeface="Calibri"/>
+              <a:buChar char="-"/>
+            </a:pPr>
+            <a:endParaRPr lang="hu-HU" sz="2400" dirty="0">
+              <a:solidFill>
+                <a:schemeClr val="accent4">
+                  <a:lumMod val="75000"/>
+                </a:schemeClr>
+              </a:solidFill>
+              <a:ea typeface="Calibri"/>
+              <a:cs typeface="Calibri"/>
+            </a:endParaRPr>
+          </a:p>
+        </p:txBody>
+      </p:sp>
+      <p:pic>
+        <p:nvPicPr>
+          <p:cNvPr id="12" name="Kép 11" descr="A képen gyertya látható&#10;&#10;Lehet, hogy az AI által létrehozott tartalom helytelen.">
+            <a:extLst>
+              <a:ext uri="{FF2B5EF4-FFF2-40B4-BE49-F238E27FC236}">
+                <a16:creationId xmlns:a16="http://schemas.microsoft.com/office/drawing/2014/main" id="{4A1C5DB8-BEB6-C5C2-F6B5-6ECB1918809B}"/>
+              </a:ext>
+            </a:extLst>
+          </p:cNvPr>
+          <p:cNvPicPr>
+            <a:picLocks noChangeAspect="1"/>
+          </p:cNvPicPr>
+          <p:nvPr/>
+        </p:nvPicPr>
+        <p:blipFill>
+          <a:blip r:embed="rId2"/>
+          <a:stretch>
+            <a:fillRect/>
+          </a:stretch>
+        </p:blipFill>
+        <p:spPr>
+          <a:xfrm>
+            <a:off x="87751" y="58187"/>
+            <a:ext cx="722857" cy="707199"/>
+          </a:xfrm>
+          <a:prstGeom prst="rect">
+            <a:avLst/>
+          </a:prstGeom>
+        </p:spPr>
+      </p:pic>
+    </p:spTree>
+    <p:extLst>
+      <p:ext uri="{BB962C8B-B14F-4D97-AF65-F5344CB8AC3E}">
+        <p14:creationId xmlns:p14="http://schemas.microsoft.com/office/powerpoint/2010/main" val="1243399125"/>
+      </p:ext>
+    </p:extLst>
+  </p:cSld>
+  <p:clrMapOvr>
+    <a:masterClrMapping/>
+  </p:clrMapOvr>
+  <p:transition spd="med">
+    <p:pull/>
+  </p:transition>
+</p:sld>
+</file>
+
+<file path=ppt/slides/slide20.xml><?xml version="1.0" encoding="utf-8"?>
 <p:sld xmlns:a="http://schemas.openxmlformats.org/drawingml/2006/main" xmlns:r="http://schemas.openxmlformats.org/officeDocument/2006/relationships" xmlns:p="http://schemas.openxmlformats.org/presentationml/2006/main">
   <p:cSld>
     <p:bg>
@@ -8556,7 +10661,7 @@
 </p:sld>
 </file>
 
-<file path=ppt/slides/slide19.xml><?xml version="1.0" encoding="utf-8"?>
+<file path=ppt/slides/slide21.xml><?xml version="1.0" encoding="utf-8"?>
 <p:sld xmlns:a="http://schemas.openxmlformats.org/drawingml/2006/main" xmlns:r="http://schemas.openxmlformats.org/officeDocument/2006/relationships" xmlns:p="http://schemas.openxmlformats.org/presentationml/2006/main">
   <p:cSld>
     <p:bg>
@@ -9115,713 +11220,7 @@
 </p:sld>
 </file>
 
-<file path=ppt/slides/slide2.xml><?xml version="1.0" encoding="utf-8"?>
-<p:sld xmlns:a="http://schemas.openxmlformats.org/drawingml/2006/main" xmlns:r="http://schemas.openxmlformats.org/officeDocument/2006/relationships" xmlns:p="http://schemas.openxmlformats.org/presentationml/2006/main">
-  <p:cSld>
-    <p:bg>
-      <p:bgPr>
-        <a:solidFill>
-          <a:schemeClr val="accent4">
-            <a:lumMod val="20000"/>
-            <a:lumOff val="80000"/>
-          </a:schemeClr>
-        </a:solidFill>
-        <a:effectLst/>
-      </p:bgPr>
-    </p:bg>
-    <p:spTree>
-      <p:nvGrpSpPr>
-        <p:cNvPr id="1" name="">
-          <a:extLst>
-            <a:ext uri="{FF2B5EF4-FFF2-40B4-BE49-F238E27FC236}">
-              <a16:creationId xmlns:a16="http://schemas.microsoft.com/office/drawing/2014/main" id="{ACEA82BF-DF87-C3EB-3C33-71EE012FBF13}"/>
-            </a:ext>
-          </a:extLst>
-        </p:cNvPr>
-        <p:cNvGrpSpPr/>
-        <p:nvPr/>
-      </p:nvGrpSpPr>
-      <p:grpSpPr>
-        <a:xfrm>
-          <a:off x="0" y="0"/>
-          <a:ext cx="0" cy="0"/>
-          <a:chOff x="0" y="0"/>
-          <a:chExt cx="0" cy="0"/>
-        </a:xfrm>
-      </p:grpSpPr>
-      <p:sp>
-        <p:nvSpPr>
-          <p:cNvPr id="4" name="Téglalap 3">
-            <a:extLst>
-              <a:ext uri="{FF2B5EF4-FFF2-40B4-BE49-F238E27FC236}">
-                <a16:creationId xmlns:a16="http://schemas.microsoft.com/office/drawing/2014/main" id="{55751E50-382A-3788-7808-A130F2706FEF}"/>
-              </a:ext>
-            </a:extLst>
-          </p:cNvPr>
-          <p:cNvSpPr/>
-          <p:nvPr/>
-        </p:nvSpPr>
-        <p:spPr>
-          <a:xfrm>
-            <a:off x="0" y="0"/>
-            <a:ext cx="12192000" cy="819150"/>
-          </a:xfrm>
-          <a:prstGeom prst="rect">
-            <a:avLst/>
-          </a:prstGeom>
-          <a:solidFill>
-            <a:schemeClr val="accent1">
-              <a:lumMod val="60000"/>
-              <a:lumOff val="40000"/>
-            </a:schemeClr>
-          </a:solidFill>
-          <a:ln>
-            <a:noFill/>
-          </a:ln>
-        </p:spPr>
-        <p:style>
-          <a:lnRef idx="2">
-            <a:schemeClr val="accent1">
-              <a:shade val="50000"/>
-            </a:schemeClr>
-          </a:lnRef>
-          <a:fillRef idx="1">
-            <a:schemeClr val="accent1"/>
-          </a:fillRef>
-          <a:effectRef idx="0">
-            <a:schemeClr val="accent1"/>
-          </a:effectRef>
-          <a:fontRef idx="minor">
-            <a:schemeClr val="lt1"/>
-          </a:fontRef>
-        </p:style>
-        <p:txBody>
-          <a:bodyPr rtlCol="0" anchor="ctr"/>
-          <a:lstStyle/>
-          <a:p>
-            <a:pPr algn="ctr"/>
-            <a:endParaRPr lang="hu-HU">
-              <a:solidFill>
-                <a:schemeClr val="tx1"/>
-              </a:solidFill>
-            </a:endParaRPr>
-          </a:p>
-        </p:txBody>
-      </p:sp>
-      <p:sp>
-        <p:nvSpPr>
-          <p:cNvPr id="2" name="Szövegdoboz 1">
-            <a:extLst>
-              <a:ext uri="{FF2B5EF4-FFF2-40B4-BE49-F238E27FC236}">
-                <a16:creationId xmlns:a16="http://schemas.microsoft.com/office/drawing/2014/main" id="{59AAEE34-A4BD-81AC-D7B2-01BECE2AC5D7}"/>
-              </a:ext>
-            </a:extLst>
-          </p:cNvPr>
-          <p:cNvSpPr txBox="1"/>
-          <p:nvPr/>
-        </p:nvSpPr>
-        <p:spPr>
-          <a:xfrm>
-            <a:off x="3322060" y="24854"/>
-            <a:ext cx="5547880" cy="769441"/>
-          </a:xfrm>
-          <a:prstGeom prst="rect">
-            <a:avLst/>
-          </a:prstGeom>
-          <a:noFill/>
-        </p:spPr>
-        <p:txBody>
-          <a:bodyPr wrap="square" lIns="91440" tIns="45720" rIns="91440" bIns="45720" rtlCol="0" anchor="t">
-            <a:spAutoFit/>
-          </a:bodyPr>
-          <a:lstStyle/>
-          <a:p>
-            <a:pPr algn="ctr"/>
-            <a:r>
-              <a:rPr lang="hu-HU" sz="4400" b="1" dirty="0">
-                <a:ln w="6350">
-                  <a:solidFill>
-                    <a:schemeClr val="accent1">
-                      <a:lumMod val="75000"/>
-                    </a:schemeClr>
-                  </a:solidFill>
-                </a:ln>
-                <a:solidFill>
-                  <a:schemeClr val="bg1"/>
-                </a:solidFill>
-                <a:latin typeface="Ink Free"/>
-              </a:rPr>
-              <a:t>Csapat Bemutatása</a:t>
-            </a:r>
-            <a:endParaRPr lang="hu-HU" dirty="0">
-              <a:solidFill>
-                <a:schemeClr val="bg1"/>
-              </a:solidFill>
-            </a:endParaRPr>
-          </a:p>
-        </p:txBody>
-      </p:sp>
-      <p:sp>
-        <p:nvSpPr>
-          <p:cNvPr id="6" name="Szövegdoboz 5">
-            <a:extLst>
-              <a:ext uri="{FF2B5EF4-FFF2-40B4-BE49-F238E27FC236}">
-                <a16:creationId xmlns:a16="http://schemas.microsoft.com/office/drawing/2014/main" id="{8C6B2B83-D553-1F50-A09E-E9FDFDDC863A}"/>
-              </a:ext>
-            </a:extLst>
-          </p:cNvPr>
-          <p:cNvSpPr txBox="1"/>
-          <p:nvPr/>
-        </p:nvSpPr>
-        <p:spPr>
-          <a:xfrm>
-            <a:off x="87751" y="1303159"/>
-            <a:ext cx="3433648" cy="2677656"/>
-          </a:xfrm>
-          <a:prstGeom prst="rect">
-            <a:avLst/>
-          </a:prstGeom>
-          <a:noFill/>
-        </p:spPr>
-        <p:txBody>
-          <a:bodyPr wrap="square" lIns="91440" tIns="45720" rIns="91440" bIns="45720" rtlCol="0" anchor="ctr">
-            <a:spAutoFit/>
-          </a:bodyPr>
-          <a:lstStyle/>
-          <a:p>
-            <a:pPr algn="just"/>
-            <a:r>
-              <a:rPr lang="hu-HU" sz="2400" dirty="0">
-                <a:solidFill>
-                  <a:schemeClr val="accent4">
-                    <a:lumMod val="75000"/>
-                  </a:schemeClr>
-                </a:solidFill>
-              </a:rPr>
-              <a:t>Farkas Bence:</a:t>
-            </a:r>
-          </a:p>
-          <a:p>
-            <a:pPr algn="just"/>
-            <a:endParaRPr lang="hu-HU" sz="2400" dirty="0">
-              <a:solidFill>
-                <a:schemeClr val="accent4">
-                  <a:lumMod val="75000"/>
-                </a:schemeClr>
-              </a:solidFill>
-              <a:ea typeface="Calibri" panose="020F0502020204030204"/>
-              <a:cs typeface="Calibri" panose="020F0502020204030204"/>
-            </a:endParaRPr>
-          </a:p>
-          <a:p>
-            <a:pPr marL="342900" indent="-342900" algn="just">
-              <a:buFont typeface="Calibri"/>
-              <a:buChar char="-"/>
-            </a:pPr>
-            <a:r>
-              <a:rPr lang="hu-HU" sz="2400" dirty="0">
-                <a:solidFill>
-                  <a:schemeClr val="accent4">
-                    <a:lumMod val="75000"/>
-                  </a:schemeClr>
-                </a:solidFill>
-                <a:ea typeface="Calibri" panose="020F0502020204030204"/>
-                <a:cs typeface="Calibri" panose="020F0502020204030204"/>
-              </a:rPr>
-              <a:t>Frontend fejlesztés</a:t>
-            </a:r>
-          </a:p>
-          <a:p>
-            <a:pPr marL="342900" indent="-342900" algn="just">
-              <a:buFont typeface="Calibri"/>
-              <a:buChar char="-"/>
-            </a:pPr>
-            <a:r>
-              <a:rPr lang="hu-HU" sz="2400" dirty="0">
-                <a:solidFill>
-                  <a:schemeClr val="accent4">
-                    <a:lumMod val="75000"/>
-                  </a:schemeClr>
-                </a:solidFill>
-                <a:ea typeface="Calibri" panose="020F0502020204030204"/>
-                <a:cs typeface="Calibri" panose="020F0502020204030204"/>
-              </a:rPr>
-              <a:t>Dokumentáció készítés</a:t>
-            </a:r>
-          </a:p>
-          <a:p>
-            <a:pPr marL="342900" indent="-342900" algn="just">
-              <a:buFont typeface="Calibri"/>
-              <a:buChar char="-"/>
-            </a:pPr>
-            <a:r>
-              <a:rPr lang="hu-HU" sz="2400" dirty="0">
-                <a:solidFill>
-                  <a:schemeClr val="accent4">
-                    <a:lumMod val="75000"/>
-                  </a:schemeClr>
-                </a:solidFill>
-                <a:ea typeface="Calibri" panose="020F0502020204030204"/>
-                <a:cs typeface="Calibri" panose="020F0502020204030204"/>
-              </a:rPr>
-              <a:t>Prezentáció készítés</a:t>
-            </a:r>
-          </a:p>
-          <a:p>
-            <a:pPr marL="342900" indent="-342900" algn="just">
-              <a:buFont typeface="Calibri"/>
-              <a:buChar char="-"/>
-            </a:pPr>
-            <a:r>
-              <a:rPr lang="hu-HU" sz="2400" dirty="0">
-                <a:solidFill>
-                  <a:schemeClr val="accent4">
-                    <a:lumMod val="75000"/>
-                  </a:schemeClr>
-                </a:solidFill>
-                <a:ea typeface="Calibri" panose="020F0502020204030204"/>
-                <a:cs typeface="Calibri" panose="020F0502020204030204"/>
-              </a:rPr>
-              <a:t>Kép/logó szerkesztés</a:t>
-            </a:r>
-          </a:p>
-          <a:p>
-            <a:pPr marL="342900" indent="-342900" algn="just">
-              <a:buFont typeface="Calibri"/>
-              <a:buChar char="-"/>
-            </a:pPr>
-            <a:r>
-              <a:rPr lang="hu-HU" sz="2400" dirty="0">
-                <a:solidFill>
-                  <a:schemeClr val="accent4">
-                    <a:lumMod val="75000"/>
-                  </a:schemeClr>
-                </a:solidFill>
-                <a:ea typeface="Calibri" panose="020F0502020204030204"/>
-                <a:cs typeface="Calibri" panose="020F0502020204030204"/>
-              </a:rPr>
-              <a:t>Csapat vezérlés</a:t>
-            </a:r>
-          </a:p>
-        </p:txBody>
-      </p:sp>
-      <p:sp>
-        <p:nvSpPr>
-          <p:cNvPr id="5" name="Szövegdoboz 4">
-            <a:extLst>
-              <a:ext uri="{FF2B5EF4-FFF2-40B4-BE49-F238E27FC236}">
-                <a16:creationId xmlns:a16="http://schemas.microsoft.com/office/drawing/2014/main" id="{A9CC54BC-8EB1-B4DD-25E2-9C717D5E9422}"/>
-              </a:ext>
-            </a:extLst>
-          </p:cNvPr>
-          <p:cNvSpPr txBox="1"/>
-          <p:nvPr/>
-        </p:nvSpPr>
-        <p:spPr>
-          <a:xfrm>
-            <a:off x="4384395" y="1259657"/>
-            <a:ext cx="3423210" cy="3416320"/>
-          </a:xfrm>
-          <a:prstGeom prst="rect">
-            <a:avLst/>
-          </a:prstGeom>
-          <a:noFill/>
-        </p:spPr>
-        <p:txBody>
-          <a:bodyPr wrap="square" lIns="91440" tIns="45720" rIns="91440" bIns="45720" rtlCol="0" anchor="ctr">
-            <a:spAutoFit/>
-          </a:bodyPr>
-          <a:lstStyle/>
-          <a:p>
-            <a:pPr algn="just"/>
-            <a:r>
-              <a:rPr lang="hu-HU" sz="2400" dirty="0">
-                <a:solidFill>
-                  <a:schemeClr val="accent4">
-                    <a:lumMod val="75000"/>
-                  </a:schemeClr>
-                </a:solidFill>
-              </a:rPr>
-              <a:t>Pálosi András:</a:t>
-            </a:r>
-          </a:p>
-          <a:p>
-            <a:pPr algn="just"/>
-            <a:endParaRPr lang="hu-HU" sz="2400" dirty="0">
-              <a:solidFill>
-                <a:schemeClr val="accent4">
-                  <a:lumMod val="75000"/>
-                </a:schemeClr>
-              </a:solidFill>
-              <a:ea typeface="Calibri"/>
-              <a:cs typeface="Calibri"/>
-            </a:endParaRPr>
-          </a:p>
-          <a:p>
-            <a:pPr marL="342900" indent="-342900" algn="just">
-              <a:buFont typeface="Calibri"/>
-              <a:buChar char="-"/>
-            </a:pPr>
-            <a:r>
-              <a:rPr lang="hu-HU" sz="2400" dirty="0">
-                <a:solidFill>
-                  <a:schemeClr val="accent4">
-                    <a:lumMod val="75000"/>
-                  </a:schemeClr>
-                </a:solidFill>
-                <a:ea typeface="Calibri"/>
-                <a:cs typeface="Calibri"/>
-              </a:rPr>
-              <a:t>Adatbázis fejlesztés</a:t>
-            </a:r>
-          </a:p>
-          <a:p>
-            <a:pPr marL="342900" indent="-342900" algn="just">
-              <a:buFont typeface="Calibri"/>
-              <a:buChar char="-"/>
-            </a:pPr>
-            <a:r>
-              <a:rPr lang="hu-HU" sz="2400" dirty="0">
-                <a:solidFill>
-                  <a:schemeClr val="accent4">
-                    <a:lumMod val="75000"/>
-                  </a:schemeClr>
-                </a:solidFill>
-                <a:ea typeface="Calibri"/>
-                <a:cs typeface="Calibri"/>
-              </a:rPr>
-              <a:t>Frontend fejlesztés</a:t>
-            </a:r>
-          </a:p>
-          <a:p>
-            <a:pPr marL="342900" indent="-342900" algn="just">
-              <a:buFont typeface="Calibri"/>
-              <a:buChar char="-"/>
-            </a:pPr>
-            <a:r>
-              <a:rPr lang="hu-HU" sz="2400" dirty="0">
-                <a:solidFill>
-                  <a:schemeClr val="accent4">
-                    <a:lumMod val="75000"/>
-                  </a:schemeClr>
-                </a:solidFill>
-                <a:ea typeface="Calibri"/>
-                <a:cs typeface="Calibri"/>
-              </a:rPr>
-              <a:t>Backend fejlesztés</a:t>
-            </a:r>
-          </a:p>
-          <a:p>
-            <a:pPr marL="342900" indent="-342900" algn="just">
-              <a:buFont typeface="Calibri"/>
-              <a:buChar char="-"/>
-            </a:pPr>
-            <a:r>
-              <a:rPr lang="hu-HU" sz="2400" dirty="0">
-                <a:solidFill>
-                  <a:schemeClr val="accent4">
-                    <a:lumMod val="75000"/>
-                  </a:schemeClr>
-                </a:solidFill>
-                <a:ea typeface="Calibri"/>
-                <a:cs typeface="Calibri"/>
-              </a:rPr>
-              <a:t>Prezentáció készítés</a:t>
-            </a:r>
-          </a:p>
-          <a:p>
-            <a:pPr marL="342900" indent="-342900" algn="just">
-              <a:buFont typeface="Calibri"/>
-              <a:buChar char="-"/>
-            </a:pPr>
-            <a:r>
-              <a:rPr lang="hu-HU" sz="2400" dirty="0">
-                <a:solidFill>
-                  <a:schemeClr val="accent4">
-                    <a:lumMod val="75000"/>
-                  </a:schemeClr>
-                </a:solidFill>
-                <a:ea typeface="Calibri"/>
-                <a:cs typeface="Calibri"/>
-              </a:rPr>
-              <a:t>Dokumentáció készítés</a:t>
-            </a:r>
-          </a:p>
-          <a:p>
-            <a:pPr marL="342900" indent="-342900" algn="just">
-              <a:buFont typeface="Calibri"/>
-              <a:buChar char="-"/>
-            </a:pPr>
-            <a:r>
-              <a:rPr lang="hu-HU" sz="2400" dirty="0">
-                <a:solidFill>
-                  <a:schemeClr val="accent4">
-                    <a:lumMod val="75000"/>
-                  </a:schemeClr>
-                </a:solidFill>
-                <a:ea typeface="Calibri"/>
-                <a:cs typeface="Calibri"/>
-              </a:rPr>
-              <a:t>Tesztelés</a:t>
-            </a:r>
-          </a:p>
-          <a:p>
-            <a:pPr marL="342900" indent="-342900" algn="just">
-              <a:buFont typeface="Calibri"/>
-              <a:buChar char="-"/>
-            </a:pPr>
-            <a:r>
-              <a:rPr lang="hu-HU" sz="2400" dirty="0">
-                <a:solidFill>
-                  <a:schemeClr val="accent4">
-                    <a:lumMod val="75000"/>
-                  </a:schemeClr>
-                </a:solidFill>
-                <a:ea typeface="Calibri"/>
-                <a:cs typeface="Calibri"/>
-              </a:rPr>
-              <a:t>Csapat vezérlés</a:t>
-            </a:r>
-            <a:endParaRPr lang="hu-HU" dirty="0">
-              <a:solidFill>
-                <a:schemeClr val="accent4">
-                  <a:lumMod val="75000"/>
-                </a:schemeClr>
-              </a:solidFill>
-            </a:endParaRPr>
-          </a:p>
-        </p:txBody>
-      </p:sp>
-      <p:sp>
-        <p:nvSpPr>
-          <p:cNvPr id="7" name="Szövegdoboz 6">
-            <a:extLst>
-              <a:ext uri="{FF2B5EF4-FFF2-40B4-BE49-F238E27FC236}">
-                <a16:creationId xmlns:a16="http://schemas.microsoft.com/office/drawing/2014/main" id="{9CD0A707-E39F-39DD-669F-A8B108C69320}"/>
-              </a:ext>
-            </a:extLst>
-          </p:cNvPr>
-          <p:cNvSpPr txBox="1"/>
-          <p:nvPr/>
-        </p:nvSpPr>
-        <p:spPr>
-          <a:xfrm>
-            <a:off x="8670601" y="1259657"/>
-            <a:ext cx="3611100" cy="3046988"/>
-          </a:xfrm>
-          <a:prstGeom prst="rect">
-            <a:avLst/>
-          </a:prstGeom>
-          <a:noFill/>
-        </p:spPr>
-        <p:txBody>
-          <a:bodyPr wrap="square" lIns="91440" tIns="45720" rIns="91440" bIns="45720" rtlCol="0" anchor="ctr">
-            <a:spAutoFit/>
-          </a:bodyPr>
-          <a:lstStyle/>
-          <a:p>
-            <a:pPr algn="just"/>
-            <a:r>
-              <a:rPr lang="hu-HU" sz="2400" dirty="0">
-                <a:solidFill>
-                  <a:schemeClr val="accent4">
-                    <a:lumMod val="75000"/>
-                  </a:schemeClr>
-                </a:solidFill>
-              </a:rPr>
-              <a:t>Pongrácz Gábor:</a:t>
-            </a:r>
-          </a:p>
-          <a:p>
-            <a:pPr algn="just"/>
-            <a:endParaRPr lang="hu-HU" sz="2400" dirty="0">
-              <a:solidFill>
-                <a:schemeClr val="accent4">
-                  <a:lumMod val="75000"/>
-                </a:schemeClr>
-              </a:solidFill>
-              <a:ea typeface="Calibri"/>
-              <a:cs typeface="Calibri"/>
-            </a:endParaRPr>
-          </a:p>
-          <a:p>
-            <a:pPr marL="342900" indent="-342900" algn="just">
-              <a:buFont typeface="Calibri"/>
-              <a:buChar char="-"/>
-            </a:pPr>
-            <a:r>
-              <a:rPr lang="hu-HU" sz="2400" dirty="0">
-                <a:solidFill>
-                  <a:schemeClr val="accent4">
-                    <a:lumMod val="75000"/>
-                  </a:schemeClr>
-                </a:solidFill>
-                <a:ea typeface="Calibri"/>
-                <a:cs typeface="Calibri"/>
-              </a:rPr>
-              <a:t>Adatbázis fejlesztés</a:t>
-            </a:r>
-          </a:p>
-          <a:p>
-            <a:pPr marL="342900" indent="-342900" algn="just">
-              <a:buFont typeface="Calibri"/>
-              <a:buChar char="-"/>
-            </a:pPr>
-            <a:r>
-              <a:rPr lang="hu-HU" sz="2400" dirty="0">
-                <a:solidFill>
-                  <a:schemeClr val="accent4">
-                    <a:lumMod val="75000"/>
-                  </a:schemeClr>
-                </a:solidFill>
-                <a:ea typeface="Calibri"/>
-                <a:cs typeface="Calibri"/>
-              </a:rPr>
-              <a:t>Backend fejlesztés</a:t>
-            </a:r>
-          </a:p>
-          <a:p>
-            <a:pPr marL="342900" indent="-342900" algn="just">
-              <a:buFont typeface="Calibri"/>
-              <a:buChar char="-"/>
-            </a:pPr>
-            <a:r>
-              <a:rPr lang="hu-HU" sz="2400" dirty="0">
-                <a:solidFill>
-                  <a:schemeClr val="accent4">
-                    <a:lumMod val="75000"/>
-                  </a:schemeClr>
-                </a:solidFill>
-                <a:ea typeface="Calibri"/>
-                <a:cs typeface="Calibri"/>
-              </a:rPr>
-              <a:t>WPF </a:t>
-            </a:r>
-            <a:r>
-              <a:rPr lang="hu-HU" sz="2400" dirty="0" err="1">
-                <a:solidFill>
-                  <a:schemeClr val="accent4">
-                    <a:lumMod val="75000"/>
-                  </a:schemeClr>
-                </a:solidFill>
-                <a:ea typeface="Calibri"/>
-                <a:cs typeface="Calibri"/>
-              </a:rPr>
-              <a:t>Admin</a:t>
-            </a:r>
-            <a:r>
-              <a:rPr lang="hu-HU" sz="2400" dirty="0">
-                <a:solidFill>
-                  <a:schemeClr val="accent4">
-                    <a:lumMod val="75000"/>
-                  </a:schemeClr>
-                </a:solidFill>
-                <a:ea typeface="Calibri"/>
-                <a:cs typeface="Calibri"/>
-              </a:rPr>
-              <a:t> applikáció</a:t>
-            </a:r>
-          </a:p>
-          <a:p>
-            <a:pPr marL="342900" indent="-342900" algn="just">
-              <a:buFont typeface="Calibri"/>
-              <a:buChar char="-"/>
-            </a:pPr>
-            <a:r>
-              <a:rPr lang="hu-HU" sz="2400" dirty="0">
-                <a:solidFill>
-                  <a:schemeClr val="accent4">
-                    <a:lumMod val="75000"/>
-                  </a:schemeClr>
-                </a:solidFill>
-                <a:ea typeface="Calibri"/>
-                <a:cs typeface="Calibri"/>
-              </a:rPr>
-              <a:t>Prezentáció készítés</a:t>
-            </a:r>
-          </a:p>
-          <a:p>
-            <a:pPr marL="342900" indent="-342900" algn="just">
-              <a:buFont typeface="Calibri"/>
-              <a:buChar char="-"/>
-            </a:pPr>
-            <a:r>
-              <a:rPr lang="hu-HU" sz="2400" dirty="0">
-                <a:solidFill>
-                  <a:schemeClr val="accent4">
-                    <a:lumMod val="75000"/>
-                  </a:schemeClr>
-                </a:solidFill>
-                <a:ea typeface="Calibri"/>
-                <a:cs typeface="Calibri"/>
-              </a:rPr>
-              <a:t>Csapat vezérlés</a:t>
-            </a:r>
-          </a:p>
-          <a:p>
-            <a:pPr marL="342900" indent="-342900" algn="just">
-              <a:buFont typeface="Calibri"/>
-              <a:buChar char="-"/>
-            </a:pPr>
-            <a:endParaRPr lang="hu-HU" sz="2400" dirty="0">
-              <a:solidFill>
-                <a:schemeClr val="accent4">
-                  <a:lumMod val="75000"/>
-                </a:schemeClr>
-              </a:solidFill>
-              <a:ea typeface="Calibri"/>
-              <a:cs typeface="Calibri"/>
-            </a:endParaRPr>
-          </a:p>
-        </p:txBody>
-      </p:sp>
-      <p:pic>
-        <p:nvPicPr>
-          <p:cNvPr id="12" name="Kép 11" descr="A képen gyertya látható&#10;&#10;Lehet, hogy az AI által létrehozott tartalom helytelen.">
-            <a:extLst>
-              <a:ext uri="{FF2B5EF4-FFF2-40B4-BE49-F238E27FC236}">
-                <a16:creationId xmlns:a16="http://schemas.microsoft.com/office/drawing/2014/main" id="{4A1C5DB8-BEB6-C5C2-F6B5-6ECB1918809B}"/>
-              </a:ext>
-            </a:extLst>
-          </p:cNvPr>
-          <p:cNvPicPr>
-            <a:picLocks noChangeAspect="1"/>
-          </p:cNvPicPr>
-          <p:nvPr/>
-        </p:nvPicPr>
-        <p:blipFill>
-          <a:blip r:embed="rId2"/>
-          <a:stretch>
-            <a:fillRect/>
-          </a:stretch>
-        </p:blipFill>
-        <p:spPr>
-          <a:xfrm>
-            <a:off x="87751" y="58187"/>
-            <a:ext cx="722857" cy="707199"/>
-          </a:xfrm>
-          <a:prstGeom prst="rect">
-            <a:avLst/>
-          </a:prstGeom>
-        </p:spPr>
-      </p:pic>
-    </p:spTree>
-    <p:extLst>
-      <p:ext uri="{BB962C8B-B14F-4D97-AF65-F5344CB8AC3E}">
-        <p14:creationId xmlns:p14="http://schemas.microsoft.com/office/powerpoint/2010/main" val="1243399125"/>
-      </p:ext>
-    </p:extLst>
-  </p:cSld>
-  <p:clrMapOvr>
-    <a:masterClrMapping/>
-  </p:clrMapOvr>
-  <p:transition spd="med">
-    <p:pull/>
-  </p:transition>
-</p:sld>
-</file>
-
-<file path=ppt/slides/slide20.xml><?xml version="1.0" encoding="utf-8"?>
+<file path=ppt/slides/slide22.xml><?xml version="1.0" encoding="utf-8"?>
 <p:sld xmlns:a="http://schemas.openxmlformats.org/drawingml/2006/main" xmlns:r="http://schemas.openxmlformats.org/officeDocument/2006/relationships" xmlns:p="http://schemas.openxmlformats.org/presentationml/2006/main">
   <p:cSld>
     <p:bg>
@@ -10261,7 +11660,7 @@
 </p:sld>
 </file>
 
-<file path=ppt/slides/slide21.xml><?xml version="1.0" encoding="utf-8"?>
+<file path=ppt/slides/slide23.xml><?xml version="1.0" encoding="utf-8"?>
 <p:sld xmlns:a="http://schemas.openxmlformats.org/drawingml/2006/main" xmlns:r="http://schemas.openxmlformats.org/officeDocument/2006/relationships" xmlns:p="http://schemas.openxmlformats.org/presentationml/2006/main">
   <p:cSld>
     <p:bg>
@@ -10709,7 +12108,7 @@
 </p:sld>
 </file>
 
-<file path=ppt/slides/slide22.xml><?xml version="1.0" encoding="utf-8"?>
+<file path=ppt/slides/slide24.xml><?xml version="1.0" encoding="utf-8"?>
 <p:sld xmlns:a="http://schemas.openxmlformats.org/drawingml/2006/main" xmlns:r="http://schemas.openxmlformats.org/officeDocument/2006/relationships" xmlns:p="http://schemas.openxmlformats.org/presentationml/2006/main">
   <p:cSld>
     <p:bg>
@@ -10925,7 +12324,7 @@
 </p:sld>
 </file>
 
-<file path=ppt/slides/slide23.xml><?xml version="1.0" encoding="utf-8"?>
+<file path=ppt/slides/slide25.xml><?xml version="1.0" encoding="utf-8"?>
 <p:sld xmlns:a="http://schemas.openxmlformats.org/drawingml/2006/main" xmlns:r="http://schemas.openxmlformats.org/officeDocument/2006/relationships" xmlns:p="http://schemas.openxmlformats.org/presentationml/2006/main">
   <p:cSld>
     <p:bg>
@@ -11475,7 +12874,7 @@
 </p:sld>
 </file>
 
-<file path=ppt/slides/slide24.xml><?xml version="1.0" encoding="utf-8"?>
+<file path=ppt/slides/slide26.xml><?xml version="1.0" encoding="utf-8"?>
 <p:sld xmlns:a="http://schemas.openxmlformats.org/drawingml/2006/main" xmlns:r="http://schemas.openxmlformats.org/officeDocument/2006/relationships" xmlns:p="http://schemas.openxmlformats.org/presentationml/2006/main">
   <p:cSld>
     <p:bg>
@@ -12112,7 +13511,7 @@
 </p:sld>
 </file>
 
-<file path=ppt/slides/slide25.xml><?xml version="1.0" encoding="utf-8"?>
+<file path=ppt/slides/slide27.xml><?xml version="1.0" encoding="utf-8"?>
 <p:sld xmlns:a="http://schemas.openxmlformats.org/drawingml/2006/main" xmlns:r="http://schemas.openxmlformats.org/officeDocument/2006/relationships" xmlns:p="http://schemas.openxmlformats.org/presentationml/2006/main">
   <p:cSld>
     <p:bg>
@@ -12766,7 +14165,7 @@
 </p:sld>
 </file>
 
-<file path=ppt/slides/slide26.xml><?xml version="1.0" encoding="utf-8"?>
+<file path=ppt/slides/slide28.xml><?xml version="1.0" encoding="utf-8"?>
 <p:sld xmlns:a="http://schemas.openxmlformats.org/drawingml/2006/main" xmlns:r="http://schemas.openxmlformats.org/officeDocument/2006/relationships" xmlns:p="http://schemas.openxmlformats.org/presentationml/2006/main">
   <p:cSld>
     <p:bg>
@@ -13175,7 +14574,7 @@
 </p:sld>
 </file>
 
-<file path=ppt/slides/slide27.xml><?xml version="1.0" encoding="utf-8"?>
+<file path=ppt/slides/slide29.xml><?xml version="1.0" encoding="utf-8"?>
 <p:sld xmlns:a="http://schemas.openxmlformats.org/drawingml/2006/main" xmlns:r="http://schemas.openxmlformats.org/officeDocument/2006/relationships" xmlns:p="http://schemas.openxmlformats.org/presentationml/2006/main">
   <p:cSld>
     <p:bg>
@@ -14052,6 +15451,229 @@
     <p:extLst>
       <p:ext uri="{BB962C8B-B14F-4D97-AF65-F5344CB8AC3E}">
         <p14:creationId xmlns:p14="http://schemas.microsoft.com/office/powerpoint/2010/main" val="2490134746"/>
+      </p:ext>
+    </p:extLst>
+  </p:cSld>
+  <p:clrMapOvr>
+    <a:masterClrMapping/>
+  </p:clrMapOvr>
+  <p:transition spd="med">
+    <p:pull/>
+  </p:transition>
+</p:sld>
+</file>
+
+<file path=ppt/slides/slide30.xml><?xml version="1.0" encoding="utf-8"?>
+<p:sld xmlns:a="http://schemas.openxmlformats.org/drawingml/2006/main" xmlns:r="http://schemas.openxmlformats.org/officeDocument/2006/relationships" xmlns:p="http://schemas.openxmlformats.org/presentationml/2006/main">
+  <p:cSld>
+    <p:bg>
+      <p:bgPr>
+        <a:solidFill>
+          <a:schemeClr val="accent4">
+            <a:lumMod val="20000"/>
+            <a:lumOff val="80000"/>
+          </a:schemeClr>
+        </a:solidFill>
+        <a:effectLst/>
+      </p:bgPr>
+    </p:bg>
+    <p:spTree>
+      <p:nvGrpSpPr>
+        <p:cNvPr id="1" name="">
+          <a:extLst>
+            <a:ext uri="{FF2B5EF4-FFF2-40B4-BE49-F238E27FC236}">
+              <a16:creationId xmlns:a16="http://schemas.microsoft.com/office/drawing/2014/main" id="{E16657FB-E914-0BD8-241A-425FA2DDD351}"/>
+            </a:ext>
+          </a:extLst>
+        </p:cNvPr>
+        <p:cNvGrpSpPr/>
+        <p:nvPr/>
+      </p:nvGrpSpPr>
+      <p:grpSpPr>
+        <a:xfrm>
+          <a:off x="0" y="0"/>
+          <a:ext cx="0" cy="0"/>
+          <a:chOff x="0" y="0"/>
+          <a:chExt cx="0" cy="0"/>
+        </a:xfrm>
+      </p:grpSpPr>
+      <p:sp>
+        <p:nvSpPr>
+          <p:cNvPr id="4" name="Téglalap 3">
+            <a:extLst>
+              <a:ext uri="{FF2B5EF4-FFF2-40B4-BE49-F238E27FC236}">
+                <a16:creationId xmlns:a16="http://schemas.microsoft.com/office/drawing/2014/main" id="{8954174F-1ECB-C531-91CA-330F0694812F}"/>
+              </a:ext>
+            </a:extLst>
+          </p:cNvPr>
+          <p:cNvSpPr/>
+          <p:nvPr/>
+        </p:nvSpPr>
+        <p:spPr>
+          <a:xfrm>
+            <a:off x="0" y="0"/>
+            <a:ext cx="12192000" cy="819150"/>
+          </a:xfrm>
+          <a:prstGeom prst="rect">
+            <a:avLst/>
+          </a:prstGeom>
+          <a:solidFill>
+            <a:schemeClr val="accent1">
+              <a:lumMod val="60000"/>
+              <a:lumOff val="40000"/>
+            </a:schemeClr>
+          </a:solidFill>
+          <a:ln>
+            <a:noFill/>
+          </a:ln>
+        </p:spPr>
+        <p:style>
+          <a:lnRef idx="2">
+            <a:schemeClr val="accent1">
+              <a:shade val="50000"/>
+            </a:schemeClr>
+          </a:lnRef>
+          <a:fillRef idx="1">
+            <a:schemeClr val="accent1"/>
+          </a:fillRef>
+          <a:effectRef idx="0">
+            <a:schemeClr val="accent1"/>
+          </a:effectRef>
+          <a:fontRef idx="minor">
+            <a:schemeClr val="lt1"/>
+          </a:fontRef>
+        </p:style>
+        <p:txBody>
+          <a:bodyPr rtlCol="0" anchor="ctr"/>
+          <a:lstStyle/>
+          <a:p>
+            <a:pPr algn="ctr"/>
+            <a:endParaRPr lang="hu-HU">
+              <a:solidFill>
+                <a:schemeClr val="tx1"/>
+              </a:solidFill>
+            </a:endParaRPr>
+          </a:p>
+        </p:txBody>
+      </p:sp>
+      <p:pic>
+        <p:nvPicPr>
+          <p:cNvPr id="14" name="Kép 13" descr="A képen gyertya látható&#10;&#10;Lehet, hogy az AI által létrehozott tartalom helytelen.">
+            <a:extLst>
+              <a:ext uri="{FF2B5EF4-FFF2-40B4-BE49-F238E27FC236}">
+                <a16:creationId xmlns:a16="http://schemas.microsoft.com/office/drawing/2014/main" id="{AF240267-F5DC-4808-E9BD-C2C799C1699B}"/>
+              </a:ext>
+            </a:extLst>
+          </p:cNvPr>
+          <p:cNvPicPr>
+            <a:picLocks noChangeAspect="1"/>
+          </p:cNvPicPr>
+          <p:nvPr/>
+        </p:nvPicPr>
+        <p:blipFill>
+          <a:blip r:embed="rId2"/>
+          <a:stretch>
+            <a:fillRect/>
+          </a:stretch>
+        </p:blipFill>
+        <p:spPr>
+          <a:xfrm>
+            <a:off x="87751" y="58187"/>
+            <a:ext cx="722857" cy="707199"/>
+          </a:xfrm>
+          <a:prstGeom prst="rect">
+            <a:avLst/>
+          </a:prstGeom>
+        </p:spPr>
+      </p:pic>
+      <p:sp>
+        <p:nvSpPr>
+          <p:cNvPr id="12" name="Szövegdoboz 11">
+            <a:extLst>
+              <a:ext uri="{FF2B5EF4-FFF2-40B4-BE49-F238E27FC236}">
+                <a16:creationId xmlns:a16="http://schemas.microsoft.com/office/drawing/2014/main" id="{C9275FDE-A41B-401C-B814-BF30E7E93E85}"/>
+              </a:ext>
+            </a:extLst>
+          </p:cNvPr>
+          <p:cNvSpPr txBox="1"/>
+          <p:nvPr/>
+        </p:nvSpPr>
+        <p:spPr>
+          <a:xfrm>
+            <a:off x="3048778" y="3244334"/>
+            <a:ext cx="6097554" cy="369332"/>
+          </a:xfrm>
+          <a:prstGeom prst="rect">
+            <a:avLst/>
+          </a:prstGeom>
+          <a:noFill/>
+        </p:spPr>
+        <p:txBody>
+          <a:bodyPr wrap="square">
+            <a:spAutoFit/>
+          </a:bodyPr>
+          <a:lstStyle/>
+          <a:p>
+            <a:r>
+              <a:rPr lang="hu-HU" b="0" i="0" dirty="0">
+                <a:solidFill>
+                  <a:srgbClr val="000000"/>
+                </a:solidFill>
+                <a:effectLst/>
+                <a:latin typeface="Times New Roman" panose="02020603050405020304" pitchFamily="18" charset="0"/>
+              </a:rPr>
+              <a:t> </a:t>
+            </a:r>
+            <a:endParaRPr lang="hu-HU" dirty="0"/>
+          </a:p>
+        </p:txBody>
+      </p:sp>
+      <p:sp>
+        <p:nvSpPr>
+          <p:cNvPr id="20" name="Szövegdoboz 19">
+            <a:extLst>
+              <a:ext uri="{FF2B5EF4-FFF2-40B4-BE49-F238E27FC236}">
+                <a16:creationId xmlns:a16="http://schemas.microsoft.com/office/drawing/2014/main" id="{83A30A70-7B63-44B5-9414-F6588F24C0A8}"/>
+              </a:ext>
+            </a:extLst>
+          </p:cNvPr>
+          <p:cNvSpPr txBox="1"/>
+          <p:nvPr/>
+        </p:nvSpPr>
+        <p:spPr>
+          <a:xfrm>
+            <a:off x="3574390" y="2890391"/>
+            <a:ext cx="5043219" cy="707886"/>
+          </a:xfrm>
+          <a:prstGeom prst="rect">
+            <a:avLst/>
+          </a:prstGeom>
+          <a:noFill/>
+        </p:spPr>
+        <p:txBody>
+          <a:bodyPr wrap="square">
+            <a:spAutoFit/>
+          </a:bodyPr>
+          <a:lstStyle/>
+          <a:p>
+            <a:r>
+              <a:rPr lang="hu-HU" sz="4000" b="1" i="0" u="none" strike="noStrike" dirty="0">
+                <a:solidFill>
+                  <a:srgbClr val="BF9000"/>
+                </a:solidFill>
+                <a:effectLst/>
+                <a:latin typeface="Calibri" panose="020F0502020204030204" pitchFamily="34" charset="0"/>
+              </a:rPr>
+              <a:t>Köszönjük a figyelmet!</a:t>
+            </a:r>
+            <a:endParaRPr lang="hu-HU" sz="4000" b="1" dirty="0"/>
+          </a:p>
+        </p:txBody>
+      </p:sp>
+    </p:spTree>
+    <p:extLst>
+      <p:ext uri="{BB962C8B-B14F-4D97-AF65-F5344CB8AC3E}">
+        <p14:creationId xmlns:p14="http://schemas.microsoft.com/office/powerpoint/2010/main" val="3159789707"/>
       </p:ext>
     </p:extLst>
   </p:cSld>

--- a/DózsaCsárda_PA_FB_PG.pptx
+++ b/DózsaCsárda_PA_FB_PG.pptx
@@ -838,7 +838,7 @@
           <a:p>
             <a:fld id="{1F6FFA99-551E-45B4-8370-7EE47DE7A2D9}" type="datetimeFigureOut">
               <a:rPr lang="hu-HU" smtClean="0"/>
-              <a:t>2026.03.05.</a:t>
+              <a:t>2026.03.09.</a:t>
             </a:fld>
             <a:endParaRPr lang="hu-HU"/>
           </a:p>
@@ -1318,7 +1318,7 @@
           <a:p>
             <a:fld id="{DB0193E8-478D-464D-8400-8CD4306FD776}" type="datetimeFigureOut">
               <a:rPr lang="hu-HU" smtClean="0"/>
-              <a:t>2026.03.05.</a:t>
+              <a:t>2026.03.09.</a:t>
             </a:fld>
             <a:endParaRPr lang="hu-HU"/>
           </a:p>
@@ -1486,7 +1486,7 @@
           <a:p>
             <a:fld id="{DB0193E8-478D-464D-8400-8CD4306FD776}" type="datetimeFigureOut">
               <a:rPr lang="hu-HU" smtClean="0"/>
-              <a:t>2026.03.05.</a:t>
+              <a:t>2026.03.09.</a:t>
             </a:fld>
             <a:endParaRPr lang="hu-HU"/>
           </a:p>
@@ -1664,7 +1664,7 @@
           <a:p>
             <a:fld id="{DB0193E8-478D-464D-8400-8CD4306FD776}" type="datetimeFigureOut">
               <a:rPr lang="hu-HU" smtClean="0"/>
-              <a:t>2026.03.05.</a:t>
+              <a:t>2026.03.09.</a:t>
             </a:fld>
             <a:endParaRPr lang="hu-HU"/>
           </a:p>
@@ -1832,7 +1832,7 @@
           <a:p>
             <a:fld id="{DB0193E8-478D-464D-8400-8CD4306FD776}" type="datetimeFigureOut">
               <a:rPr lang="hu-HU" smtClean="0"/>
-              <a:t>2026.03.05.</a:t>
+              <a:t>2026.03.09.</a:t>
             </a:fld>
             <a:endParaRPr lang="hu-HU"/>
           </a:p>
@@ -2077,7 +2077,7 @@
           <a:p>
             <a:fld id="{DB0193E8-478D-464D-8400-8CD4306FD776}" type="datetimeFigureOut">
               <a:rPr lang="hu-HU" smtClean="0"/>
-              <a:t>2026.03.05.</a:t>
+              <a:t>2026.03.09.</a:t>
             </a:fld>
             <a:endParaRPr lang="hu-HU"/>
           </a:p>
@@ -2306,7 +2306,7 @@
           <a:p>
             <a:fld id="{DB0193E8-478D-464D-8400-8CD4306FD776}" type="datetimeFigureOut">
               <a:rPr lang="hu-HU" smtClean="0"/>
-              <a:t>2026.03.05.</a:t>
+              <a:t>2026.03.09.</a:t>
             </a:fld>
             <a:endParaRPr lang="hu-HU"/>
           </a:p>
@@ -2670,7 +2670,7 @@
           <a:p>
             <a:fld id="{DB0193E8-478D-464D-8400-8CD4306FD776}" type="datetimeFigureOut">
               <a:rPr lang="hu-HU" smtClean="0"/>
-              <a:t>2026.03.05.</a:t>
+              <a:t>2026.03.09.</a:t>
             </a:fld>
             <a:endParaRPr lang="hu-HU"/>
           </a:p>
@@ -2787,7 +2787,7 @@
           <a:p>
             <a:fld id="{DB0193E8-478D-464D-8400-8CD4306FD776}" type="datetimeFigureOut">
               <a:rPr lang="hu-HU" smtClean="0"/>
-              <a:t>2026.03.05.</a:t>
+              <a:t>2026.03.09.</a:t>
             </a:fld>
             <a:endParaRPr lang="hu-HU"/>
           </a:p>
@@ -2882,7 +2882,7 @@
           <a:p>
             <a:fld id="{DB0193E8-478D-464D-8400-8CD4306FD776}" type="datetimeFigureOut">
               <a:rPr lang="hu-HU" smtClean="0"/>
-              <a:t>2026.03.05.</a:t>
+              <a:t>2026.03.09.</a:t>
             </a:fld>
             <a:endParaRPr lang="hu-HU"/>
           </a:p>
@@ -3157,7 +3157,7 @@
           <a:p>
             <a:fld id="{DB0193E8-478D-464D-8400-8CD4306FD776}" type="datetimeFigureOut">
               <a:rPr lang="hu-HU" smtClean="0"/>
-              <a:t>2026.03.05.</a:t>
+              <a:t>2026.03.09.</a:t>
             </a:fld>
             <a:endParaRPr lang="hu-HU"/>
           </a:p>
@@ -3409,7 +3409,7 @@
           <a:p>
             <a:fld id="{DB0193E8-478D-464D-8400-8CD4306FD776}" type="datetimeFigureOut">
               <a:rPr lang="hu-HU" smtClean="0"/>
-              <a:t>2026.03.05.</a:t>
+              <a:t>2026.03.09.</a:t>
             </a:fld>
             <a:endParaRPr lang="hu-HU"/>
           </a:p>
@@ -3620,7 +3620,7 @@
           <a:p>
             <a:fld id="{DB0193E8-478D-464D-8400-8CD4306FD776}" type="datetimeFigureOut">
               <a:rPr lang="hu-HU" smtClean="0"/>
-              <a:t>2026.03.05.</a:t>
+              <a:t>2026.03.09.</a:t>
             </a:fld>
             <a:endParaRPr lang="hu-HU"/>
           </a:p>
@@ -15932,10 +15932,10 @@
       </p:pic>
       <p:pic>
         <p:nvPicPr>
-          <p:cNvPr id="10" name="Kép 9" descr="A képen szöveg, képernyőkép, Betűtípus, szám látható&#10;&#10;Lehet, hogy az AI által létrehozott tartalom helytelen.">
-            <a:extLst>
-              <a:ext uri="{FF2B5EF4-FFF2-40B4-BE49-F238E27FC236}">
-                <a16:creationId xmlns:a16="http://schemas.microsoft.com/office/drawing/2014/main" id="{9916CC0D-5D4A-FD74-1255-157D92D3E468}"/>
+          <p:cNvPr id="14" name="Kép 13" descr="A képen gyertya látható&#10;&#10;Lehet, hogy az AI által létrehozott tartalom helytelen.">
+            <a:extLst>
+              <a:ext uri="{FF2B5EF4-FFF2-40B4-BE49-F238E27FC236}">
+                <a16:creationId xmlns:a16="http://schemas.microsoft.com/office/drawing/2014/main" id="{3445EA1B-E319-D9F3-1869-364DD3711A90}"/>
               </a:ext>
             </a:extLst>
           </p:cNvPr>
@@ -15952,25 +15952,23 @@
         </p:blipFill>
         <p:spPr>
           <a:xfrm>
-            <a:off x="6681445" y="950945"/>
-            <a:ext cx="3595124" cy="3236200"/>
-          </a:xfrm>
-          <a:prstGeom prst="rect">
-            <a:avLst/>
-          </a:prstGeom>
-          <a:ln w="38100">
-            <a:solidFill>
-              <a:schemeClr val="accent1">
-                <a:lumMod val="40000"/>
-                <a:lumOff val="60000"/>
-              </a:schemeClr>
-            </a:solidFill>
-          </a:ln>
+            <a:off x="87751" y="58187"/>
+            <a:ext cx="722857" cy="707199"/>
+          </a:xfrm>
+          <a:prstGeom prst="rect">
+            <a:avLst/>
+          </a:prstGeom>
         </p:spPr>
       </p:pic>
       <p:pic>
         <p:nvPicPr>
-          <p:cNvPr id="11" name="Kép 10"/>
+          <p:cNvPr id="5" name="Kép 4">
+            <a:extLst>
+              <a:ext uri="{FF2B5EF4-FFF2-40B4-BE49-F238E27FC236}">
+                <a16:creationId xmlns:a16="http://schemas.microsoft.com/office/drawing/2014/main" id="{1439F54F-BB15-44A1-93A9-83950CF12659}"/>
+              </a:ext>
+            </a:extLst>
+          </p:cNvPr>
           <p:cNvPicPr>
             <a:picLocks noChangeAspect="1"/>
           </p:cNvPicPr>
@@ -15984,28 +15982,20 @@
         </p:blipFill>
         <p:spPr>
           <a:xfrm>
-            <a:off x="1782654" y="950945"/>
-            <a:ext cx="3189432" cy="4123326"/>
-          </a:xfrm>
-          <a:prstGeom prst="rect">
-            <a:avLst/>
-          </a:prstGeom>
-          <a:ln w="38100">
-            <a:solidFill>
-              <a:schemeClr val="accent1">
-                <a:lumMod val="40000"/>
-                <a:lumOff val="60000"/>
-              </a:schemeClr>
-            </a:solidFill>
-          </a:ln>
+            <a:off x="1502593" y="819150"/>
+            <a:ext cx="3078791" cy="4559088"/>
+          </a:xfrm>
+          <a:prstGeom prst="rect">
+            <a:avLst/>
+          </a:prstGeom>
         </p:spPr>
       </p:pic>
       <p:pic>
         <p:nvPicPr>
-          <p:cNvPr id="14" name="Kép 13" descr="A képen gyertya látható&#10;&#10;Lehet, hogy az AI által létrehozott tartalom helytelen.">
-            <a:extLst>
-              <a:ext uri="{FF2B5EF4-FFF2-40B4-BE49-F238E27FC236}">
-                <a16:creationId xmlns:a16="http://schemas.microsoft.com/office/drawing/2014/main" id="{3445EA1B-E319-D9F3-1869-364DD3711A90}"/>
+          <p:cNvPr id="12" name="Kép 11">
+            <a:extLst>
+              <a:ext uri="{FF2B5EF4-FFF2-40B4-BE49-F238E27FC236}">
+                <a16:creationId xmlns:a16="http://schemas.microsoft.com/office/drawing/2014/main" id="{E7A429B8-4758-41AF-8528-08A54D09B812}"/>
               </a:ext>
             </a:extLst>
           </p:cNvPr>
@@ -16022,8 +16012,8 @@
         </p:blipFill>
         <p:spPr>
           <a:xfrm>
-            <a:off x="87751" y="58187"/>
-            <a:ext cx="722857" cy="707199"/>
+            <a:off x="6602537" y="956899"/>
+            <a:ext cx="3345015" cy="3381707"/>
           </a:xfrm>
           <a:prstGeom prst="rect">
             <a:avLst/>

--- a/DózsaCsárda_PA_FB_PG.pptx
+++ b/DózsaCsárda_PA_FB_PG.pptx
@@ -839,7 +839,7 @@
           <a:p>
             <a:fld id="{1F6FFA99-551E-45B4-8370-7EE47DE7A2D9}" type="datetimeFigureOut">
               <a:rPr lang="hu-HU" smtClean="0"/>
-              <a:t>2026.03.09.</a:t>
+              <a:t>2026.03.10.</a:t>
             </a:fld>
             <a:endParaRPr lang="hu-HU"/>
           </a:p>
@@ -1319,7 +1319,7 @@
           <a:p>
             <a:fld id="{DB0193E8-478D-464D-8400-8CD4306FD776}" type="datetimeFigureOut">
               <a:rPr lang="hu-HU" smtClean="0"/>
-              <a:t>2026.03.09.</a:t>
+              <a:t>2026.03.10.</a:t>
             </a:fld>
             <a:endParaRPr lang="hu-HU"/>
           </a:p>
@@ -1487,7 +1487,7 @@
           <a:p>
             <a:fld id="{DB0193E8-478D-464D-8400-8CD4306FD776}" type="datetimeFigureOut">
               <a:rPr lang="hu-HU" smtClean="0"/>
-              <a:t>2026.03.09.</a:t>
+              <a:t>2026.03.10.</a:t>
             </a:fld>
             <a:endParaRPr lang="hu-HU"/>
           </a:p>
@@ -1665,7 +1665,7 @@
           <a:p>
             <a:fld id="{DB0193E8-478D-464D-8400-8CD4306FD776}" type="datetimeFigureOut">
               <a:rPr lang="hu-HU" smtClean="0"/>
-              <a:t>2026.03.09.</a:t>
+              <a:t>2026.03.10.</a:t>
             </a:fld>
             <a:endParaRPr lang="hu-HU"/>
           </a:p>
@@ -1833,7 +1833,7 @@
           <a:p>
             <a:fld id="{DB0193E8-478D-464D-8400-8CD4306FD776}" type="datetimeFigureOut">
               <a:rPr lang="hu-HU" smtClean="0"/>
-              <a:t>2026.03.09.</a:t>
+              <a:t>2026.03.10.</a:t>
             </a:fld>
             <a:endParaRPr lang="hu-HU"/>
           </a:p>
@@ -2078,7 +2078,7 @@
           <a:p>
             <a:fld id="{DB0193E8-478D-464D-8400-8CD4306FD776}" type="datetimeFigureOut">
               <a:rPr lang="hu-HU" smtClean="0"/>
-              <a:t>2026.03.09.</a:t>
+              <a:t>2026.03.10.</a:t>
             </a:fld>
             <a:endParaRPr lang="hu-HU"/>
           </a:p>
@@ -2307,7 +2307,7 @@
           <a:p>
             <a:fld id="{DB0193E8-478D-464D-8400-8CD4306FD776}" type="datetimeFigureOut">
               <a:rPr lang="hu-HU" smtClean="0"/>
-              <a:t>2026.03.09.</a:t>
+              <a:t>2026.03.10.</a:t>
             </a:fld>
             <a:endParaRPr lang="hu-HU"/>
           </a:p>
@@ -2671,7 +2671,7 @@
           <a:p>
             <a:fld id="{DB0193E8-478D-464D-8400-8CD4306FD776}" type="datetimeFigureOut">
               <a:rPr lang="hu-HU" smtClean="0"/>
-              <a:t>2026.03.09.</a:t>
+              <a:t>2026.03.10.</a:t>
             </a:fld>
             <a:endParaRPr lang="hu-HU"/>
           </a:p>
@@ -2788,7 +2788,7 @@
           <a:p>
             <a:fld id="{DB0193E8-478D-464D-8400-8CD4306FD776}" type="datetimeFigureOut">
               <a:rPr lang="hu-HU" smtClean="0"/>
-              <a:t>2026.03.09.</a:t>
+              <a:t>2026.03.10.</a:t>
             </a:fld>
             <a:endParaRPr lang="hu-HU"/>
           </a:p>
@@ -2883,7 +2883,7 @@
           <a:p>
             <a:fld id="{DB0193E8-478D-464D-8400-8CD4306FD776}" type="datetimeFigureOut">
               <a:rPr lang="hu-HU" smtClean="0"/>
-              <a:t>2026.03.09.</a:t>
+              <a:t>2026.03.10.</a:t>
             </a:fld>
             <a:endParaRPr lang="hu-HU"/>
           </a:p>
@@ -3158,7 +3158,7 @@
           <a:p>
             <a:fld id="{DB0193E8-478D-464D-8400-8CD4306FD776}" type="datetimeFigureOut">
               <a:rPr lang="hu-HU" smtClean="0"/>
-              <a:t>2026.03.09.</a:t>
+              <a:t>2026.03.10.</a:t>
             </a:fld>
             <a:endParaRPr lang="hu-HU"/>
           </a:p>
@@ -3410,7 +3410,7 @@
           <a:p>
             <a:fld id="{DB0193E8-478D-464D-8400-8CD4306FD776}" type="datetimeFigureOut">
               <a:rPr lang="hu-HU" smtClean="0"/>
-              <a:t>2026.03.09.</a:t>
+              <a:t>2026.03.10.</a:t>
             </a:fld>
             <a:endParaRPr lang="hu-HU"/>
           </a:p>
@@ -3621,7 +3621,7 @@
           <a:p>
             <a:fld id="{DB0193E8-478D-464D-8400-8CD4306FD776}" type="datetimeFigureOut">
               <a:rPr lang="hu-HU" smtClean="0"/>
-              <a:t>2026.03.09.</a:t>
+              <a:t>2026.03.10.</a:t>
             </a:fld>
             <a:endParaRPr lang="hu-HU"/>
           </a:p>
@@ -9338,7 +9338,7 @@
             </a:pPr>
             <a:r>
               <a:rPr lang="hu-HU" dirty="0"/>
-              <a:t>A kitakart lakcímet javítani</a:t>
+              <a:t>A kitakart lakcímet javítani(Adatbázisba ki van javítva)</a:t>
             </a:r>
           </a:p>
           <a:p>
